--- a/NAFEncoderLSNet_architecture.pptx
+++ b/NAFEncoderLSNet_architecture.pptx
@@ -2,20 +2,20 @@
 <file path=ppt/presentation.xml><?xml version="1.0" encoding="utf-8"?>
 <p:presentation xmlns:p="http://schemas.openxmlformats.org/presentationml/2006/main">
   <p:sldMasterIdLst>
-    <p:sldMasterId xmlns:r="http://schemas.openxmlformats.org/officeDocument/2006/relationships" id="2147483648" r:id="R87b2235203204e81"/>
+    <p:sldMasterId xmlns:r="http://schemas.openxmlformats.org/officeDocument/2006/relationships" id="2147483648" r:id="Reb3946884f0e48c9"/>
   </p:sldMasterIdLst>
   <p:notesMasterIdLst>
-    <p:notesMasterId xmlns:r="http://schemas.openxmlformats.org/officeDocument/2006/relationships" r:id="Rddcd9c7ff16c4026"/>
+    <p:notesMasterId xmlns:r="http://schemas.openxmlformats.org/officeDocument/2006/relationships" r:id="Rdec492d87a8e4a27"/>
   </p:notesMasterIdLst>
   <p:sldIdLst>
-    <p:sldId xmlns:r="http://schemas.openxmlformats.org/officeDocument/2006/relationships" id="256" r:id="R529f27239f3049a9"/>
-    <p:sldId xmlns:r="http://schemas.openxmlformats.org/officeDocument/2006/relationships" id="257" r:id="R64631c2ce93b4018"/>
-    <p:sldId xmlns:r="http://schemas.openxmlformats.org/officeDocument/2006/relationships" id="258" r:id="R9f8730ee885c414e"/>
-    <p:sldId xmlns:r="http://schemas.openxmlformats.org/officeDocument/2006/relationships" id="259" r:id="R1e314f11249b4b0e"/>
-    <p:sldId xmlns:r="http://schemas.openxmlformats.org/officeDocument/2006/relationships" id="260" r:id="R6036454b7e0d4b71"/>
-    <p:sldId xmlns:r="http://schemas.openxmlformats.org/officeDocument/2006/relationships" id="261" r:id="R4840cf186af2424d"/>
-    <p:sldId xmlns:r="http://schemas.openxmlformats.org/officeDocument/2006/relationships" id="262" r:id="R6f83c0f12cd44a25"/>
-    <p:sldId xmlns:r="http://schemas.openxmlformats.org/officeDocument/2006/relationships" id="263" r:id="R68bbe1c6c3be4ab9"/>
+    <p:sldId xmlns:r="http://schemas.openxmlformats.org/officeDocument/2006/relationships" id="256" r:id="Rd372f38700d44beb"/>
+    <p:sldId xmlns:r="http://schemas.openxmlformats.org/officeDocument/2006/relationships" id="257" r:id="Rcd2bc2d9cf7d4e61"/>
+    <p:sldId xmlns:r="http://schemas.openxmlformats.org/officeDocument/2006/relationships" id="258" r:id="R8156b1f26c344efd"/>
+    <p:sldId xmlns:r="http://schemas.openxmlformats.org/officeDocument/2006/relationships" id="259" r:id="Ra8fcf1034d34490b"/>
+    <p:sldId xmlns:r="http://schemas.openxmlformats.org/officeDocument/2006/relationships" id="260" r:id="Ree6f49e6ca024a8b"/>
+    <p:sldId xmlns:r="http://schemas.openxmlformats.org/officeDocument/2006/relationships" id="261" r:id="Re8e6a63dc8544ce9"/>
+    <p:sldId xmlns:r="http://schemas.openxmlformats.org/officeDocument/2006/relationships" id="262" r:id="R4b6f8c46cc154327"/>
+    <p:sldId xmlns:r="http://schemas.openxmlformats.org/officeDocument/2006/relationships" id="263" r:id="Rf63a19d7b97147c3"/>
   </p:sldIdLst>
   <p:sldSz cx="12192000" cy="6858000"/>
   <p:notesSz cx="6858000" cy="9144000"/>
@@ -1024,7 +1024,7 @@
   </p:cSld>
   <p:clrMap bg1="lt1" tx1="dk1" bg2="lt2" tx2="dk2" accent1="accent1" accent2="accent2" accent3="accent3" accent4="accent4" accent5="accent5" accent6="accent6" hlink="hlink" folHlink="folHlink"/>
   <p:sldLayoutIdLst>
-    <p:sldLayoutId xmlns:r="http://schemas.openxmlformats.org/officeDocument/2006/relationships" id="2147483649" r:id="R0d02ad3ebfbf4083"/>
+    <p:sldLayoutId xmlns:r="http://schemas.openxmlformats.org/officeDocument/2006/relationships" id="2147483649" r:id="R5dd891c6e821476d"/>
   </p:sldLayoutIdLst>
   <p:txStyles>
     <p:titleStyle>
@@ -1330,7 +1330,7 @@
           <p:cNvPr id="1" name="">
             <a:extLst xmlns:a="http://schemas.openxmlformats.org/drawingml/2006/main">
               <a:ext uri="{FF2B5EF4-FFF2-40B4-BE49-F238E27FC236}">
-                <a16:creationId xmlns:a16="http://schemas.microsoft.com/office/drawing/2014/main" id="{AE32EC1C-66E0-4ED9-A12E-6ACB442F6D64}"/>
+                <a16:creationId xmlns:a16="http://schemas.microsoft.com/office/drawing/2014/main" id="{73ED148D-BF91-4FD3-A59F-9931E2542CD1}"/>
               </a:ext>
             </a:extLst>
           </p:cNvPr>
@@ -1363,7 +1363,7 @@
           <p:cNvPr id="2" name="">
             <a:extLst xmlns:a="http://schemas.openxmlformats.org/drawingml/2006/main">
               <a:ext uri="{FF2B5EF4-FFF2-40B4-BE49-F238E27FC236}">
-                <a16:creationId xmlns:a16="http://schemas.microsoft.com/office/drawing/2014/main" id="{71F2FBF1-B38E-4988-8BB1-A6805BA152E9}"/>
+                <a16:creationId xmlns:a16="http://schemas.microsoft.com/office/drawing/2014/main" id="{26A91C9F-E02C-4A1F-9CC3-26B056924986}"/>
               </a:ext>
             </a:extLst>
           </p:cNvPr>
@@ -1403,9 +1403,9 @@
                 <a:solidFill>
                   <a:srgbClr val="5B6472"/>
                 </a:solidFill>
-                <a:latin typeface="Microsoft YaHei"/>
-                <a:ea typeface="Microsoft YaHei"/>
-                <a:cs typeface="Microsoft YaHei"/>
+                <a:latin typeface="Aptos"/>
+                <a:ea typeface="Aptos"/>
+                <a:cs typeface="Aptos"/>
               </a:defRPr>
             </a:pPr>
             <a:r>
@@ -1413,9 +1413,9 @@
                 <a:solidFill>
                   <a:srgbClr val="5B6472"/>
                 </a:solidFill>
-                <a:latin typeface="Microsoft YaHei"/>
-                <a:ea typeface="Microsoft YaHei"/>
-                <a:cs typeface="Microsoft YaHei"/>
+                <a:latin typeface="Aptos"/>
+                <a:ea typeface="Aptos"/>
+                <a:cs typeface="Aptos"/>
               </a:rPr>
               <a:t>NAFEncoderLSNet | 01</a:t>
             </a:r>
@@ -1427,7 +1427,7 @@
           <p:cNvPr id="3" name="">
             <a:extLst xmlns:a="http://schemas.openxmlformats.org/drawingml/2006/main">
               <a:ext uri="{FF2B5EF4-FFF2-40B4-BE49-F238E27FC236}">
-                <a16:creationId xmlns:a16="http://schemas.microsoft.com/office/drawing/2014/main" id="{A080E372-333A-4FD9-8BB7-9AF7FE19D120}"/>
+                <a16:creationId xmlns:a16="http://schemas.microsoft.com/office/drawing/2014/main" id="{84F4A22A-3663-438E-9CA7-013AB83298D9}"/>
               </a:ext>
             </a:extLst>
           </p:cNvPr>
@@ -1439,7 +1439,7 @@
         <p:spPr>
           <a:xfrm xmlns:a="http://schemas.openxmlformats.org/drawingml/2006/main">
             <a:off x="609600" y="838200"/>
-            <a:ext cx="6858000" cy="666750"/>
+            <a:ext cx="7429500" cy="666750"/>
           </a:xfrm>
           <a:prstGeom xmlns:a="http://schemas.openxmlformats.org/drawingml/2006/main" prst="rect">
             <a:avLst/>
@@ -1467,9 +1467,9 @@
                 <a:solidFill>
                   <a:srgbClr val="111827"/>
                 </a:solidFill>
-                <a:latin typeface="Microsoft YaHei UI"/>
-                <a:ea typeface="Microsoft YaHei UI"/>
-                <a:cs typeface="Microsoft YaHei UI"/>
+                <a:latin typeface="Aptos Display"/>
+                <a:ea typeface="Aptos Display"/>
+                <a:cs typeface="Aptos Display"/>
               </a:defRPr>
             </a:pPr>
             <a:r>
@@ -1477,11 +1477,11 @@
                 <a:solidFill>
                   <a:srgbClr val="111827"/>
                 </a:solidFill>
-                <a:latin typeface="Microsoft YaHei UI"/>
-                <a:ea typeface="Microsoft YaHei UI"/>
-                <a:cs typeface="Microsoft YaHei UI"/>
-              </a:rPr>
-              <a:t>NAFEncoderLSNet 架构</a:t>
+                <a:latin typeface="Aptos Display"/>
+                <a:ea typeface="Aptos Display"/>
+                <a:cs typeface="Aptos Display"/>
+              </a:rPr>
+              <a:t>NAFEncoderLSNet Architecture</a:t>
             </a:r>
           </a:p>
         </p:txBody>
@@ -1491,7 +1491,7 @@
           <p:cNvPr id="4" name="">
             <a:extLst xmlns:a="http://schemas.openxmlformats.org/drawingml/2006/main">
               <a:ext uri="{FF2B5EF4-FFF2-40B4-BE49-F238E27FC236}">
-                <a16:creationId xmlns:a16="http://schemas.microsoft.com/office/drawing/2014/main" id="{CF7F9ED1-AECE-4311-A3D7-BD2A928F3DEA}"/>
+                <a16:creationId xmlns:a16="http://schemas.microsoft.com/office/drawing/2014/main" id="{054C8CA4-FC1D-4864-8F25-E58718830799}"/>
               </a:ext>
             </a:extLst>
           </p:cNvPr>
@@ -1531,9 +1531,9 @@
                 <a:solidFill>
                   <a:srgbClr val="5B6472"/>
                 </a:solidFill>
-                <a:latin typeface="Microsoft YaHei"/>
-                <a:ea typeface="Microsoft YaHei"/>
-                <a:cs typeface="Microsoft YaHei"/>
+                <a:latin typeface="Aptos"/>
+                <a:ea typeface="Aptos"/>
+                <a:cs typeface="Aptos"/>
               </a:defRPr>
             </a:pPr>
             <a:r>
@@ -1541,9 +1541,9 @@
                 <a:solidFill>
                   <a:srgbClr val="5B6472"/>
                 </a:solidFill>
-                <a:latin typeface="Microsoft YaHei"/>
-                <a:ea typeface="Microsoft YaHei"/>
-                <a:cs typeface="Microsoft YaHei"/>
+                <a:latin typeface="Aptos"/>
+                <a:ea typeface="Aptos"/>
+                <a:cs typeface="Aptos"/>
               </a:rPr>
               <a:t>Encoder-only NAF backbone + LS recovery parameter heads</a:t>
             </a:r>
@@ -1555,7 +1555,7 @@
           <p:cNvPr id="5" name="">
             <a:extLst xmlns:a="http://schemas.openxmlformats.org/drawingml/2006/main">
               <a:ext uri="{FF2B5EF4-FFF2-40B4-BE49-F238E27FC236}">
-                <a16:creationId xmlns:a16="http://schemas.microsoft.com/office/drawing/2014/main" id="{E6C8F08B-FA70-4B66-AEC5-C29EADDB6F00}"/>
+                <a16:creationId xmlns:a16="http://schemas.microsoft.com/office/drawing/2014/main" id="{AF60DDA0-BA1B-48D9-BD45-90A3D78320AE}"/>
               </a:ext>
             </a:extLst>
           </p:cNvPr>
@@ -1593,9 +1593,9 @@
                 <a:solidFill>
                   <a:srgbClr val="111827"/>
                 </a:solidFill>
-                <a:latin typeface="Microsoft YaHei"/>
-                <a:ea typeface="Microsoft YaHei"/>
-                <a:cs typeface="Microsoft YaHei"/>
+                <a:latin typeface="Aptos"/>
+                <a:ea typeface="Aptos"/>
+                <a:cs typeface="Aptos"/>
               </a:defRPr>
             </a:pPr>
             <a:r>
@@ -1603,9 +1603,9 @@
                 <a:solidFill>
                   <a:srgbClr val="111827"/>
                 </a:solidFill>
-                <a:latin typeface="Microsoft YaHei"/>
-                <a:ea typeface="Microsoft YaHei"/>
-                <a:cs typeface="Microsoft YaHei"/>
+                <a:latin typeface="Aptos"/>
+                <a:ea typeface="Aptos"/>
+                <a:cs typeface="Aptos"/>
               </a:rPr>
               <a:t>Input adapter</a:t>
             </a:r>
@@ -1616,9 +1616,9 @@
                 <a:solidFill>
                   <a:srgbClr val="111827"/>
                 </a:solidFill>
-                <a:latin typeface="Microsoft YaHei"/>
-                <a:ea typeface="Microsoft YaHei"/>
-                <a:cs typeface="Microsoft YaHei"/>
+                <a:latin typeface="Aptos"/>
+                <a:ea typeface="Aptos"/>
+                <a:cs typeface="Aptos"/>
               </a:defRPr>
             </a:pPr>
             <a:r>
@@ -1626,9 +1626,9 @@
                 <a:solidFill>
                   <a:srgbClr val="111827"/>
                 </a:solidFill>
-                <a:latin typeface="Microsoft YaHei"/>
-                <a:ea typeface="Microsoft YaHei"/>
-                <a:cs typeface="Microsoft YaHei"/>
+                <a:latin typeface="Aptos"/>
+                <a:ea typeface="Aptos"/>
+                <a:cs typeface="Aptos"/>
               </a:rPr>
               <a:t>B x C_in x N_sc x T</a:t>
             </a:r>
@@ -1640,7 +1640,7 @@
           <p:cNvPr id="6" name="">
             <a:extLst xmlns:a="http://schemas.openxmlformats.org/drawingml/2006/main">
               <a:ext uri="{FF2B5EF4-FFF2-40B4-BE49-F238E27FC236}">
-                <a16:creationId xmlns:a16="http://schemas.microsoft.com/office/drawing/2014/main" id="{96E2E8CC-38D2-43A2-A9C8-D2442F0244A8}"/>
+                <a16:creationId xmlns:a16="http://schemas.microsoft.com/office/drawing/2014/main" id="{4D90AC50-4E76-481F-AFBE-A30242FC1A32}"/>
               </a:ext>
             </a:extLst>
           </p:cNvPr>
@@ -1673,7 +1673,7 @@
           <p:cNvPr id="7" name="">
             <a:extLst xmlns:a="http://schemas.openxmlformats.org/drawingml/2006/main">
               <a:ext uri="{FF2B5EF4-FFF2-40B4-BE49-F238E27FC236}">
-                <a16:creationId xmlns:a16="http://schemas.microsoft.com/office/drawing/2014/main" id="{51B40F50-6598-4AFF-8E8F-5C4159AEDE4C}"/>
+                <a16:creationId xmlns:a16="http://schemas.microsoft.com/office/drawing/2014/main" id="{40A476EA-F467-4888-90C5-3D131ED4C006}"/>
               </a:ext>
             </a:extLst>
           </p:cNvPr>
@@ -1711,9 +1711,9 @@
                 <a:solidFill>
                   <a:srgbClr val="111827"/>
                 </a:solidFill>
-                <a:latin typeface="Microsoft YaHei"/>
-                <a:ea typeface="Microsoft YaHei"/>
-                <a:cs typeface="Microsoft YaHei"/>
+                <a:latin typeface="Aptos"/>
+                <a:ea typeface="Aptos"/>
+                <a:cs typeface="Aptos"/>
               </a:defRPr>
             </a:pPr>
             <a:r>
@@ -1721,9 +1721,9 @@
                 <a:solidFill>
                   <a:srgbClr val="111827"/>
                 </a:solidFill>
-                <a:latin typeface="Microsoft YaHei"/>
-                <a:ea typeface="Microsoft YaHei"/>
-                <a:cs typeface="Microsoft YaHei"/>
+                <a:latin typeface="Aptos"/>
+                <a:ea typeface="Aptos"/>
+                <a:cs typeface="Aptos"/>
               </a:rPr>
               <a:t>NAF Encoder</a:t>
             </a:r>
@@ -1734,9 +1734,9 @@
                 <a:solidFill>
                   <a:srgbClr val="111827"/>
                 </a:solidFill>
-                <a:latin typeface="Microsoft YaHei"/>
-                <a:ea typeface="Microsoft YaHei"/>
-                <a:cs typeface="Microsoft YaHei"/>
+                <a:latin typeface="Aptos"/>
+                <a:ea typeface="Aptos"/>
+                <a:cs typeface="Aptos"/>
               </a:defRPr>
             </a:pPr>
             <a:r>
@@ -1744,9 +1744,9 @@
                 <a:solidFill>
                   <a:srgbClr val="111827"/>
                 </a:solidFill>
-                <a:latin typeface="Microsoft YaHei"/>
-                <a:ea typeface="Microsoft YaHei"/>
-                <a:cs typeface="Microsoft YaHei"/>
+                <a:latin typeface="Aptos"/>
+                <a:ea typeface="Aptos"/>
+                <a:cs typeface="Aptos"/>
               </a:rPr>
               <a:t>stem + 2 downsamples</a:t>
             </a:r>
@@ -1758,7 +1758,7 @@
           <p:cNvPr id="8" name="">
             <a:extLst xmlns:a="http://schemas.openxmlformats.org/drawingml/2006/main">
               <a:ext uri="{FF2B5EF4-FFF2-40B4-BE49-F238E27FC236}">
-                <a16:creationId xmlns:a16="http://schemas.microsoft.com/office/drawing/2014/main" id="{B04FEE05-3DCF-45E7-A504-15C6ECF8DA64}"/>
+                <a16:creationId xmlns:a16="http://schemas.microsoft.com/office/drawing/2014/main" id="{F381641B-4478-4B5A-AA4B-B7B28D44244A}"/>
               </a:ext>
             </a:extLst>
           </p:cNvPr>
@@ -1791,7 +1791,7 @@
           <p:cNvPr id="9" name="">
             <a:extLst xmlns:a="http://schemas.openxmlformats.org/drawingml/2006/main">
               <a:ext uri="{FF2B5EF4-FFF2-40B4-BE49-F238E27FC236}">
-                <a16:creationId xmlns:a16="http://schemas.microsoft.com/office/drawing/2014/main" id="{00421C37-D13A-4D8F-8D17-B94CAD48A01E}"/>
+                <a16:creationId xmlns:a16="http://schemas.microsoft.com/office/drawing/2014/main" id="{50EB3274-4680-479F-B975-F7453344791F}"/>
               </a:ext>
             </a:extLst>
           </p:cNvPr>
@@ -1829,9 +1829,9 @@
                 <a:solidFill>
                   <a:srgbClr val="111827"/>
                 </a:solidFill>
-                <a:latin typeface="Microsoft YaHei"/>
-                <a:ea typeface="Microsoft YaHei"/>
-                <a:cs typeface="Microsoft YaHei"/>
+                <a:latin typeface="Aptos"/>
+                <a:ea typeface="Aptos"/>
+                <a:cs typeface="Aptos"/>
               </a:defRPr>
             </a:pPr>
             <a:r>
@@ -1839,9 +1839,9 @@
                 <a:solidFill>
                   <a:srgbClr val="111827"/>
                 </a:solidFill>
-                <a:latin typeface="Microsoft YaHei"/>
-                <a:ea typeface="Microsoft YaHei"/>
-                <a:cs typeface="Microsoft YaHei"/>
+                <a:latin typeface="Aptos"/>
+                <a:ea typeface="Aptos"/>
+                <a:cs typeface="Aptos"/>
               </a:rPr>
               <a:t>Bottleneck</a:t>
             </a:r>
@@ -1852,9 +1852,9 @@
                 <a:solidFill>
                   <a:srgbClr val="111827"/>
                 </a:solidFill>
-                <a:latin typeface="Microsoft YaHei"/>
-                <a:ea typeface="Microsoft YaHei"/>
-                <a:cs typeface="Microsoft YaHei"/>
+                <a:latin typeface="Aptos"/>
+                <a:ea typeface="Aptos"/>
+                <a:cs typeface="Aptos"/>
               </a:defRPr>
             </a:pPr>
             <a:r>
@@ -1862,9 +1862,9 @@
                 <a:solidFill>
                   <a:srgbClr val="111827"/>
                 </a:solidFill>
-                <a:latin typeface="Microsoft YaHei"/>
-                <a:ea typeface="Microsoft YaHei"/>
-                <a:cs typeface="Microsoft YaHei"/>
+                <a:latin typeface="Aptos"/>
+                <a:ea typeface="Aptos"/>
+                <a:cs typeface="Aptos"/>
               </a:rPr>
               <a:t>B x 4C x N_sc/4 x T/4</a:t>
             </a:r>
@@ -1876,7 +1876,7 @@
           <p:cNvPr id="10" name="">
             <a:extLst xmlns:a="http://schemas.openxmlformats.org/drawingml/2006/main">
               <a:ext uri="{FF2B5EF4-FFF2-40B4-BE49-F238E27FC236}">
-                <a16:creationId xmlns:a16="http://schemas.microsoft.com/office/drawing/2014/main" id="{E51FEE0E-457E-455E-A2E8-FAFC0ADB4A34}"/>
+                <a16:creationId xmlns:a16="http://schemas.microsoft.com/office/drawing/2014/main" id="{3F1A4CC9-A45E-484C-B882-1682DD4D122A}"/>
               </a:ext>
             </a:extLst>
           </p:cNvPr>
@@ -1909,7 +1909,7 @@
           <p:cNvPr id="11" name="">
             <a:extLst xmlns:a="http://schemas.openxmlformats.org/drawingml/2006/main">
               <a:ext uri="{FF2B5EF4-FFF2-40B4-BE49-F238E27FC236}">
-                <a16:creationId xmlns:a16="http://schemas.microsoft.com/office/drawing/2014/main" id="{EAE46B67-79E8-4B0C-9FEA-766491AB8B2B}"/>
+                <a16:creationId xmlns:a16="http://schemas.microsoft.com/office/drawing/2014/main" id="{19201A9C-5F21-4F67-BF0B-F028B8CF01D1}"/>
               </a:ext>
             </a:extLst>
           </p:cNvPr>
@@ -1947,9 +1947,9 @@
                 <a:solidFill>
                   <a:srgbClr val="111827"/>
                 </a:solidFill>
-                <a:latin typeface="Microsoft YaHei"/>
-                <a:ea typeface="Microsoft YaHei"/>
-                <a:cs typeface="Microsoft YaHei"/>
+                <a:latin typeface="Aptos"/>
+                <a:ea typeface="Aptos"/>
+                <a:cs typeface="Aptos"/>
               </a:defRPr>
             </a:pPr>
             <a:r>
@@ -1957,9 +1957,9 @@
                 <a:solidFill>
                   <a:srgbClr val="111827"/>
                 </a:solidFill>
-                <a:latin typeface="Microsoft YaHei"/>
-                <a:ea typeface="Microsoft YaHei"/>
-                <a:cs typeface="Microsoft YaHei"/>
+                <a:latin typeface="Aptos"/>
+                <a:ea typeface="Aptos"/>
+                <a:cs typeface="Aptos"/>
               </a:rPr>
               <a:t>Heads</a:t>
             </a:r>
@@ -1970,9 +1970,9 @@
                 <a:solidFill>
                   <a:srgbClr val="111827"/>
                 </a:solidFill>
-                <a:latin typeface="Microsoft YaHei"/>
-                <a:ea typeface="Microsoft YaHei"/>
-                <a:cs typeface="Microsoft YaHei"/>
+                <a:latin typeface="Aptos"/>
+                <a:ea typeface="Aptos"/>
+                <a:cs typeface="Aptos"/>
               </a:defRPr>
             </a:pPr>
             <a:r>
@@ -1980,9 +1980,9 @@
                 <a:solidFill>
                   <a:srgbClr val="111827"/>
                 </a:solidFill>
-                <a:latin typeface="Microsoft YaHei"/>
-                <a:ea typeface="Microsoft YaHei"/>
-                <a:cs typeface="Microsoft YaHei"/>
+                <a:latin typeface="Aptos"/>
+                <a:ea typeface="Aptos"/>
+                <a:cs typeface="Aptos"/>
               </a:rPr>
               <a:t>mu / rho / delta / alpha</a:t>
             </a:r>
@@ -1994,7 +1994,7 @@
           <p:cNvPr id="12" name="">
             <a:extLst xmlns:a="http://schemas.openxmlformats.org/drawingml/2006/main">
               <a:ext uri="{FF2B5EF4-FFF2-40B4-BE49-F238E27FC236}">
-                <a16:creationId xmlns:a16="http://schemas.microsoft.com/office/drawing/2014/main" id="{0B980E7F-19B9-4B6D-80EC-A10C4BE2D567}"/>
+                <a16:creationId xmlns:a16="http://schemas.microsoft.com/office/drawing/2014/main" id="{27C2180E-61D0-4F7C-A1BE-CAE6EFB782F1}"/>
               </a:ext>
             </a:extLst>
           </p:cNvPr>
@@ -2027,7 +2027,7 @@
           <p:cNvPr id="13" name="">
             <a:extLst xmlns:a="http://schemas.openxmlformats.org/drawingml/2006/main">
               <a:ext uri="{FF2B5EF4-FFF2-40B4-BE49-F238E27FC236}">
-                <a16:creationId xmlns:a16="http://schemas.microsoft.com/office/drawing/2014/main" id="{634748A1-0916-4565-B293-0CFC958BF151}"/>
+                <a16:creationId xmlns:a16="http://schemas.microsoft.com/office/drawing/2014/main" id="{2D1EFE10-F29E-45A9-819B-ED28F41DD5F5}"/>
               </a:ext>
             </a:extLst>
           </p:cNvPr>
@@ -2065,9 +2065,9 @@
                 <a:solidFill>
                   <a:srgbClr val="111827"/>
                 </a:solidFill>
-                <a:latin typeface="Microsoft YaHei"/>
-                <a:ea typeface="Microsoft YaHei"/>
-                <a:cs typeface="Microsoft YaHei"/>
+                <a:latin typeface="Aptos"/>
+                <a:ea typeface="Aptos"/>
+                <a:cs typeface="Aptos"/>
               </a:defRPr>
             </a:pPr>
             <a:r>
@@ -2075,9 +2075,9 @@
                 <a:solidFill>
                   <a:srgbClr val="111827"/>
                 </a:solidFill>
-                <a:latin typeface="Microsoft YaHei"/>
-                <a:ea typeface="Microsoft YaHei"/>
-                <a:cs typeface="Microsoft YaHei"/>
+                <a:latin typeface="Aptos"/>
+                <a:ea typeface="Aptos"/>
+                <a:cs typeface="Aptos"/>
               </a:rPr>
               <a:t>Output contract</a:t>
             </a:r>
@@ -2088,9 +2088,9 @@
                 <a:solidFill>
                   <a:srgbClr val="111827"/>
                 </a:solidFill>
-                <a:latin typeface="Microsoft YaHei"/>
-                <a:ea typeface="Microsoft YaHei"/>
-                <a:cs typeface="Microsoft YaHei"/>
+                <a:latin typeface="Aptos"/>
+                <a:ea typeface="Aptos"/>
+                <a:cs typeface="Aptos"/>
               </a:defRPr>
             </a:pPr>
             <a:r>
@@ -2098,9 +2098,9 @@
                 <a:solidFill>
                   <a:srgbClr val="111827"/>
                 </a:solidFill>
-                <a:latin typeface="Microsoft YaHei"/>
-                <a:ea typeface="Microsoft YaHei"/>
-                <a:cs typeface="Microsoft YaHei"/>
+                <a:latin typeface="Aptos"/>
+                <a:ea typeface="Aptos"/>
+                <a:cs typeface="Aptos"/>
               </a:rPr>
               <a:t>theta + alpha + path_prob</a:t>
             </a:r>
@@ -2112,7 +2112,7 @@
           <p:cNvPr id="14" name="">
             <a:extLst xmlns:a="http://schemas.openxmlformats.org/drawingml/2006/main">
               <a:ext uri="{FF2B5EF4-FFF2-40B4-BE49-F238E27FC236}">
-                <a16:creationId xmlns:a16="http://schemas.microsoft.com/office/drawing/2014/main" id="{9C903033-5134-4132-B6C1-3F42E9989676}"/>
+                <a16:creationId xmlns:a16="http://schemas.microsoft.com/office/drawing/2014/main" id="{80F577C3-B159-449D-AC45-FCA46D28DD47}"/>
               </a:ext>
             </a:extLst>
           </p:cNvPr>
@@ -2152,9 +2152,9 @@
                 <a:solidFill>
                   <a:srgbClr val="5B6472"/>
                 </a:solidFill>
-                <a:latin typeface="Microsoft YaHei"/>
-                <a:ea typeface="Microsoft YaHei"/>
-                <a:cs typeface="Microsoft YaHei"/>
+                <a:latin typeface="Aptos"/>
+                <a:ea typeface="Aptos"/>
+                <a:cs typeface="Aptos"/>
               </a:defRPr>
             </a:pPr>
             <a:r>
@@ -2162,11 +2162,11 @@
                 <a:solidFill>
                   <a:srgbClr val="5B6472"/>
                 </a:solidFill>
-                <a:latin typeface="Microsoft YaHei"/>
-                <a:ea typeface="Microsoft YaHei"/>
-                <a:cs typeface="Microsoft YaHei"/>
-              </a:rPr>
-              <a:t>讲述主线：不预测 G_hat，而是从压缩后的 bottleneck 直接估计物理参数，并交给 recoveryMode='ls_from_packed_theta' 做 LS 恢复。</a:t>
+                <a:latin typeface="Aptos"/>
+                <a:ea typeface="Aptos"/>
+                <a:cs typeface="Aptos"/>
+              </a:rPr>
+              <a:t>Narrative: the model does not predict G_hat. It estimates physical parameters directly from the compressed bottleneck and passes them to recoveryMode='ls_from_packed_theta' for LS recovery.</a:t>
             </a:r>
           </a:p>
         </p:txBody>
@@ -2174,7 +2174,7 @@
     </p:spTree>
     <p:extLst>
       <p:ext uri="{BB962C8B-B14F-4D97-AF65-F5344CB8AC3E}">
-        <p14:creationId xmlns:p14="http://schemas.microsoft.com/office/powerpoint/2010/main" val="2059374851"/>
+        <p14:creationId xmlns:p14="http://schemas.microsoft.com/office/powerpoint/2010/main" val="1020506202"/>
       </p:ext>
     </p:extLst>
   </p:cSld>
@@ -2205,7 +2205,7 @@
           <p:cNvPr id="1" name="">
             <a:extLst xmlns:a="http://schemas.openxmlformats.org/drawingml/2006/main">
               <a:ext uri="{FF2B5EF4-FFF2-40B4-BE49-F238E27FC236}">
-                <a16:creationId xmlns:a16="http://schemas.microsoft.com/office/drawing/2014/main" id="{18DEF2BA-9261-4DAA-9D19-4C7190C75B19}"/>
+                <a16:creationId xmlns:a16="http://schemas.microsoft.com/office/drawing/2014/main" id="{C208A1A5-48DE-4C53-96A2-6A0EEAA07409}"/>
               </a:ext>
             </a:extLst>
           </p:cNvPr>
@@ -2238,7 +2238,7 @@
           <p:cNvPr id="2" name="">
             <a:extLst xmlns:a="http://schemas.openxmlformats.org/drawingml/2006/main">
               <a:ext uri="{FF2B5EF4-FFF2-40B4-BE49-F238E27FC236}">
-                <a16:creationId xmlns:a16="http://schemas.microsoft.com/office/drawing/2014/main" id="{0B54B7C0-3731-4B68-90A7-03C3DACC20C8}"/>
+                <a16:creationId xmlns:a16="http://schemas.microsoft.com/office/drawing/2014/main" id="{6D94242B-F736-4FCA-927A-192B181080B8}"/>
               </a:ext>
             </a:extLst>
           </p:cNvPr>
@@ -2278,9 +2278,9 @@
                 <a:solidFill>
                   <a:srgbClr val="5B6472"/>
                 </a:solidFill>
-                <a:latin typeface="Microsoft YaHei"/>
-                <a:ea typeface="Microsoft YaHei"/>
-                <a:cs typeface="Microsoft YaHei"/>
+                <a:latin typeface="Aptos"/>
+                <a:ea typeface="Aptos"/>
+                <a:cs typeface="Aptos"/>
               </a:defRPr>
             </a:pPr>
             <a:r>
@@ -2288,9 +2288,9 @@
                 <a:solidFill>
                   <a:srgbClr val="5B6472"/>
                 </a:solidFill>
-                <a:latin typeface="Microsoft YaHei"/>
-                <a:ea typeface="Microsoft YaHei"/>
-                <a:cs typeface="Microsoft YaHei"/>
+                <a:latin typeface="Aptos"/>
+                <a:ea typeface="Aptos"/>
+                <a:cs typeface="Aptos"/>
               </a:rPr>
               <a:t>NAFEncoderLSNet | 02</a:t>
             </a:r>
@@ -2302,7 +2302,7 @@
           <p:cNvPr id="3" name="">
             <a:extLst xmlns:a="http://schemas.openxmlformats.org/drawingml/2006/main">
               <a:ext uri="{FF2B5EF4-FFF2-40B4-BE49-F238E27FC236}">
-                <a16:creationId xmlns:a16="http://schemas.microsoft.com/office/drawing/2014/main" id="{D544CCA6-6F6E-4575-8DC6-F562FCED8692}"/>
+                <a16:creationId xmlns:a16="http://schemas.microsoft.com/office/drawing/2014/main" id="{B84515D3-E862-4811-81FC-FC8931CA4AE7}"/>
               </a:ext>
             </a:extLst>
           </p:cNvPr>
@@ -2342,9 +2342,9 @@
                 <a:solidFill>
                   <a:srgbClr val="5B6472"/>
                 </a:solidFill>
-                <a:latin typeface="Microsoft YaHei"/>
-                <a:ea typeface="Microsoft YaHei"/>
-                <a:cs typeface="Microsoft YaHei"/>
+                <a:latin typeface="Aptos"/>
+                <a:ea typeface="Aptos"/>
+                <a:cs typeface="Aptos"/>
               </a:defRPr>
             </a:pPr>
             <a:r>
@@ -2352,9 +2352,9 @@
                 <a:solidFill>
                   <a:srgbClr val="5B6472"/>
                 </a:solidFill>
-                <a:latin typeface="Microsoft YaHei"/>
-                <a:ea typeface="Microsoft YaHei"/>
-                <a:cs typeface="Microsoft YaHei"/>
+                <a:latin typeface="Aptos"/>
+                <a:ea typeface="Aptos"/>
+                <a:cs typeface="Aptos"/>
               </a:rPr>
               <a:t>Initialization</a:t>
             </a:r>
@@ -2366,7 +2366,7 @@
           <p:cNvPr id="4" name="">
             <a:extLst xmlns:a="http://schemas.openxmlformats.org/drawingml/2006/main">
               <a:ext uri="{FF2B5EF4-FFF2-40B4-BE49-F238E27FC236}">
-                <a16:creationId xmlns:a16="http://schemas.microsoft.com/office/drawing/2014/main" id="{BE70A91C-2267-4BD7-AA84-351DB211DFA8}"/>
+                <a16:creationId xmlns:a16="http://schemas.microsoft.com/office/drawing/2014/main" id="{882C03D5-6DF2-4B16-8EE4-6E486D601CA2}"/>
               </a:ext>
             </a:extLst>
           </p:cNvPr>
@@ -2406,9 +2406,9 @@
                 <a:solidFill>
                   <a:srgbClr val="111827"/>
                 </a:solidFill>
-                <a:latin typeface="Microsoft YaHei UI"/>
-                <a:ea typeface="Microsoft YaHei UI"/>
-                <a:cs typeface="Microsoft YaHei UI"/>
+                <a:latin typeface="Aptos Display"/>
+                <a:ea typeface="Aptos Display"/>
+                <a:cs typeface="Aptos Display"/>
               </a:defRPr>
             </a:pPr>
             <a:r>
@@ -2416,11 +2416,11 @@
                 <a:solidFill>
                   <a:srgbClr val="111827"/>
                 </a:solidFill>
-                <a:latin typeface="Microsoft YaHei UI"/>
-                <a:ea typeface="Microsoft YaHei UI"/>
-                <a:cs typeface="Microsoft YaHei UI"/>
-              </a:rPr>
-              <a:t>配置入口与物理范围</a:t>
+                <a:latin typeface="Aptos Display"/>
+                <a:ea typeface="Aptos Display"/>
+                <a:cs typeface="Aptos Display"/>
+              </a:rPr>
+              <a:t>Configuration Inputs and Physical Ranges</a:t>
             </a:r>
           </a:p>
         </p:txBody>
@@ -2430,7 +2430,7 @@
           <p:cNvPr id="5" name="">
             <a:extLst xmlns:a="http://schemas.openxmlformats.org/drawingml/2006/main">
               <a:ext uri="{FF2B5EF4-FFF2-40B4-BE49-F238E27FC236}">
-                <a16:creationId xmlns:a16="http://schemas.microsoft.com/office/drawing/2014/main" id="{2AA89A34-71F0-433D-B64A-2E57DA7FE690}"/>
+                <a16:creationId xmlns:a16="http://schemas.microsoft.com/office/drawing/2014/main" id="{4FE9A84E-FF38-4EE3-8A15-917F1DBCF568}"/>
               </a:ext>
             </a:extLst>
           </p:cNvPr>
@@ -2463,7 +2463,7 @@
           <p:cNvPr id="6" name="">
             <a:extLst xmlns:a="http://schemas.openxmlformats.org/drawingml/2006/main">
               <a:ext uri="{FF2B5EF4-FFF2-40B4-BE49-F238E27FC236}">
-                <a16:creationId xmlns:a16="http://schemas.microsoft.com/office/drawing/2014/main" id="{F40C62CF-7A3B-4F1F-BDF0-0D9A17A44166}"/>
+                <a16:creationId xmlns:a16="http://schemas.microsoft.com/office/drawing/2014/main" id="{1723A36D-78AF-4D89-8A14-9DEEA80F7AF8}"/>
               </a:ext>
             </a:extLst>
           </p:cNvPr>
@@ -2496,7 +2496,7 @@
           <p:cNvPr id="7" name="">
             <a:extLst xmlns:a="http://schemas.openxmlformats.org/drawingml/2006/main">
               <a:ext uri="{FF2B5EF4-FFF2-40B4-BE49-F238E27FC236}">
-                <a16:creationId xmlns:a16="http://schemas.microsoft.com/office/drawing/2014/main" id="{C46A3293-8A6D-4C2C-8628-B12D2A3659F3}"/>
+                <a16:creationId xmlns:a16="http://schemas.microsoft.com/office/drawing/2014/main" id="{246CF4E5-CDCF-4C40-8EB3-957044E8B30A}"/>
               </a:ext>
             </a:extLst>
           </p:cNvPr>
@@ -2536,9 +2536,9 @@
                 <a:solidFill>
                   <a:srgbClr val="111827"/>
                 </a:solidFill>
-                <a:latin typeface="Microsoft YaHei"/>
-                <a:ea typeface="Microsoft YaHei"/>
-                <a:cs typeface="Microsoft YaHei"/>
+                <a:latin typeface="Aptos"/>
+                <a:ea typeface="Aptos"/>
+                <a:cs typeface="Aptos"/>
               </a:defRPr>
             </a:pPr>
             <a:r>
@@ -2546,11 +2546,11 @@
                 <a:solidFill>
                   <a:srgbClr val="111827"/>
                 </a:solidFill>
-                <a:latin typeface="Microsoft YaHei"/>
-                <a:ea typeface="Microsoft YaHei"/>
-                <a:cs typeface="Microsoft YaHei"/>
-              </a:rPr>
-              <a:t>变量</a:t>
+                <a:latin typeface="Aptos"/>
+                <a:ea typeface="Aptos"/>
+                <a:cs typeface="Aptos"/>
+              </a:rPr>
+              <a:t>Variable</a:t>
             </a:r>
           </a:p>
         </p:txBody>
@@ -2560,7 +2560,7 @@
           <p:cNvPr id="8" name="">
             <a:extLst xmlns:a="http://schemas.openxmlformats.org/drawingml/2006/main">
               <a:ext uri="{FF2B5EF4-FFF2-40B4-BE49-F238E27FC236}">
-                <a16:creationId xmlns:a16="http://schemas.microsoft.com/office/drawing/2014/main" id="{EB5AB93F-D945-43A6-8BA3-3AA3FDD05176}"/>
+                <a16:creationId xmlns:a16="http://schemas.microsoft.com/office/drawing/2014/main" id="{E8798F85-A5B1-42DB-80DC-974679DDD374}"/>
               </a:ext>
             </a:extLst>
           </p:cNvPr>
@@ -2593,7 +2593,7 @@
           <p:cNvPr id="9" name="">
             <a:extLst xmlns:a="http://schemas.openxmlformats.org/drawingml/2006/main">
               <a:ext uri="{FF2B5EF4-FFF2-40B4-BE49-F238E27FC236}">
-                <a16:creationId xmlns:a16="http://schemas.microsoft.com/office/drawing/2014/main" id="{76F52A53-2937-4C5B-A0E3-B1C9CD17071D}"/>
+                <a16:creationId xmlns:a16="http://schemas.microsoft.com/office/drawing/2014/main" id="{B577CB19-AF59-43EF-9012-DC4FC44C1D14}"/>
               </a:ext>
             </a:extLst>
           </p:cNvPr>
@@ -2633,9 +2633,9 @@
                 <a:solidFill>
                   <a:srgbClr val="111827"/>
                 </a:solidFill>
-                <a:latin typeface="Microsoft YaHei"/>
-                <a:ea typeface="Microsoft YaHei"/>
-                <a:cs typeface="Microsoft YaHei"/>
+                <a:latin typeface="Aptos"/>
+                <a:ea typeface="Aptos"/>
+                <a:cs typeface="Aptos"/>
               </a:defRPr>
             </a:pPr>
             <a:r>
@@ -2643,11 +2643,11 @@
                 <a:solidFill>
                   <a:srgbClr val="111827"/>
                 </a:solidFill>
-                <a:latin typeface="Microsoft YaHei"/>
-                <a:ea typeface="Microsoft YaHei"/>
-                <a:cs typeface="Microsoft YaHei"/>
-              </a:rPr>
-              <a:t>来源</a:t>
+                <a:latin typeface="Aptos"/>
+                <a:ea typeface="Aptos"/>
+                <a:cs typeface="Aptos"/>
+              </a:rPr>
+              <a:t>Source</a:t>
             </a:r>
           </a:p>
         </p:txBody>
@@ -2657,7 +2657,7 @@
           <p:cNvPr id="10" name="">
             <a:extLst xmlns:a="http://schemas.openxmlformats.org/drawingml/2006/main">
               <a:ext uri="{FF2B5EF4-FFF2-40B4-BE49-F238E27FC236}">
-                <a16:creationId xmlns:a16="http://schemas.microsoft.com/office/drawing/2014/main" id="{4CC89182-A66F-4292-B7DA-7670085E9C01}"/>
+                <a16:creationId xmlns:a16="http://schemas.microsoft.com/office/drawing/2014/main" id="{0380E2A6-14F5-4C29-A90D-C1A071DC5983}"/>
               </a:ext>
             </a:extLst>
           </p:cNvPr>
@@ -2690,7 +2690,7 @@
           <p:cNvPr id="11" name="">
             <a:extLst xmlns:a="http://schemas.openxmlformats.org/drawingml/2006/main">
               <a:ext uri="{FF2B5EF4-FFF2-40B4-BE49-F238E27FC236}">
-                <a16:creationId xmlns:a16="http://schemas.microsoft.com/office/drawing/2014/main" id="{E3FE7739-6B2E-49A1-9569-C68F94920416}"/>
+                <a16:creationId xmlns:a16="http://schemas.microsoft.com/office/drawing/2014/main" id="{BCB04FF6-86C5-4FE6-B78C-3AE443B12CE7}"/>
               </a:ext>
             </a:extLst>
           </p:cNvPr>
@@ -2730,9 +2730,9 @@
                 <a:solidFill>
                   <a:srgbClr val="111827"/>
                 </a:solidFill>
-                <a:latin typeface="Microsoft YaHei"/>
-                <a:ea typeface="Microsoft YaHei"/>
-                <a:cs typeface="Microsoft YaHei"/>
+                <a:latin typeface="Aptos"/>
+                <a:ea typeface="Aptos"/>
+                <a:cs typeface="Aptos"/>
               </a:defRPr>
             </a:pPr>
             <a:r>
@@ -2740,11 +2740,11 @@
                 <a:solidFill>
                   <a:srgbClr val="111827"/>
                 </a:solidFill>
-                <a:latin typeface="Microsoft YaHei"/>
-                <a:ea typeface="Microsoft YaHei"/>
-                <a:cs typeface="Microsoft YaHei"/>
-              </a:rPr>
-              <a:t>用途</a:t>
+                <a:latin typeface="Aptos"/>
+                <a:ea typeface="Aptos"/>
+                <a:cs typeface="Aptos"/>
+              </a:rPr>
+              <a:t>Purpose</a:t>
             </a:r>
           </a:p>
         </p:txBody>
@@ -2754,7 +2754,7 @@
           <p:cNvPr id="12" name="">
             <a:extLst xmlns:a="http://schemas.openxmlformats.org/drawingml/2006/main">
               <a:ext uri="{FF2B5EF4-FFF2-40B4-BE49-F238E27FC236}">
-                <a16:creationId xmlns:a16="http://schemas.microsoft.com/office/drawing/2014/main" id="{F53136D8-330F-449D-99A4-378454DC8692}"/>
+                <a16:creationId xmlns:a16="http://schemas.microsoft.com/office/drawing/2014/main" id="{BB2B6080-FDEE-4E8F-B699-19CE96459204}"/>
               </a:ext>
             </a:extLst>
           </p:cNvPr>
@@ -2787,7 +2787,7 @@
           <p:cNvPr id="13" name="">
             <a:extLst xmlns:a="http://schemas.openxmlformats.org/drawingml/2006/main">
               <a:ext uri="{FF2B5EF4-FFF2-40B4-BE49-F238E27FC236}">
-                <a16:creationId xmlns:a16="http://schemas.microsoft.com/office/drawing/2014/main" id="{47488747-FC39-4E22-9AFB-02A724F937B0}"/>
+                <a16:creationId xmlns:a16="http://schemas.microsoft.com/office/drawing/2014/main" id="{DB01ECD8-184A-40F7-AD86-46A1E006D691}"/>
               </a:ext>
             </a:extLst>
           </p:cNvPr>
@@ -2851,7 +2851,7 @@
           <p:cNvPr id="14" name="">
             <a:extLst xmlns:a="http://schemas.openxmlformats.org/drawingml/2006/main">
               <a:ext uri="{FF2B5EF4-FFF2-40B4-BE49-F238E27FC236}">
-                <a16:creationId xmlns:a16="http://schemas.microsoft.com/office/drawing/2014/main" id="{943A2A0E-3DEF-430E-BA43-3679704C2FF5}"/>
+                <a16:creationId xmlns:a16="http://schemas.microsoft.com/office/drawing/2014/main" id="{B34361E0-E69D-4B24-BCB3-169BBEAD825D}"/>
               </a:ext>
             </a:extLst>
           </p:cNvPr>
@@ -2884,7 +2884,7 @@
           <p:cNvPr id="15" name="">
             <a:extLst xmlns:a="http://schemas.openxmlformats.org/drawingml/2006/main">
               <a:ext uri="{FF2B5EF4-FFF2-40B4-BE49-F238E27FC236}">
-                <a16:creationId xmlns:a16="http://schemas.microsoft.com/office/drawing/2014/main" id="{0C5C6228-CD39-4B90-A87C-E74380768C99}"/>
+                <a16:creationId xmlns:a16="http://schemas.microsoft.com/office/drawing/2014/main" id="{8E47497E-C258-4118-9110-B214191E4A0A}"/>
               </a:ext>
             </a:extLst>
           </p:cNvPr>
@@ -2924,9 +2924,9 @@
                 <a:solidFill>
                   <a:srgbClr val="5B6472"/>
                 </a:solidFill>
-                <a:latin typeface="Microsoft YaHei"/>
-                <a:ea typeface="Microsoft YaHei"/>
-                <a:cs typeface="Microsoft YaHei"/>
+                <a:latin typeface="Aptos"/>
+                <a:ea typeface="Aptos"/>
+                <a:cs typeface="Aptos"/>
               </a:defRPr>
             </a:pPr>
             <a:r>
@@ -2934,9 +2934,9 @@
                 <a:solidFill>
                   <a:srgbClr val="5B6472"/>
                 </a:solidFill>
-                <a:latin typeface="Microsoft YaHei"/>
-                <a:ea typeface="Microsoft YaHei"/>
-                <a:cs typeface="Microsoft YaHei"/>
+                <a:latin typeface="Aptos"/>
+                <a:ea typeface="Aptos"/>
+                <a:cs typeface="Aptos"/>
               </a:rPr>
               <a:t>cfg.N_rx</a:t>
             </a:r>
@@ -2948,7 +2948,7 @@
           <p:cNvPr id="16" name="">
             <a:extLst xmlns:a="http://schemas.openxmlformats.org/drawingml/2006/main">
               <a:ext uri="{FF2B5EF4-FFF2-40B4-BE49-F238E27FC236}">
-                <a16:creationId xmlns:a16="http://schemas.microsoft.com/office/drawing/2014/main" id="{98C24950-D256-4697-A16F-D96FDB9092F2}"/>
+                <a16:creationId xmlns:a16="http://schemas.microsoft.com/office/drawing/2014/main" id="{DF91E3E7-42DB-456F-AF3D-B9A97772EE6B}"/>
               </a:ext>
             </a:extLst>
           </p:cNvPr>
@@ -2981,7 +2981,7 @@
           <p:cNvPr id="17" name="">
             <a:extLst xmlns:a="http://schemas.openxmlformats.org/drawingml/2006/main">
               <a:ext uri="{FF2B5EF4-FFF2-40B4-BE49-F238E27FC236}">
-                <a16:creationId xmlns:a16="http://schemas.microsoft.com/office/drawing/2014/main" id="{7C25EEEB-7E4B-454C-AD8C-816D115ED56E}"/>
+                <a16:creationId xmlns:a16="http://schemas.microsoft.com/office/drawing/2014/main" id="{FD7715F7-BCDE-46E4-8B60-0433B23AA752}"/>
               </a:ext>
             </a:extLst>
           </p:cNvPr>
@@ -3021,9 +3021,9 @@
                 <a:solidFill>
                   <a:srgbClr val="5B6472"/>
                 </a:solidFill>
-                <a:latin typeface="Microsoft YaHei"/>
-                <a:ea typeface="Microsoft YaHei"/>
-                <a:cs typeface="Microsoft YaHei"/>
+                <a:latin typeface="Aptos"/>
+                <a:ea typeface="Aptos"/>
+                <a:cs typeface="Aptos"/>
               </a:defRPr>
             </a:pPr>
             <a:r>
@@ -3031,11 +3031,11 @@
                 <a:solidFill>
                   <a:srgbClr val="5B6472"/>
                 </a:solidFill>
-                <a:latin typeface="Microsoft YaHei"/>
-                <a:ea typeface="Microsoft YaHei"/>
-                <a:cs typeface="Microsoft YaHei"/>
-              </a:rPr>
-              <a:t>接收天线数量，决定 delta_rx 维度</a:t>
+                <a:latin typeface="Aptos"/>
+                <a:ea typeface="Aptos"/>
+                <a:cs typeface="Aptos"/>
+              </a:rPr>
+              <a:t>Receiver count; determines delta_rx dimensionality</a:t>
             </a:r>
           </a:p>
         </p:txBody>
@@ -3045,7 +3045,7 @@
           <p:cNvPr id="18" name="">
             <a:extLst xmlns:a="http://schemas.openxmlformats.org/drawingml/2006/main">
               <a:ext uri="{FF2B5EF4-FFF2-40B4-BE49-F238E27FC236}">
-                <a16:creationId xmlns:a16="http://schemas.microsoft.com/office/drawing/2014/main" id="{77F59DB7-6056-42AB-829B-404113FF82A0}"/>
+                <a16:creationId xmlns:a16="http://schemas.microsoft.com/office/drawing/2014/main" id="{862A6C51-FC88-47D1-96FC-2A04315393D1}"/>
               </a:ext>
             </a:extLst>
           </p:cNvPr>
@@ -3078,7 +3078,7 @@
           <p:cNvPr id="19" name="">
             <a:extLst xmlns:a="http://schemas.openxmlformats.org/drawingml/2006/main">
               <a:ext uri="{FF2B5EF4-FFF2-40B4-BE49-F238E27FC236}">
-                <a16:creationId xmlns:a16="http://schemas.microsoft.com/office/drawing/2014/main" id="{3E1C12EF-A710-4E9C-9E22-BAD902689B30}"/>
+                <a16:creationId xmlns:a16="http://schemas.microsoft.com/office/drawing/2014/main" id="{E418FB2C-84F2-41D2-8889-025FEF128055}"/>
               </a:ext>
             </a:extLst>
           </p:cNvPr>
@@ -3142,7 +3142,7 @@
           <p:cNvPr id="20" name="">
             <a:extLst xmlns:a="http://schemas.openxmlformats.org/drawingml/2006/main">
               <a:ext uri="{FF2B5EF4-FFF2-40B4-BE49-F238E27FC236}">
-                <a16:creationId xmlns:a16="http://schemas.microsoft.com/office/drawing/2014/main" id="{D572D621-CDE2-421A-8E63-366738E71A67}"/>
+                <a16:creationId xmlns:a16="http://schemas.microsoft.com/office/drawing/2014/main" id="{94CEE9CC-99ED-4B49-9D0E-021935E3811E}"/>
               </a:ext>
             </a:extLst>
           </p:cNvPr>
@@ -3175,7 +3175,7 @@
           <p:cNvPr id="21" name="">
             <a:extLst xmlns:a="http://schemas.openxmlformats.org/drawingml/2006/main">
               <a:ext uri="{FF2B5EF4-FFF2-40B4-BE49-F238E27FC236}">
-                <a16:creationId xmlns:a16="http://schemas.microsoft.com/office/drawing/2014/main" id="{5135288F-2448-4515-8513-C9BBB341A3DC}"/>
+                <a16:creationId xmlns:a16="http://schemas.microsoft.com/office/drawing/2014/main" id="{11414E18-EE6F-4FEB-8211-8F9BB4C15558}"/>
               </a:ext>
             </a:extLst>
           </p:cNvPr>
@@ -3215,9 +3215,9 @@
                 <a:solidFill>
                   <a:srgbClr val="5B6472"/>
                 </a:solidFill>
-                <a:latin typeface="Microsoft YaHei"/>
-                <a:ea typeface="Microsoft YaHei"/>
-                <a:cs typeface="Microsoft YaHei"/>
+                <a:latin typeface="Aptos"/>
+                <a:ea typeface="Aptos"/>
+                <a:cs typeface="Aptos"/>
               </a:defRPr>
             </a:pPr>
             <a:r>
@@ -3225,9 +3225,9 @@
                 <a:solidFill>
                   <a:srgbClr val="5B6472"/>
                 </a:solidFill>
-                <a:latin typeface="Microsoft YaHei"/>
-                <a:ea typeface="Microsoft YaHei"/>
-                <a:cs typeface="Microsoft YaHei"/>
+                <a:latin typeface="Aptos"/>
+                <a:ea typeface="Aptos"/>
+                <a:cs typeface="Aptos"/>
               </a:rPr>
               <a:t>cfg.L_eff</a:t>
             </a:r>
@@ -3239,7 +3239,7 @@
           <p:cNvPr id="22" name="">
             <a:extLst xmlns:a="http://schemas.openxmlformats.org/drawingml/2006/main">
               <a:ext uri="{FF2B5EF4-FFF2-40B4-BE49-F238E27FC236}">
-                <a16:creationId xmlns:a16="http://schemas.microsoft.com/office/drawing/2014/main" id="{72D42E53-577B-47F4-B2B0-674087C6241B}"/>
+                <a16:creationId xmlns:a16="http://schemas.microsoft.com/office/drawing/2014/main" id="{8D1703DB-93EF-40AF-8884-4E0202EF57D3}"/>
               </a:ext>
             </a:extLst>
           </p:cNvPr>
@@ -3272,7 +3272,7 @@
           <p:cNvPr id="23" name="">
             <a:extLst xmlns:a="http://schemas.openxmlformats.org/drawingml/2006/main">
               <a:ext uri="{FF2B5EF4-FFF2-40B4-BE49-F238E27FC236}">
-                <a16:creationId xmlns:a16="http://schemas.microsoft.com/office/drawing/2014/main" id="{9E72855F-C838-4219-AE7D-75C7868F8827}"/>
+                <a16:creationId xmlns:a16="http://schemas.microsoft.com/office/drawing/2014/main" id="{765708E0-D50A-472F-AA5B-EC2494A57660}"/>
               </a:ext>
             </a:extLst>
           </p:cNvPr>
@@ -3312,9 +3312,9 @@
                 <a:solidFill>
                   <a:srgbClr val="5B6472"/>
                 </a:solidFill>
-                <a:latin typeface="Microsoft YaHei"/>
-                <a:ea typeface="Microsoft YaHei"/>
-                <a:cs typeface="Microsoft YaHei"/>
+                <a:latin typeface="Aptos"/>
+                <a:ea typeface="Aptos"/>
+                <a:cs typeface="Aptos"/>
               </a:defRPr>
             </a:pPr>
             <a:r>
@@ -3322,11 +3322,11 @@
                 <a:solidFill>
                   <a:srgbClr val="5B6472"/>
                 </a:solidFill>
-                <a:latin typeface="Microsoft YaHei"/>
-                <a:ea typeface="Microsoft YaHei"/>
-                <a:cs typeface="Microsoft YaHei"/>
-              </a:rPr>
-              <a:t>有效路径数量，决定各 path head 维度</a:t>
+                <a:latin typeface="Aptos"/>
+                <a:ea typeface="Aptos"/>
+                <a:cs typeface="Aptos"/>
+              </a:rPr>
+              <a:t>Effective path count; determines per-path head width</a:t>
             </a:r>
           </a:p>
         </p:txBody>
@@ -3336,7 +3336,7 @@
           <p:cNvPr id="24" name="">
             <a:extLst xmlns:a="http://schemas.openxmlformats.org/drawingml/2006/main">
               <a:ext uri="{FF2B5EF4-FFF2-40B4-BE49-F238E27FC236}">
-                <a16:creationId xmlns:a16="http://schemas.microsoft.com/office/drawing/2014/main" id="{9D4901D1-947F-495A-8667-F4BCED800465}"/>
+                <a16:creationId xmlns:a16="http://schemas.microsoft.com/office/drawing/2014/main" id="{8B2FCC0D-67E0-4D78-8423-6D056998D4BE}"/>
               </a:ext>
             </a:extLst>
           </p:cNvPr>
@@ -3369,7 +3369,7 @@
           <p:cNvPr id="25" name="">
             <a:extLst xmlns:a="http://schemas.openxmlformats.org/drawingml/2006/main">
               <a:ext uri="{FF2B5EF4-FFF2-40B4-BE49-F238E27FC236}">
-                <a16:creationId xmlns:a16="http://schemas.microsoft.com/office/drawing/2014/main" id="{F9D239A3-D86C-4B2F-A479-9E88C122AA46}"/>
+                <a16:creationId xmlns:a16="http://schemas.microsoft.com/office/drawing/2014/main" id="{7F2682FF-D7F7-4F3A-B1A6-516565AB512D}"/>
               </a:ext>
             </a:extLst>
           </p:cNvPr>
@@ -3433,7 +3433,7 @@
           <p:cNvPr id="26" name="">
             <a:extLst xmlns:a="http://schemas.openxmlformats.org/drawingml/2006/main">
               <a:ext uri="{FF2B5EF4-FFF2-40B4-BE49-F238E27FC236}">
-                <a16:creationId xmlns:a16="http://schemas.microsoft.com/office/drawing/2014/main" id="{E1FAA887-E159-4A08-9B40-09F4F163EC8A}"/>
+                <a16:creationId xmlns:a16="http://schemas.microsoft.com/office/drawing/2014/main" id="{51904C2C-49CD-4D4F-BC65-926AC7B84B37}"/>
               </a:ext>
             </a:extLst>
           </p:cNvPr>
@@ -3466,7 +3466,7 @@
           <p:cNvPr id="27" name="">
             <a:extLst xmlns:a="http://schemas.openxmlformats.org/drawingml/2006/main">
               <a:ext uri="{FF2B5EF4-FFF2-40B4-BE49-F238E27FC236}">
-                <a16:creationId xmlns:a16="http://schemas.microsoft.com/office/drawing/2014/main" id="{60D69249-0A59-4F32-8C5A-174D7635FDF1}"/>
+                <a16:creationId xmlns:a16="http://schemas.microsoft.com/office/drawing/2014/main" id="{A09B7368-285E-419A-9BB4-BFF13B2DD4B1}"/>
               </a:ext>
             </a:extLst>
           </p:cNvPr>
@@ -3506,9 +3506,9 @@
                 <a:solidFill>
                   <a:srgbClr val="5B6472"/>
                 </a:solidFill>
-                <a:latin typeface="Microsoft YaHei"/>
-                <a:ea typeface="Microsoft YaHei"/>
-                <a:cs typeface="Microsoft YaHei"/>
+                <a:latin typeface="Aptos"/>
+                <a:ea typeface="Aptos"/>
+                <a:cs typeface="Aptos"/>
               </a:defRPr>
             </a:pPr>
             <a:r>
@@ -3516,9 +3516,9 @@
                 <a:solidFill>
                   <a:srgbClr val="5B6472"/>
                 </a:solidFill>
-                <a:latin typeface="Microsoft YaHei"/>
-                <a:ea typeface="Microsoft YaHei"/>
-                <a:cs typeface="Microsoft YaHei"/>
+                <a:latin typeface="Aptos"/>
+                <a:ea typeface="Aptos"/>
+                <a:cs typeface="Aptos"/>
               </a:rPr>
               <a:t>cfg.N_sc</a:t>
             </a:r>
@@ -3530,7 +3530,7 @@
           <p:cNvPr id="28" name="">
             <a:extLst xmlns:a="http://schemas.openxmlformats.org/drawingml/2006/main">
               <a:ext uri="{FF2B5EF4-FFF2-40B4-BE49-F238E27FC236}">
-                <a16:creationId xmlns:a16="http://schemas.microsoft.com/office/drawing/2014/main" id="{63FCE6DD-99B4-4289-83B3-007605310BF6}"/>
+                <a16:creationId xmlns:a16="http://schemas.microsoft.com/office/drawing/2014/main" id="{82B0912E-9913-40A2-9E21-7DA6C0236CDC}"/>
               </a:ext>
             </a:extLst>
           </p:cNvPr>
@@ -3563,7 +3563,7 @@
           <p:cNvPr id="29" name="">
             <a:extLst xmlns:a="http://schemas.openxmlformats.org/drawingml/2006/main">
               <a:ext uri="{FF2B5EF4-FFF2-40B4-BE49-F238E27FC236}">
-                <a16:creationId xmlns:a16="http://schemas.microsoft.com/office/drawing/2014/main" id="{14F15592-F5D1-4F09-AAED-383DEC9600BF}"/>
+                <a16:creationId xmlns:a16="http://schemas.microsoft.com/office/drawing/2014/main" id="{C991DFD5-7AF0-46ED-8E03-D3717D77CBD2}"/>
               </a:ext>
             </a:extLst>
           </p:cNvPr>
@@ -3603,9 +3603,9 @@
                 <a:solidFill>
                   <a:srgbClr val="5B6472"/>
                 </a:solidFill>
-                <a:latin typeface="Microsoft YaHei"/>
-                <a:ea typeface="Microsoft YaHei"/>
-                <a:cs typeface="Microsoft YaHei"/>
+                <a:latin typeface="Aptos"/>
+                <a:ea typeface="Aptos"/>
+                <a:cs typeface="Aptos"/>
               </a:defRPr>
             </a:pPr>
             <a:r>
@@ -3613,11 +3613,11 @@
                 <a:solidFill>
                   <a:srgbClr val="5B6472"/>
                 </a:solidFill>
-                <a:latin typeface="Microsoft YaHei"/>
-                <a:ea typeface="Microsoft YaHei"/>
-                <a:cs typeface="Microsoft YaHei"/>
-              </a:rPr>
-              <a:t>子载波数量，决定频率轴 soft-argmax 分辨率</a:t>
+                <a:latin typeface="Aptos"/>
+                <a:ea typeface="Aptos"/>
+                <a:cs typeface="Aptos"/>
+              </a:rPr>
+              <a:t>Subcarrier count; sets frequency-axis soft-argmax resolution</a:t>
             </a:r>
           </a:p>
         </p:txBody>
@@ -3627,7 +3627,7 @@
           <p:cNvPr id="30" name="">
             <a:extLst xmlns:a="http://schemas.openxmlformats.org/drawingml/2006/main">
               <a:ext uri="{FF2B5EF4-FFF2-40B4-BE49-F238E27FC236}">
-                <a16:creationId xmlns:a16="http://schemas.microsoft.com/office/drawing/2014/main" id="{5AFBEAD1-BE51-44DC-BF93-E75C9E15A405}"/>
+                <a16:creationId xmlns:a16="http://schemas.microsoft.com/office/drawing/2014/main" id="{52F0BFB5-3B74-48AF-83EA-5288C6178AC7}"/>
               </a:ext>
             </a:extLst>
           </p:cNvPr>
@@ -3660,7 +3660,7 @@
           <p:cNvPr id="31" name="">
             <a:extLst xmlns:a="http://schemas.openxmlformats.org/drawingml/2006/main">
               <a:ext uri="{FF2B5EF4-FFF2-40B4-BE49-F238E27FC236}">
-                <a16:creationId xmlns:a16="http://schemas.microsoft.com/office/drawing/2014/main" id="{DA3DCCC8-8058-43C6-9563-24B70B0E49FA}"/>
+                <a16:creationId xmlns:a16="http://schemas.microsoft.com/office/drawing/2014/main" id="{068AB57E-64A8-4753-A4DE-F892A0F37178}"/>
               </a:ext>
             </a:extLst>
           </p:cNvPr>
@@ -3724,7 +3724,7 @@
           <p:cNvPr id="32" name="">
             <a:extLst xmlns:a="http://schemas.openxmlformats.org/drawingml/2006/main">
               <a:ext uri="{FF2B5EF4-FFF2-40B4-BE49-F238E27FC236}">
-                <a16:creationId xmlns:a16="http://schemas.microsoft.com/office/drawing/2014/main" id="{86DF6503-05A9-4831-94CC-FAE9F5F71CAF}"/>
+                <a16:creationId xmlns:a16="http://schemas.microsoft.com/office/drawing/2014/main" id="{D68AEB9C-76B3-49DC-B720-ACBAF863A65D}"/>
               </a:ext>
             </a:extLst>
           </p:cNvPr>
@@ -3757,7 +3757,7 @@
           <p:cNvPr id="33" name="">
             <a:extLst xmlns:a="http://schemas.openxmlformats.org/drawingml/2006/main">
               <a:ext uri="{FF2B5EF4-FFF2-40B4-BE49-F238E27FC236}">
-                <a16:creationId xmlns:a16="http://schemas.microsoft.com/office/drawing/2014/main" id="{DA9A212D-4648-4196-850F-249AA72373EA}"/>
+                <a16:creationId xmlns:a16="http://schemas.microsoft.com/office/drawing/2014/main" id="{41F4F8D8-7567-4C70-AC53-55ECE9565EF6}"/>
               </a:ext>
             </a:extLst>
           </p:cNvPr>
@@ -3797,9 +3797,9 @@
                 <a:solidFill>
                   <a:srgbClr val="5B6472"/>
                 </a:solidFill>
-                <a:latin typeface="Microsoft YaHei"/>
-                <a:ea typeface="Microsoft YaHei"/>
-                <a:cs typeface="Microsoft YaHei"/>
+                <a:latin typeface="Aptos"/>
+                <a:ea typeface="Aptos"/>
+                <a:cs typeface="Aptos"/>
               </a:defRPr>
             </a:pPr>
             <a:r>
@@ -3807,9 +3807,9 @@
                 <a:solidFill>
                   <a:srgbClr val="5B6472"/>
                 </a:solidFill>
-                <a:latin typeface="Microsoft YaHei"/>
-                <a:ea typeface="Microsoft YaHei"/>
-                <a:cs typeface="Microsoft YaHei"/>
+                <a:latin typeface="Aptos"/>
+                <a:ea typeface="Aptos"/>
+                <a:cs typeface="Aptos"/>
               </a:rPr>
               <a:t>input_adapter_dim(cfg)</a:t>
             </a:r>
@@ -3821,7 +3821,7 @@
           <p:cNvPr id="34" name="">
             <a:extLst xmlns:a="http://schemas.openxmlformats.org/drawingml/2006/main">
               <a:ext uri="{FF2B5EF4-FFF2-40B4-BE49-F238E27FC236}">
-                <a16:creationId xmlns:a16="http://schemas.microsoft.com/office/drawing/2014/main" id="{14BBF83D-2709-4645-B158-C6F48BBE9B23}"/>
+                <a16:creationId xmlns:a16="http://schemas.microsoft.com/office/drawing/2014/main" id="{04392CB0-E45D-436D-AB05-5F5C58D77544}"/>
               </a:ext>
             </a:extLst>
           </p:cNvPr>
@@ -3854,7 +3854,7 @@
           <p:cNvPr id="35" name="">
             <a:extLst xmlns:a="http://schemas.openxmlformats.org/drawingml/2006/main">
               <a:ext uri="{FF2B5EF4-FFF2-40B4-BE49-F238E27FC236}">
-                <a16:creationId xmlns:a16="http://schemas.microsoft.com/office/drawing/2014/main" id="{E5B05AF5-4800-48CF-B580-9F36AEDF731F}"/>
+                <a16:creationId xmlns:a16="http://schemas.microsoft.com/office/drawing/2014/main" id="{1EAE1ED8-B24E-4AD5-8382-59F8DAE5BEDA}"/>
               </a:ext>
             </a:extLst>
           </p:cNvPr>
@@ -3894,9 +3894,9 @@
                 <a:solidFill>
                   <a:srgbClr val="5B6472"/>
                 </a:solidFill>
-                <a:latin typeface="Microsoft YaHei"/>
-                <a:ea typeface="Microsoft YaHei"/>
-                <a:cs typeface="Microsoft YaHei"/>
+                <a:latin typeface="Aptos"/>
+                <a:ea typeface="Aptos"/>
+                <a:cs typeface="Aptos"/>
               </a:defRPr>
             </a:pPr>
             <a:r>
@@ -3904,11 +3904,11 @@
                 <a:solidFill>
                   <a:srgbClr val="5B6472"/>
                 </a:solidFill>
-                <a:latin typeface="Microsoft YaHei"/>
-                <a:ea typeface="Microsoft YaHei"/>
-                <a:cs typeface="Microsoft YaHei"/>
-              </a:rPr>
-              <a:t>输入通道数，适配不同观测打包方式</a:t>
+                <a:latin typeface="Aptos"/>
+                <a:ea typeface="Aptos"/>
+                <a:cs typeface="Aptos"/>
+              </a:rPr>
+              <a:t>Input channels for the configured observation packing</a:t>
             </a:r>
           </a:p>
         </p:txBody>
@@ -3918,7 +3918,7 @@
           <p:cNvPr id="36" name="">
             <a:extLst xmlns:a="http://schemas.openxmlformats.org/drawingml/2006/main">
               <a:ext uri="{FF2B5EF4-FFF2-40B4-BE49-F238E27FC236}">
-                <a16:creationId xmlns:a16="http://schemas.microsoft.com/office/drawing/2014/main" id="{E4E2D491-8D72-4CBC-A5A2-FA7FFFC0BC4A}"/>
+                <a16:creationId xmlns:a16="http://schemas.microsoft.com/office/drawing/2014/main" id="{F939BA38-5415-4710-BC18-6B1988BE3F90}"/>
               </a:ext>
             </a:extLst>
           </p:cNvPr>
@@ -3951,7 +3951,7 @@
           <p:cNvPr id="37" name="">
             <a:extLst xmlns:a="http://schemas.openxmlformats.org/drawingml/2006/main">
               <a:ext uri="{FF2B5EF4-FFF2-40B4-BE49-F238E27FC236}">
-                <a16:creationId xmlns:a16="http://schemas.microsoft.com/office/drawing/2014/main" id="{B68A20BE-E82C-4E47-8D70-EB69A6633712}"/>
+                <a16:creationId xmlns:a16="http://schemas.microsoft.com/office/drawing/2014/main" id="{D1250AB7-E17A-4B02-B3AD-111AB56E5DBD}"/>
               </a:ext>
             </a:extLst>
           </p:cNvPr>
@@ -4015,7 +4015,7 @@
           <p:cNvPr id="38" name="">
             <a:extLst xmlns:a="http://schemas.openxmlformats.org/drawingml/2006/main">
               <a:ext uri="{FF2B5EF4-FFF2-40B4-BE49-F238E27FC236}">
-                <a16:creationId xmlns:a16="http://schemas.microsoft.com/office/drawing/2014/main" id="{AED83687-8ACA-4ADA-9F94-E5A60896908E}"/>
+                <a16:creationId xmlns:a16="http://schemas.microsoft.com/office/drawing/2014/main" id="{08E39CA7-1E17-415D-8E88-42C12517DA05}"/>
               </a:ext>
             </a:extLst>
           </p:cNvPr>
@@ -4048,7 +4048,7 @@
           <p:cNvPr id="39" name="">
             <a:extLst xmlns:a="http://schemas.openxmlformats.org/drawingml/2006/main">
               <a:ext uri="{FF2B5EF4-FFF2-40B4-BE49-F238E27FC236}">
-                <a16:creationId xmlns:a16="http://schemas.microsoft.com/office/drawing/2014/main" id="{CAAE68E0-530B-489E-A644-B5A6C5B2EED2}"/>
+                <a16:creationId xmlns:a16="http://schemas.microsoft.com/office/drawing/2014/main" id="{73C96A0D-1DB9-409F-958F-1307436B965E}"/>
               </a:ext>
             </a:extLst>
           </p:cNvPr>
@@ -4088,9 +4088,9 @@
                 <a:solidFill>
                   <a:srgbClr val="5B6472"/>
                 </a:solidFill>
-                <a:latin typeface="Microsoft YaHei"/>
-                <a:ea typeface="Microsoft YaHei"/>
-                <a:cs typeface="Microsoft YaHei"/>
+                <a:latin typeface="Aptos"/>
+                <a:ea typeface="Aptos"/>
+                <a:cs typeface="Aptos"/>
               </a:defRPr>
             </a:pPr>
             <a:r>
@@ -4098,9 +4098,9 @@
                 <a:solidFill>
                   <a:srgbClr val="5B6472"/>
                 </a:solidFill>
-                <a:latin typeface="Microsoft YaHei"/>
-                <a:ea typeface="Microsoft YaHei"/>
-                <a:cs typeface="Microsoft YaHei"/>
+                <a:latin typeface="Aptos"/>
+                <a:ea typeface="Aptos"/>
+                <a:cs typeface="Aptos"/>
               </a:rPr>
               <a:t>cfg or default</a:t>
             </a:r>
@@ -4112,7 +4112,7 @@
           <p:cNvPr id="40" name="">
             <a:extLst xmlns:a="http://schemas.openxmlformats.org/drawingml/2006/main">
               <a:ext uri="{FF2B5EF4-FFF2-40B4-BE49-F238E27FC236}">
-                <a16:creationId xmlns:a16="http://schemas.microsoft.com/office/drawing/2014/main" id="{5FE50B60-317A-44B7-B7C5-C296CB1FFDA5}"/>
+                <a16:creationId xmlns:a16="http://schemas.microsoft.com/office/drawing/2014/main" id="{7961DE3C-B794-4500-81D9-2A99F00797B5}"/>
               </a:ext>
             </a:extLst>
           </p:cNvPr>
@@ -4145,7 +4145,7 @@
           <p:cNvPr id="41" name="">
             <a:extLst xmlns:a="http://schemas.openxmlformats.org/drawingml/2006/main">
               <a:ext uri="{FF2B5EF4-FFF2-40B4-BE49-F238E27FC236}">
-                <a16:creationId xmlns:a16="http://schemas.microsoft.com/office/drawing/2014/main" id="{7F64755D-1591-44FD-9121-EA1D3F211FA3}"/>
+                <a16:creationId xmlns:a16="http://schemas.microsoft.com/office/drawing/2014/main" id="{228EB1F8-F53F-4538-BF28-DCDF77022A98}"/>
               </a:ext>
             </a:extLst>
           </p:cNvPr>
@@ -4185,9 +4185,9 @@
                 <a:solidFill>
                   <a:srgbClr val="5B6472"/>
                 </a:solidFill>
-                <a:latin typeface="Microsoft YaHei"/>
-                <a:ea typeface="Microsoft YaHei"/>
-                <a:cs typeface="Microsoft YaHei"/>
+                <a:latin typeface="Aptos"/>
+                <a:ea typeface="Aptos"/>
+                <a:cs typeface="Aptos"/>
               </a:defRPr>
             </a:pPr>
             <a:r>
@@ -4195,11 +4195,11 @@
                 <a:solidFill>
                   <a:srgbClr val="5B6472"/>
                 </a:solidFill>
-                <a:latin typeface="Microsoft YaHei"/>
-                <a:ea typeface="Microsoft YaHei"/>
-                <a:cs typeface="Microsoft YaHei"/>
-              </a:rPr>
-              <a:t>控制 encoder 宽度、MLP 宽度和正则化</a:t>
+                <a:latin typeface="Aptos"/>
+                <a:ea typeface="Aptos"/>
+                <a:cs typeface="Aptos"/>
+              </a:rPr>
+              <a:t>Controls encoder width, MLP width, and regularization</a:t>
             </a:r>
           </a:p>
         </p:txBody>
@@ -4209,7 +4209,7 @@
           <p:cNvPr id="42" name="">
             <a:extLst xmlns:a="http://schemas.openxmlformats.org/drawingml/2006/main">
               <a:ext uri="{FF2B5EF4-FFF2-40B4-BE49-F238E27FC236}">
-                <a16:creationId xmlns:a16="http://schemas.microsoft.com/office/drawing/2014/main" id="{4896E9CF-E007-412F-B3AA-F75F9814AA6D}"/>
+                <a16:creationId xmlns:a16="http://schemas.microsoft.com/office/drawing/2014/main" id="{F85BDA14-1E15-4106-9EAB-0CACD2DCD8C6}"/>
               </a:ext>
             </a:extLst>
           </p:cNvPr>
@@ -4247,9 +4247,9 @@
                 <a:solidFill>
                   <a:srgbClr val="111827"/>
                 </a:solidFill>
-                <a:latin typeface="Microsoft YaHei"/>
-                <a:ea typeface="Microsoft YaHei"/>
-                <a:cs typeface="Microsoft YaHei"/>
+                <a:latin typeface="Aptos"/>
+                <a:ea typeface="Aptos"/>
+                <a:cs typeface="Aptos"/>
               </a:defRPr>
             </a:pPr>
             <a:r>
@@ -4257,9 +4257,9 @@
                 <a:solidFill>
                   <a:srgbClr val="111827"/>
                 </a:solidFill>
-                <a:latin typeface="Microsoft YaHei"/>
-                <a:ea typeface="Microsoft YaHei"/>
-                <a:cs typeface="Microsoft YaHei"/>
+                <a:latin typeface="Aptos"/>
+                <a:ea typeface="Aptos"/>
+                <a:cs typeface="Aptos"/>
               </a:rPr>
               <a:t>_slope_bounds(bounds, scale, sign)</a:t>
             </a:r>
@@ -4271,7 +4271,7 @@
           <p:cNvPr id="43" name="">
             <a:extLst xmlns:a="http://schemas.openxmlformats.org/drawingml/2006/main">
               <a:ext uri="{FF2B5EF4-FFF2-40B4-BE49-F238E27FC236}">
-                <a16:creationId xmlns:a16="http://schemas.microsoft.com/office/drawing/2014/main" id="{D2B35DE5-46E3-49F3-A440-A7055378E95D}"/>
+                <a16:creationId xmlns:a16="http://schemas.microsoft.com/office/drawing/2014/main" id="{6A29E207-BE8B-4B7C-AF12-A2EE4EC8EA12}"/>
               </a:ext>
             </a:extLst>
           </p:cNvPr>
@@ -4304,7 +4304,7 @@
           <p:cNvPr id="44" name="">
             <a:extLst xmlns:a="http://schemas.openxmlformats.org/drawingml/2006/main">
               <a:ext uri="{FF2B5EF4-FFF2-40B4-BE49-F238E27FC236}">
-                <a16:creationId xmlns:a16="http://schemas.microsoft.com/office/drawing/2014/main" id="{EB26A0F5-BCA2-4A87-9605-5DDAED73B1D5}"/>
+                <a16:creationId xmlns:a16="http://schemas.microsoft.com/office/drawing/2014/main" id="{3CBF378E-BA62-4E7D-AEDB-E13841B0558C}"/>
               </a:ext>
             </a:extLst>
           </p:cNvPr>
@@ -4342,9 +4342,9 @@
                 <a:solidFill>
                   <a:srgbClr val="111827"/>
                 </a:solidFill>
-                <a:latin typeface="Microsoft YaHei"/>
-                <a:ea typeface="Microsoft YaHei"/>
-                <a:cs typeface="Microsoft YaHei"/>
+                <a:latin typeface="Aptos"/>
+                <a:ea typeface="Aptos"/>
+                <a:cs typeface="Aptos"/>
               </a:defRPr>
             </a:pPr>
             <a:r>
@@ -4352,9 +4352,9 @@
                 <a:solidFill>
                   <a:srgbClr val="111827"/>
                 </a:solidFill>
-                <a:latin typeface="Microsoft YaHei"/>
-                <a:ea typeface="Microsoft YaHei"/>
-                <a:cs typeface="Microsoft YaHei"/>
+                <a:latin typeface="Aptos"/>
+                <a:ea typeface="Aptos"/>
+                <a:cs typeface="Aptos"/>
               </a:rPr>
               <a:t>mu_min / mu_max</a:t>
             </a:r>
@@ -4365,9 +4365,9 @@
                 <a:solidFill>
                   <a:srgbClr val="111827"/>
                 </a:solidFill>
-                <a:latin typeface="Microsoft YaHei"/>
-                <a:ea typeface="Microsoft YaHei"/>
-                <a:cs typeface="Microsoft YaHei"/>
+                <a:latin typeface="Aptos"/>
+                <a:ea typeface="Aptos"/>
+                <a:cs typeface="Aptos"/>
               </a:defRPr>
             </a:pPr>
             <a:r>
@@ -4375,9 +4375,9 @@
                 <a:solidFill>
                   <a:srgbClr val="111827"/>
                 </a:solidFill>
-                <a:latin typeface="Microsoft YaHei"/>
-                <a:ea typeface="Microsoft YaHei"/>
-                <a:cs typeface="Microsoft YaHei"/>
+                <a:latin typeface="Aptos"/>
+                <a:ea typeface="Aptos"/>
+                <a:cs typeface="Aptos"/>
               </a:rPr>
               <a:t>relDelayRangeSec + subcarrierSpacingHz</a:t>
             </a:r>
@@ -4388,9 +4388,9 @@
                 <a:solidFill>
                   <a:srgbClr val="111827"/>
                 </a:solidFill>
-                <a:latin typeface="Microsoft YaHei"/>
-                <a:ea typeface="Microsoft YaHei"/>
-                <a:cs typeface="Microsoft YaHei"/>
+                <a:latin typeface="Aptos"/>
+                <a:ea typeface="Aptos"/>
+                <a:cs typeface="Aptos"/>
               </a:defRPr>
             </a:pPr>
             <a:r>
@@ -4398,9 +4398,9 @@
                 <a:solidFill>
                   <a:srgbClr val="111827"/>
                 </a:solidFill>
-                <a:latin typeface="Microsoft YaHei"/>
-                <a:ea typeface="Microsoft YaHei"/>
-                <a:cs typeface="Microsoft YaHei"/>
+                <a:latin typeface="Aptos"/>
+                <a:ea typeface="Aptos"/>
+                <a:cs typeface="Aptos"/>
               </a:rPr>
               <a:t>sign = -1</a:t>
             </a:r>
@@ -4412,7 +4412,7 @@
           <p:cNvPr id="45" name="">
             <a:extLst xmlns:a="http://schemas.openxmlformats.org/drawingml/2006/main">
               <a:ext uri="{FF2B5EF4-FFF2-40B4-BE49-F238E27FC236}">
-                <a16:creationId xmlns:a16="http://schemas.microsoft.com/office/drawing/2014/main" id="{BF2B65D7-92F2-410B-8528-33D8B169087C}"/>
+                <a16:creationId xmlns:a16="http://schemas.microsoft.com/office/drawing/2014/main" id="{6E98C41D-11AC-4C53-9F23-AB311A472B38}"/>
               </a:ext>
             </a:extLst>
           </p:cNvPr>
@@ -4450,9 +4450,9 @@
                 <a:solidFill>
                   <a:srgbClr val="111827"/>
                 </a:solidFill>
-                <a:latin typeface="Microsoft YaHei"/>
-                <a:ea typeface="Microsoft YaHei"/>
-                <a:cs typeface="Microsoft YaHei"/>
+                <a:latin typeface="Aptos"/>
+                <a:ea typeface="Aptos"/>
+                <a:cs typeface="Aptos"/>
               </a:defRPr>
             </a:pPr>
             <a:r>
@@ -4460,9 +4460,9 @@
                 <a:solidFill>
                   <a:srgbClr val="111827"/>
                 </a:solidFill>
-                <a:latin typeface="Microsoft YaHei"/>
-                <a:ea typeface="Microsoft YaHei"/>
-                <a:cs typeface="Microsoft YaHei"/>
+                <a:latin typeface="Aptos"/>
+                <a:ea typeface="Aptos"/>
+                <a:cs typeface="Aptos"/>
               </a:rPr>
               <a:t>rho_min / rho_max</a:t>
             </a:r>
@@ -4473,9 +4473,9 @@
                 <a:solidFill>
                   <a:srgbClr val="111827"/>
                 </a:solidFill>
-                <a:latin typeface="Microsoft YaHei"/>
-                <a:ea typeface="Microsoft YaHei"/>
-                <a:cs typeface="Microsoft YaHei"/>
+                <a:latin typeface="Aptos"/>
+                <a:ea typeface="Aptos"/>
+                <a:cs typeface="Aptos"/>
               </a:defRPr>
             </a:pPr>
             <a:r>
@@ -4483,9 +4483,9 @@
                 <a:solidFill>
                   <a:srgbClr val="111827"/>
                 </a:solidFill>
-                <a:latin typeface="Microsoft YaHei"/>
-                <a:ea typeface="Microsoft YaHei"/>
-                <a:cs typeface="Microsoft YaHei"/>
+                <a:latin typeface="Aptos"/>
+                <a:ea typeface="Aptos"/>
+                <a:cs typeface="Aptos"/>
               </a:rPr>
               <a:t>dopplerRangeHz + ofdmSymbolDuration_s</a:t>
             </a:r>
@@ -4496,9 +4496,9 @@
                 <a:solidFill>
                   <a:srgbClr val="111827"/>
                 </a:solidFill>
-                <a:latin typeface="Microsoft YaHei"/>
-                <a:ea typeface="Microsoft YaHei"/>
-                <a:cs typeface="Microsoft YaHei"/>
+                <a:latin typeface="Aptos"/>
+                <a:ea typeface="Aptos"/>
+                <a:cs typeface="Aptos"/>
               </a:defRPr>
             </a:pPr>
             <a:r>
@@ -4506,9 +4506,9 @@
                 <a:solidFill>
                   <a:srgbClr val="111827"/>
                 </a:solidFill>
-                <a:latin typeface="Microsoft YaHei"/>
-                <a:ea typeface="Microsoft YaHei"/>
-                <a:cs typeface="Microsoft YaHei"/>
+                <a:latin typeface="Aptos"/>
+                <a:ea typeface="Aptos"/>
+                <a:cs typeface="Aptos"/>
               </a:rPr>
               <a:t>sign = +1</a:t>
             </a:r>
@@ -4520,7 +4520,7 @@
           <p:cNvPr id="46" name="">
             <a:extLst xmlns:a="http://schemas.openxmlformats.org/drawingml/2006/main">
               <a:ext uri="{FF2B5EF4-FFF2-40B4-BE49-F238E27FC236}">
-                <a16:creationId xmlns:a16="http://schemas.microsoft.com/office/drawing/2014/main" id="{02593FB2-D577-4CCE-825D-35F690A34883}"/>
+                <a16:creationId xmlns:a16="http://schemas.microsoft.com/office/drawing/2014/main" id="{DC4D36ED-7D02-44C0-808C-243E6551864E}"/>
               </a:ext>
             </a:extLst>
           </p:cNvPr>
@@ -4558,9 +4558,9 @@
                 <a:solidFill>
                   <a:srgbClr val="111827"/>
                 </a:solidFill>
-                <a:latin typeface="Microsoft YaHei"/>
-                <a:ea typeface="Microsoft YaHei"/>
-                <a:cs typeface="Microsoft YaHei"/>
+                <a:latin typeface="Aptos"/>
+                <a:ea typeface="Aptos"/>
+                <a:cs typeface="Aptos"/>
               </a:defRPr>
             </a:pPr>
             <a:r>
@@ -4568,9 +4568,9 @@
                 <a:solidFill>
                   <a:srgbClr val="111827"/>
                 </a:solidFill>
-                <a:latin typeface="Microsoft YaHei"/>
-                <a:ea typeface="Microsoft YaHei"/>
-                <a:cs typeface="Microsoft YaHei"/>
+                <a:latin typeface="Aptos"/>
+                <a:ea typeface="Aptos"/>
+                <a:cs typeface="Aptos"/>
               </a:rPr>
               <a:t>delta_bound</a:t>
             </a:r>
@@ -4581,9 +4581,9 @@
                 <a:solidFill>
                   <a:srgbClr val="111827"/>
                 </a:solidFill>
-                <a:latin typeface="Microsoft YaHei"/>
-                <a:ea typeface="Microsoft YaHei"/>
-                <a:cs typeface="Microsoft YaHei"/>
+                <a:latin typeface="Aptos"/>
+                <a:ea typeface="Aptos"/>
+                <a:cs typeface="Aptos"/>
               </a:defRPr>
             </a:pPr>
             <a:r>
@@ -4591,11 +4591,11 @@
                 <a:solidFill>
                   <a:srgbClr val="111827"/>
                 </a:solidFill>
-                <a:latin typeface="Microsoft YaHei"/>
-                <a:ea typeface="Microsoft YaHei"/>
-                <a:cs typeface="Microsoft YaHei"/>
-              </a:rPr>
-              <a:t>rxOffsetRangeSec 的最大绝对斜率</a:t>
+                <a:latin typeface="Aptos"/>
+                <a:ea typeface="Aptos"/>
+                <a:cs typeface="Aptos"/>
+              </a:rPr>
+              <a:t>maximum absolute slope from rxOffsetRangeSec</a:t>
             </a:r>
           </a:p>
         </p:txBody>
@@ -4605,7 +4605,7 @@
           <p:cNvPr id="47" name="">
             <a:extLst xmlns:a="http://schemas.openxmlformats.org/drawingml/2006/main">
               <a:ext uri="{FF2B5EF4-FFF2-40B4-BE49-F238E27FC236}">
-                <a16:creationId xmlns:a16="http://schemas.microsoft.com/office/drawing/2014/main" id="{C599E0FF-D0AD-4D17-B960-8255A1D2EC45}"/>
+                <a16:creationId xmlns:a16="http://schemas.microsoft.com/office/drawing/2014/main" id="{5126CF8E-F147-4716-B8A8-5161A687B3F8}"/>
               </a:ext>
             </a:extLst>
           </p:cNvPr>
@@ -4638,7 +4638,7 @@
           <p:cNvPr id="48" name="">
             <a:extLst xmlns:a="http://schemas.openxmlformats.org/drawingml/2006/main">
               <a:ext uri="{FF2B5EF4-FFF2-40B4-BE49-F238E27FC236}">
-                <a16:creationId xmlns:a16="http://schemas.microsoft.com/office/drawing/2014/main" id="{32CE0771-B384-4948-8499-E54E7CE755A9}"/>
+                <a16:creationId xmlns:a16="http://schemas.microsoft.com/office/drawing/2014/main" id="{48684FCB-66DB-499D-9686-440DD6FA4869}"/>
               </a:ext>
             </a:extLst>
           </p:cNvPr>
@@ -4678,9 +4678,9 @@
                 <a:solidFill>
                   <a:srgbClr val="5B6472"/>
                 </a:solidFill>
-                <a:latin typeface="Microsoft YaHei"/>
-                <a:ea typeface="Microsoft YaHei"/>
-                <a:cs typeface="Microsoft YaHei"/>
+                <a:latin typeface="Aptos"/>
+                <a:ea typeface="Aptos"/>
+                <a:cs typeface="Aptos"/>
               </a:defRPr>
             </a:pPr>
             <a:r>
@@ -4688,11 +4688,11 @@
                 <a:solidFill>
                   <a:srgbClr val="5B6472"/>
                 </a:solidFill>
-                <a:latin typeface="Microsoft YaHei"/>
-                <a:ea typeface="Microsoft YaHei"/>
-                <a:cs typeface="Microsoft YaHei"/>
-              </a:rPr>
-              <a:t>所有 head 的输出先被约束到物理可解释范围，再做 gauge fix。</a:t>
+                <a:latin typeface="Aptos"/>
+                <a:ea typeface="Aptos"/>
+                <a:cs typeface="Aptos"/>
+              </a:rPr>
+              <a:t>Every head is first bounded to a physically interpretable range, then gauge-fixed.</a:t>
             </a:r>
           </a:p>
         </p:txBody>
@@ -4702,7 +4702,7 @@
           <p:cNvPr id="49" name="">
             <a:extLst xmlns:a="http://schemas.openxmlformats.org/drawingml/2006/main">
               <a:ext uri="{FF2B5EF4-FFF2-40B4-BE49-F238E27FC236}">
-                <a16:creationId xmlns:a16="http://schemas.microsoft.com/office/drawing/2014/main" id="{623DBF31-118C-41E0-9728-DA307C84A08B}"/>
+                <a16:creationId xmlns:a16="http://schemas.microsoft.com/office/drawing/2014/main" id="{E232CD94-094B-4B5A-8F81-B037F17E1BE9}"/>
               </a:ext>
             </a:extLst>
           </p:cNvPr>
@@ -4735,7 +4735,7 @@
           <p:cNvPr id="50" name="">
             <a:extLst xmlns:a="http://schemas.openxmlformats.org/drawingml/2006/main">
               <a:ext uri="{FF2B5EF4-FFF2-40B4-BE49-F238E27FC236}">
-                <a16:creationId xmlns:a16="http://schemas.microsoft.com/office/drawing/2014/main" id="{EADB2D99-ED7E-4572-9E66-72DBB5D69E55}"/>
+                <a16:creationId xmlns:a16="http://schemas.microsoft.com/office/drawing/2014/main" id="{6E3ED3C9-E43C-4E16-8ED4-A87D1E5EF519}"/>
               </a:ext>
             </a:extLst>
           </p:cNvPr>
@@ -4775,9 +4775,9 @@
                 <a:solidFill>
                   <a:srgbClr val="5B6472"/>
                 </a:solidFill>
-                <a:latin typeface="Microsoft YaHei"/>
-                <a:ea typeface="Microsoft YaHei"/>
-                <a:cs typeface="Microsoft YaHei"/>
+                <a:latin typeface="Aptos"/>
+                <a:ea typeface="Aptos"/>
+                <a:cs typeface="Aptos"/>
               </a:defRPr>
             </a:pPr>
             <a:r>
@@ -4785,11 +4785,11 @@
                 <a:solidFill>
                   <a:srgbClr val="5B6472"/>
                 </a:solidFill>
-                <a:latin typeface="Microsoft YaHei"/>
-                <a:ea typeface="Microsoft YaHei"/>
-                <a:cs typeface="Microsoft YaHei"/>
-              </a:rPr>
-              <a:t>mu 和 delta 使用负号映射延迟斜率，rho 使用正号映射 Doppler 斜率。</a:t>
+                <a:latin typeface="Aptos"/>
+                <a:ea typeface="Aptos"/>
+                <a:cs typeface="Aptos"/>
+              </a:rPr>
+              <a:t>mu and delta use the negative delay-slope mapping; rho uses the positive Doppler-slope mapping.</a:t>
             </a:r>
           </a:p>
         </p:txBody>
@@ -4797,7 +4797,7 @@
     </p:spTree>
     <p:extLst>
       <p:ext uri="{BB962C8B-B14F-4D97-AF65-F5344CB8AC3E}">
-        <p14:creationId xmlns:p14="http://schemas.microsoft.com/office/powerpoint/2010/main" val="398175773"/>
+        <p14:creationId xmlns:p14="http://schemas.microsoft.com/office/powerpoint/2010/main" val="479869368"/>
       </p:ext>
     </p:extLst>
   </p:cSld>
@@ -4828,7 +4828,7 @@
           <p:cNvPr id="1" name="">
             <a:extLst xmlns:a="http://schemas.openxmlformats.org/drawingml/2006/main">
               <a:ext uri="{FF2B5EF4-FFF2-40B4-BE49-F238E27FC236}">
-                <a16:creationId xmlns:a16="http://schemas.microsoft.com/office/drawing/2014/main" id="{1241D6DE-4878-4FB5-BDDC-FEE1840BFCE7}"/>
+                <a16:creationId xmlns:a16="http://schemas.microsoft.com/office/drawing/2014/main" id="{52512ACA-4576-4C82-93A0-70AF18E92576}"/>
               </a:ext>
             </a:extLst>
           </p:cNvPr>
@@ -4861,7 +4861,7 @@
           <p:cNvPr id="2" name="">
             <a:extLst xmlns:a="http://schemas.openxmlformats.org/drawingml/2006/main">
               <a:ext uri="{FF2B5EF4-FFF2-40B4-BE49-F238E27FC236}">
-                <a16:creationId xmlns:a16="http://schemas.microsoft.com/office/drawing/2014/main" id="{5C459F56-C28D-4F6B-924B-7E726931E937}"/>
+                <a16:creationId xmlns:a16="http://schemas.microsoft.com/office/drawing/2014/main" id="{39A19382-56F5-454A-9350-9228FE1A6A05}"/>
               </a:ext>
             </a:extLst>
           </p:cNvPr>
@@ -4901,9 +4901,9 @@
                 <a:solidFill>
                   <a:srgbClr val="5B6472"/>
                 </a:solidFill>
-                <a:latin typeface="Microsoft YaHei"/>
-                <a:ea typeface="Microsoft YaHei"/>
-                <a:cs typeface="Microsoft YaHei"/>
+                <a:latin typeface="Aptos"/>
+                <a:ea typeface="Aptos"/>
+                <a:cs typeface="Aptos"/>
               </a:defRPr>
             </a:pPr>
             <a:r>
@@ -4911,9 +4911,9 @@
                 <a:solidFill>
                   <a:srgbClr val="5B6472"/>
                 </a:solidFill>
-                <a:latin typeface="Microsoft YaHei"/>
-                <a:ea typeface="Microsoft YaHei"/>
-                <a:cs typeface="Microsoft YaHei"/>
+                <a:latin typeface="Aptos"/>
+                <a:ea typeface="Aptos"/>
+                <a:cs typeface="Aptos"/>
               </a:rPr>
               <a:t>NAFEncoderLSNet | 03</a:t>
             </a:r>
@@ -4925,7 +4925,7 @@
           <p:cNvPr id="3" name="">
             <a:extLst xmlns:a="http://schemas.openxmlformats.org/drawingml/2006/main">
               <a:ext uri="{FF2B5EF4-FFF2-40B4-BE49-F238E27FC236}">
-                <a16:creationId xmlns:a16="http://schemas.microsoft.com/office/drawing/2014/main" id="{6ECFAF6B-004D-4688-BAAB-FC022B8A00E9}"/>
+                <a16:creationId xmlns:a16="http://schemas.microsoft.com/office/drawing/2014/main" id="{71C67136-5F2F-4328-8202-FC400B691D24}"/>
               </a:ext>
             </a:extLst>
           </p:cNvPr>
@@ -4965,9 +4965,9 @@
                 <a:solidFill>
                   <a:srgbClr val="5B6472"/>
                 </a:solidFill>
-                <a:latin typeface="Microsoft YaHei"/>
-                <a:ea typeface="Microsoft YaHei"/>
-                <a:cs typeface="Microsoft YaHei"/>
+                <a:latin typeface="Aptos"/>
+                <a:ea typeface="Aptos"/>
+                <a:cs typeface="Aptos"/>
               </a:defRPr>
             </a:pPr>
             <a:r>
@@ -4975,9 +4975,9 @@
                 <a:solidFill>
                   <a:srgbClr val="5B6472"/>
                 </a:solidFill>
-                <a:latin typeface="Microsoft YaHei"/>
-                <a:ea typeface="Microsoft YaHei"/>
-                <a:cs typeface="Microsoft YaHei"/>
+                <a:latin typeface="Aptos"/>
+                <a:ea typeface="Aptos"/>
+                <a:cs typeface="Aptos"/>
               </a:rPr>
               <a:t>Stem, downsampling, bottleneck</a:t>
             </a:r>
@@ -4989,7 +4989,7 @@
           <p:cNvPr id="4" name="">
             <a:extLst xmlns:a="http://schemas.openxmlformats.org/drawingml/2006/main">
               <a:ext uri="{FF2B5EF4-FFF2-40B4-BE49-F238E27FC236}">
-                <a16:creationId xmlns:a16="http://schemas.microsoft.com/office/drawing/2014/main" id="{F0D748D5-D3B5-4BE3-BB99-E6E089CE3116}"/>
+                <a16:creationId xmlns:a16="http://schemas.microsoft.com/office/drawing/2014/main" id="{F97535BF-EE91-4BB8-8D5B-9672BFC170F8}"/>
               </a:ext>
             </a:extLst>
           </p:cNvPr>
@@ -5029,9 +5029,9 @@
                 <a:solidFill>
                   <a:srgbClr val="111827"/>
                 </a:solidFill>
-                <a:latin typeface="Microsoft YaHei UI"/>
-                <a:ea typeface="Microsoft YaHei UI"/>
-                <a:cs typeface="Microsoft YaHei UI"/>
+                <a:latin typeface="Aptos Display"/>
+                <a:ea typeface="Aptos Display"/>
+                <a:cs typeface="Aptos Display"/>
               </a:defRPr>
             </a:pPr>
             <a:r>
@@ -5039,11 +5039,11 @@
                 <a:solidFill>
                   <a:srgbClr val="111827"/>
                 </a:solidFill>
-                <a:latin typeface="Microsoft YaHei UI"/>
-                <a:ea typeface="Microsoft YaHei UI"/>
-                <a:cs typeface="Microsoft YaHei UI"/>
-              </a:rPr>
-              <a:t>Encoder 主干</a:t>
+                <a:latin typeface="Aptos Display"/>
+                <a:ea typeface="Aptos Display"/>
+                <a:cs typeface="Aptos Display"/>
+              </a:rPr>
+              <a:t>Encoder Backbone</a:t>
             </a:r>
           </a:p>
         </p:txBody>
@@ -5053,7 +5053,7 @@
           <p:cNvPr id="5" name="">
             <a:extLst xmlns:a="http://schemas.openxmlformats.org/drawingml/2006/main">
               <a:ext uri="{FF2B5EF4-FFF2-40B4-BE49-F238E27FC236}">
-                <a16:creationId xmlns:a16="http://schemas.microsoft.com/office/drawing/2014/main" id="{4C0D88C3-1C74-4732-82E2-850D2E28D248}"/>
+                <a16:creationId xmlns:a16="http://schemas.microsoft.com/office/drawing/2014/main" id="{B503B1EF-5580-475B-925F-581360BC4618}"/>
               </a:ext>
             </a:extLst>
           </p:cNvPr>
@@ -5086,7 +5086,7 @@
           <p:cNvPr id="6" name="">
             <a:extLst xmlns:a="http://schemas.openxmlformats.org/drawingml/2006/main">
               <a:ext uri="{FF2B5EF4-FFF2-40B4-BE49-F238E27FC236}">
-                <a16:creationId xmlns:a16="http://schemas.microsoft.com/office/drawing/2014/main" id="{AB40D23D-98DC-4936-8009-BD1A41F7BC24}"/>
+                <a16:creationId xmlns:a16="http://schemas.microsoft.com/office/drawing/2014/main" id="{F675E035-1668-4345-A186-063B03FAAF8A}"/>
               </a:ext>
             </a:extLst>
           </p:cNvPr>
@@ -5124,9 +5124,9 @@
                 <a:solidFill>
                   <a:srgbClr val="111827"/>
                 </a:solidFill>
-                <a:latin typeface="Microsoft YaHei"/>
-                <a:ea typeface="Microsoft YaHei"/>
-                <a:cs typeface="Microsoft YaHei"/>
+                <a:latin typeface="Aptos"/>
+                <a:ea typeface="Aptos"/>
+                <a:cs typeface="Aptos"/>
               </a:defRPr>
             </a:pPr>
             <a:r>
@@ -5134,9 +5134,9 @@
                 <a:solidFill>
                   <a:srgbClr val="111827"/>
                 </a:solidFill>
-                <a:latin typeface="Microsoft YaHei"/>
-                <a:ea typeface="Microsoft YaHei"/>
-                <a:cs typeface="Microsoft YaHei"/>
+                <a:latin typeface="Aptos"/>
+                <a:ea typeface="Aptos"/>
+                <a:cs typeface="Aptos"/>
               </a:rPr>
               <a:t>x</a:t>
             </a:r>
@@ -5147,9 +5147,9 @@
                 <a:solidFill>
                   <a:srgbClr val="111827"/>
                 </a:solidFill>
-                <a:latin typeface="Microsoft YaHei"/>
-                <a:ea typeface="Microsoft YaHei"/>
-                <a:cs typeface="Microsoft YaHei"/>
+                <a:latin typeface="Aptos"/>
+                <a:ea typeface="Aptos"/>
+                <a:cs typeface="Aptos"/>
               </a:defRPr>
             </a:pPr>
             <a:r>
@@ -5157,9 +5157,9 @@
                 <a:solidFill>
                   <a:srgbClr val="111827"/>
                 </a:solidFill>
-                <a:latin typeface="Microsoft YaHei"/>
-                <a:ea typeface="Microsoft YaHei"/>
-                <a:cs typeface="Microsoft YaHei"/>
+                <a:latin typeface="Aptos"/>
+                <a:ea typeface="Aptos"/>
+                <a:cs typeface="Aptos"/>
               </a:rPr>
               <a:t>B x C_in x N_sc x T</a:t>
             </a:r>
@@ -5171,7 +5171,7 @@
           <p:cNvPr id="7" name="">
             <a:extLst xmlns:a="http://schemas.openxmlformats.org/drawingml/2006/main">
               <a:ext uri="{FF2B5EF4-FFF2-40B4-BE49-F238E27FC236}">
-                <a16:creationId xmlns:a16="http://schemas.microsoft.com/office/drawing/2014/main" id="{E804AC4E-19CA-4183-9F73-ACA1F3566EDC}"/>
+                <a16:creationId xmlns:a16="http://schemas.microsoft.com/office/drawing/2014/main" id="{EEDD31B1-06D0-4EA7-8AED-FB140F890003}"/>
               </a:ext>
             </a:extLst>
           </p:cNvPr>
@@ -5204,7 +5204,7 @@
           <p:cNvPr id="8" name="">
             <a:extLst xmlns:a="http://schemas.openxmlformats.org/drawingml/2006/main">
               <a:ext uri="{FF2B5EF4-FFF2-40B4-BE49-F238E27FC236}">
-                <a16:creationId xmlns:a16="http://schemas.microsoft.com/office/drawing/2014/main" id="{CE52E532-F162-40AA-8775-410323C7ABBD}"/>
+                <a16:creationId xmlns:a16="http://schemas.microsoft.com/office/drawing/2014/main" id="{5EE86D55-2AEA-4F5B-8234-839E3A7D0A1D}"/>
               </a:ext>
             </a:extLst>
           </p:cNvPr>
@@ -5242,9 +5242,9 @@
                 <a:solidFill>
                   <a:srgbClr val="111827"/>
                 </a:solidFill>
-                <a:latin typeface="Microsoft YaHei"/>
-                <a:ea typeface="Microsoft YaHei"/>
-                <a:cs typeface="Microsoft YaHei"/>
+                <a:latin typeface="Aptos"/>
+                <a:ea typeface="Aptos"/>
+                <a:cs typeface="Aptos"/>
               </a:defRPr>
             </a:pPr>
             <a:r>
@@ -5252,9 +5252,9 @@
                 <a:solidFill>
                   <a:srgbClr val="111827"/>
                 </a:solidFill>
-                <a:latin typeface="Microsoft YaHei"/>
-                <a:ea typeface="Microsoft YaHei"/>
-                <a:cs typeface="Microsoft YaHei"/>
+                <a:latin typeface="Aptos"/>
+                <a:ea typeface="Aptos"/>
+                <a:cs typeface="Aptos"/>
               </a:rPr>
               <a:t>stem</a:t>
             </a:r>
@@ -5265,9 +5265,9 @@
                 <a:solidFill>
                   <a:srgbClr val="111827"/>
                 </a:solidFill>
-                <a:latin typeface="Microsoft YaHei"/>
-                <a:ea typeface="Microsoft YaHei"/>
-                <a:cs typeface="Microsoft YaHei"/>
+                <a:latin typeface="Aptos"/>
+                <a:ea typeface="Aptos"/>
+                <a:cs typeface="Aptos"/>
               </a:defRPr>
             </a:pPr>
             <a:r>
@@ -5275,9 +5275,9 @@
                 <a:solidFill>
                   <a:srgbClr val="111827"/>
                 </a:solidFill>
-                <a:latin typeface="Microsoft YaHei"/>
-                <a:ea typeface="Microsoft YaHei"/>
-                <a:cs typeface="Microsoft YaHei"/>
+                <a:latin typeface="Aptos"/>
+                <a:ea typeface="Aptos"/>
+                <a:cs typeface="Aptos"/>
               </a:rPr>
               <a:t>Conv2d 1x1</a:t>
             </a:r>
@@ -5288,9 +5288,9 @@
                 <a:solidFill>
                   <a:srgbClr val="111827"/>
                 </a:solidFill>
-                <a:latin typeface="Microsoft YaHei"/>
-                <a:ea typeface="Microsoft YaHei"/>
-                <a:cs typeface="Microsoft YaHei"/>
+                <a:latin typeface="Aptos"/>
+                <a:ea typeface="Aptos"/>
+                <a:cs typeface="Aptos"/>
               </a:defRPr>
             </a:pPr>
             <a:r>
@@ -5298,9 +5298,9 @@
                 <a:solidFill>
                   <a:srgbClr val="111827"/>
                 </a:solidFill>
-                <a:latin typeface="Microsoft YaHei"/>
-                <a:ea typeface="Microsoft YaHei"/>
-                <a:cs typeface="Microsoft YaHei"/>
+                <a:latin typeface="Aptos"/>
+                <a:ea typeface="Aptos"/>
+                <a:cs typeface="Aptos"/>
               </a:rPr>
               <a:t>C_in -&gt; C</a:t>
             </a:r>
@@ -5312,7 +5312,7 @@
           <p:cNvPr id="9" name="">
             <a:extLst xmlns:a="http://schemas.openxmlformats.org/drawingml/2006/main">
               <a:ext uri="{FF2B5EF4-FFF2-40B4-BE49-F238E27FC236}">
-                <a16:creationId xmlns:a16="http://schemas.microsoft.com/office/drawing/2014/main" id="{776CD89C-F48A-44A8-8DFD-4318FFACD540}"/>
+                <a16:creationId xmlns:a16="http://schemas.microsoft.com/office/drawing/2014/main" id="{7AB6A3FA-A31B-4C4B-A145-6F92C3749190}"/>
               </a:ext>
             </a:extLst>
           </p:cNvPr>
@@ -5345,7 +5345,7 @@
           <p:cNvPr id="10" name="">
             <a:extLst xmlns:a="http://schemas.openxmlformats.org/drawingml/2006/main">
               <a:ext uri="{FF2B5EF4-FFF2-40B4-BE49-F238E27FC236}">
-                <a16:creationId xmlns:a16="http://schemas.microsoft.com/office/drawing/2014/main" id="{A639DDA9-AEAC-47EB-8E12-3E29D7ED7F57}"/>
+                <a16:creationId xmlns:a16="http://schemas.microsoft.com/office/drawing/2014/main" id="{F4802469-D520-4D1E-B74B-3D7AEDAC7273}"/>
               </a:ext>
             </a:extLst>
           </p:cNvPr>
@@ -5383,9 +5383,9 @@
                 <a:solidFill>
                   <a:srgbClr val="111827"/>
                 </a:solidFill>
-                <a:latin typeface="Microsoft YaHei"/>
-                <a:ea typeface="Microsoft YaHei"/>
-                <a:cs typeface="Microsoft YaHei"/>
+                <a:latin typeface="Aptos"/>
+                <a:ea typeface="Aptos"/>
+                <a:cs typeface="Aptos"/>
               </a:defRPr>
             </a:pPr>
             <a:r>
@@ -5393,9 +5393,9 @@
                 <a:solidFill>
                   <a:srgbClr val="111827"/>
                 </a:solidFill>
-                <a:latin typeface="Microsoft YaHei"/>
-                <a:ea typeface="Microsoft YaHei"/>
-                <a:cs typeface="Microsoft YaHei"/>
+                <a:latin typeface="Aptos"/>
+                <a:ea typeface="Aptos"/>
+                <a:cs typeface="Aptos"/>
               </a:rPr>
               <a:t>stage1</a:t>
             </a:r>
@@ -5406,9 +5406,9 @@
                 <a:solidFill>
                   <a:srgbClr val="111827"/>
                 </a:solidFill>
-                <a:latin typeface="Microsoft YaHei"/>
-                <a:ea typeface="Microsoft YaHei"/>
-                <a:cs typeface="Microsoft YaHei"/>
+                <a:latin typeface="Aptos"/>
+                <a:ea typeface="Aptos"/>
+                <a:cs typeface="Aptos"/>
               </a:defRPr>
             </a:pPr>
             <a:r>
@@ -5416,9 +5416,9 @@
                 <a:solidFill>
                   <a:srgbClr val="111827"/>
                 </a:solidFill>
-                <a:latin typeface="Microsoft YaHei"/>
-                <a:ea typeface="Microsoft YaHei"/>
-                <a:cs typeface="Microsoft YaHei"/>
+                <a:latin typeface="Aptos"/>
+                <a:ea typeface="Aptos"/>
+                <a:cs typeface="Aptos"/>
               </a:rPr>
               <a:t>NAFBlock x1</a:t>
             </a:r>
@@ -5430,7 +5430,7 @@
           <p:cNvPr id="11" name="">
             <a:extLst xmlns:a="http://schemas.openxmlformats.org/drawingml/2006/main">
               <a:ext uri="{FF2B5EF4-FFF2-40B4-BE49-F238E27FC236}">
-                <a16:creationId xmlns:a16="http://schemas.microsoft.com/office/drawing/2014/main" id="{3DEAEA0C-A9C1-430C-B77A-88109D626E9B}"/>
+                <a16:creationId xmlns:a16="http://schemas.microsoft.com/office/drawing/2014/main" id="{304BA9AF-0F19-4620-A896-DD845181637E}"/>
               </a:ext>
             </a:extLst>
           </p:cNvPr>
@@ -5463,7 +5463,7 @@
           <p:cNvPr id="12" name="">
             <a:extLst xmlns:a="http://schemas.openxmlformats.org/drawingml/2006/main">
               <a:ext uri="{FF2B5EF4-FFF2-40B4-BE49-F238E27FC236}">
-                <a16:creationId xmlns:a16="http://schemas.microsoft.com/office/drawing/2014/main" id="{63231DAB-BC78-4F6C-A2E0-FB1CD0976174}"/>
+                <a16:creationId xmlns:a16="http://schemas.microsoft.com/office/drawing/2014/main" id="{272AEAA8-6F7B-4C16-A96E-C268776C72B3}"/>
               </a:ext>
             </a:extLst>
           </p:cNvPr>
@@ -5501,9 +5501,9 @@
                 <a:solidFill>
                   <a:srgbClr val="111827"/>
                 </a:solidFill>
-                <a:latin typeface="Microsoft YaHei"/>
-                <a:ea typeface="Microsoft YaHei"/>
-                <a:cs typeface="Microsoft YaHei"/>
+                <a:latin typeface="Aptos"/>
+                <a:ea typeface="Aptos"/>
+                <a:cs typeface="Aptos"/>
               </a:defRPr>
             </a:pPr>
             <a:r>
@@ -5511,9 +5511,9 @@
                 <a:solidFill>
                   <a:srgbClr val="111827"/>
                 </a:solidFill>
-                <a:latin typeface="Microsoft YaHei"/>
-                <a:ea typeface="Microsoft YaHei"/>
-                <a:cs typeface="Microsoft YaHei"/>
+                <a:latin typeface="Aptos"/>
+                <a:ea typeface="Aptos"/>
+                <a:cs typeface="Aptos"/>
               </a:rPr>
               <a:t>down1</a:t>
             </a:r>
@@ -5524,9 +5524,9 @@
                 <a:solidFill>
                   <a:srgbClr val="111827"/>
                 </a:solidFill>
-                <a:latin typeface="Microsoft YaHei"/>
-                <a:ea typeface="Microsoft YaHei"/>
-                <a:cs typeface="Microsoft YaHei"/>
+                <a:latin typeface="Aptos"/>
+                <a:ea typeface="Aptos"/>
+                <a:cs typeface="Aptos"/>
               </a:defRPr>
             </a:pPr>
             <a:r>
@@ -5534,9 +5534,9 @@
                 <a:solidFill>
                   <a:srgbClr val="111827"/>
                 </a:solidFill>
-                <a:latin typeface="Microsoft YaHei"/>
-                <a:ea typeface="Microsoft YaHei"/>
-                <a:cs typeface="Microsoft YaHei"/>
+                <a:latin typeface="Aptos"/>
+                <a:ea typeface="Aptos"/>
+                <a:cs typeface="Aptos"/>
               </a:rPr>
               <a:t>Conv3x3 s=2</a:t>
             </a:r>
@@ -5547,9 +5547,9 @@
                 <a:solidFill>
                   <a:srgbClr val="111827"/>
                 </a:solidFill>
-                <a:latin typeface="Microsoft YaHei"/>
-                <a:ea typeface="Microsoft YaHei"/>
-                <a:cs typeface="Microsoft YaHei"/>
+                <a:latin typeface="Aptos"/>
+                <a:ea typeface="Aptos"/>
+                <a:cs typeface="Aptos"/>
               </a:defRPr>
             </a:pPr>
             <a:r>
@@ -5557,9 +5557,9 @@
                 <a:solidFill>
                   <a:srgbClr val="111827"/>
                 </a:solidFill>
-                <a:latin typeface="Microsoft YaHei"/>
-                <a:ea typeface="Microsoft YaHei"/>
-                <a:cs typeface="Microsoft YaHei"/>
+                <a:latin typeface="Aptos"/>
+                <a:ea typeface="Aptos"/>
+                <a:cs typeface="Aptos"/>
               </a:rPr>
               <a:t>C -&gt; 2C</a:t>
             </a:r>
@@ -5571,7 +5571,7 @@
           <p:cNvPr id="13" name="">
             <a:extLst xmlns:a="http://schemas.openxmlformats.org/drawingml/2006/main">
               <a:ext uri="{FF2B5EF4-FFF2-40B4-BE49-F238E27FC236}">
-                <a16:creationId xmlns:a16="http://schemas.microsoft.com/office/drawing/2014/main" id="{74202529-883C-49CC-A1A5-F2BA53E07DE6}"/>
+                <a16:creationId xmlns:a16="http://schemas.microsoft.com/office/drawing/2014/main" id="{ABF76223-550C-4600-97ED-6F885C75C5FC}"/>
               </a:ext>
             </a:extLst>
           </p:cNvPr>
@@ -5604,7 +5604,7 @@
           <p:cNvPr id="14" name="">
             <a:extLst xmlns:a="http://schemas.openxmlformats.org/drawingml/2006/main">
               <a:ext uri="{FF2B5EF4-FFF2-40B4-BE49-F238E27FC236}">
-                <a16:creationId xmlns:a16="http://schemas.microsoft.com/office/drawing/2014/main" id="{87651FB4-16DF-475C-9655-F25A03C31003}"/>
+                <a16:creationId xmlns:a16="http://schemas.microsoft.com/office/drawing/2014/main" id="{5F90A169-183D-4C9C-84B9-A585AB64FAE6}"/>
               </a:ext>
             </a:extLst>
           </p:cNvPr>
@@ -5642,9 +5642,9 @@
                 <a:solidFill>
                   <a:srgbClr val="111827"/>
                 </a:solidFill>
-                <a:latin typeface="Microsoft YaHei"/>
-                <a:ea typeface="Microsoft YaHei"/>
-                <a:cs typeface="Microsoft YaHei"/>
+                <a:latin typeface="Aptos"/>
+                <a:ea typeface="Aptos"/>
+                <a:cs typeface="Aptos"/>
               </a:defRPr>
             </a:pPr>
             <a:r>
@@ -5652,9 +5652,9 @@
                 <a:solidFill>
                   <a:srgbClr val="111827"/>
                 </a:solidFill>
-                <a:latin typeface="Microsoft YaHei"/>
-                <a:ea typeface="Microsoft YaHei"/>
-                <a:cs typeface="Microsoft YaHei"/>
+                <a:latin typeface="Aptos"/>
+                <a:ea typeface="Aptos"/>
+                <a:cs typeface="Aptos"/>
               </a:rPr>
               <a:t>stage2</a:t>
             </a:r>
@@ -5665,9 +5665,9 @@
                 <a:solidFill>
                   <a:srgbClr val="111827"/>
                 </a:solidFill>
-                <a:latin typeface="Microsoft YaHei"/>
-                <a:ea typeface="Microsoft YaHei"/>
-                <a:cs typeface="Microsoft YaHei"/>
+                <a:latin typeface="Aptos"/>
+                <a:ea typeface="Aptos"/>
+                <a:cs typeface="Aptos"/>
               </a:defRPr>
             </a:pPr>
             <a:r>
@@ -5675,9 +5675,9 @@
                 <a:solidFill>
                   <a:srgbClr val="111827"/>
                 </a:solidFill>
-                <a:latin typeface="Microsoft YaHei"/>
-                <a:ea typeface="Microsoft YaHei"/>
-                <a:cs typeface="Microsoft YaHei"/>
+                <a:latin typeface="Aptos"/>
+                <a:ea typeface="Aptos"/>
+                <a:cs typeface="Aptos"/>
               </a:rPr>
               <a:t>NAFBlock x2</a:t>
             </a:r>
@@ -5689,7 +5689,7 @@
           <p:cNvPr id="15" name="">
             <a:extLst xmlns:a="http://schemas.openxmlformats.org/drawingml/2006/main">
               <a:ext uri="{FF2B5EF4-FFF2-40B4-BE49-F238E27FC236}">
-                <a16:creationId xmlns:a16="http://schemas.microsoft.com/office/drawing/2014/main" id="{32FCEFD1-3243-45C8-9CD2-9E690DB88563}"/>
+                <a16:creationId xmlns:a16="http://schemas.microsoft.com/office/drawing/2014/main" id="{59CC28F6-30F7-4527-BB08-6247B0C53EEC}"/>
               </a:ext>
             </a:extLst>
           </p:cNvPr>
@@ -5727,9 +5727,9 @@
                 <a:solidFill>
                   <a:srgbClr val="111827"/>
                 </a:solidFill>
-                <a:latin typeface="Microsoft YaHei"/>
-                <a:ea typeface="Microsoft YaHei"/>
-                <a:cs typeface="Microsoft YaHei"/>
+                <a:latin typeface="Aptos"/>
+                <a:ea typeface="Aptos"/>
+                <a:cs typeface="Aptos"/>
               </a:defRPr>
             </a:pPr>
             <a:r>
@@ -5737,9 +5737,9 @@
                 <a:solidFill>
                   <a:srgbClr val="111827"/>
                 </a:solidFill>
-                <a:latin typeface="Microsoft YaHei"/>
-                <a:ea typeface="Microsoft YaHei"/>
-                <a:cs typeface="Microsoft YaHei"/>
+                <a:latin typeface="Aptos"/>
+                <a:ea typeface="Aptos"/>
+                <a:cs typeface="Aptos"/>
               </a:rPr>
               <a:t>down2</a:t>
             </a:r>
@@ -5750,9 +5750,9 @@
                 <a:solidFill>
                   <a:srgbClr val="111827"/>
                 </a:solidFill>
-                <a:latin typeface="Microsoft YaHei"/>
-                <a:ea typeface="Microsoft YaHei"/>
-                <a:cs typeface="Microsoft YaHei"/>
+                <a:latin typeface="Aptos"/>
+                <a:ea typeface="Aptos"/>
+                <a:cs typeface="Aptos"/>
               </a:defRPr>
             </a:pPr>
             <a:r>
@@ -5760,9 +5760,9 @@
                 <a:solidFill>
                   <a:srgbClr val="111827"/>
                 </a:solidFill>
-                <a:latin typeface="Microsoft YaHei"/>
-                <a:ea typeface="Microsoft YaHei"/>
-                <a:cs typeface="Microsoft YaHei"/>
+                <a:latin typeface="Aptos"/>
+                <a:ea typeface="Aptos"/>
+                <a:cs typeface="Aptos"/>
               </a:rPr>
               <a:t>Conv3x3 s=2</a:t>
             </a:r>
@@ -5773,9 +5773,9 @@
                 <a:solidFill>
                   <a:srgbClr val="111827"/>
                 </a:solidFill>
-                <a:latin typeface="Microsoft YaHei"/>
-                <a:ea typeface="Microsoft YaHei"/>
-                <a:cs typeface="Microsoft YaHei"/>
+                <a:latin typeface="Aptos"/>
+                <a:ea typeface="Aptos"/>
+                <a:cs typeface="Aptos"/>
               </a:defRPr>
             </a:pPr>
             <a:r>
@@ -5783,9 +5783,9 @@
                 <a:solidFill>
                   <a:srgbClr val="111827"/>
                 </a:solidFill>
-                <a:latin typeface="Microsoft YaHei"/>
-                <a:ea typeface="Microsoft YaHei"/>
-                <a:cs typeface="Microsoft YaHei"/>
+                <a:latin typeface="Aptos"/>
+                <a:ea typeface="Aptos"/>
+                <a:cs typeface="Aptos"/>
               </a:rPr>
               <a:t>2C -&gt; 4C</a:t>
             </a:r>
@@ -5797,7 +5797,7 @@
           <p:cNvPr id="16" name="">
             <a:extLst xmlns:a="http://schemas.openxmlformats.org/drawingml/2006/main">
               <a:ext uri="{FF2B5EF4-FFF2-40B4-BE49-F238E27FC236}">
-                <a16:creationId xmlns:a16="http://schemas.microsoft.com/office/drawing/2014/main" id="{ABC62362-1AE8-4591-A32D-1E910DCD089D}"/>
+                <a16:creationId xmlns:a16="http://schemas.microsoft.com/office/drawing/2014/main" id="{CC187EB5-1B74-46F2-895A-728E352B94BB}"/>
               </a:ext>
             </a:extLst>
           </p:cNvPr>
@@ -5835,9 +5835,9 @@
                 <a:solidFill>
                   <a:srgbClr val="111827"/>
                 </a:solidFill>
-                <a:latin typeface="Microsoft YaHei"/>
-                <a:ea typeface="Microsoft YaHei"/>
-                <a:cs typeface="Microsoft YaHei"/>
+                <a:latin typeface="Aptos"/>
+                <a:ea typeface="Aptos"/>
+                <a:cs typeface="Aptos"/>
               </a:defRPr>
             </a:pPr>
             <a:r>
@@ -5845,9 +5845,9 @@
                 <a:solidFill>
                   <a:srgbClr val="111827"/>
                 </a:solidFill>
-                <a:latin typeface="Microsoft YaHei"/>
-                <a:ea typeface="Microsoft YaHei"/>
-                <a:cs typeface="Microsoft YaHei"/>
+                <a:latin typeface="Aptos"/>
+                <a:ea typeface="Aptos"/>
+                <a:cs typeface="Aptos"/>
               </a:rPr>
               <a:t>dropout2d</a:t>
             </a:r>
@@ -5858,9 +5858,9 @@
                 <a:solidFill>
                   <a:srgbClr val="111827"/>
                 </a:solidFill>
-                <a:latin typeface="Microsoft YaHei"/>
-                <a:ea typeface="Microsoft YaHei"/>
-                <a:cs typeface="Microsoft YaHei"/>
+                <a:latin typeface="Aptos"/>
+                <a:ea typeface="Aptos"/>
+                <a:cs typeface="Aptos"/>
               </a:defRPr>
             </a:pPr>
             <a:r>
@@ -5868,9 +5868,9 @@
                 <a:solidFill>
                   <a:srgbClr val="111827"/>
                 </a:solidFill>
-                <a:latin typeface="Microsoft YaHei"/>
-                <a:ea typeface="Microsoft YaHei"/>
-                <a:cs typeface="Microsoft YaHei"/>
+                <a:latin typeface="Aptos"/>
+                <a:ea typeface="Aptos"/>
+                <a:cs typeface="Aptos"/>
               </a:rPr>
               <a:t>optional regularization</a:t>
             </a:r>
@@ -5882,7 +5882,7 @@
           <p:cNvPr id="17" name="">
             <a:extLst xmlns:a="http://schemas.openxmlformats.org/drawingml/2006/main">
               <a:ext uri="{FF2B5EF4-FFF2-40B4-BE49-F238E27FC236}">
-                <a16:creationId xmlns:a16="http://schemas.microsoft.com/office/drawing/2014/main" id="{6D34EDE5-491E-4C6B-AF05-ECEB347571B8}"/>
+                <a16:creationId xmlns:a16="http://schemas.microsoft.com/office/drawing/2014/main" id="{9B1D7DDB-45AB-44A5-8495-C28D13E1DAC5}"/>
               </a:ext>
             </a:extLst>
           </p:cNvPr>
@@ -5920,9 +5920,9 @@
                 <a:solidFill>
                   <a:srgbClr val="111827"/>
                 </a:solidFill>
-                <a:latin typeface="Microsoft YaHei"/>
-                <a:ea typeface="Microsoft YaHei"/>
-                <a:cs typeface="Microsoft YaHei"/>
+                <a:latin typeface="Aptos"/>
+                <a:ea typeface="Aptos"/>
+                <a:cs typeface="Aptos"/>
               </a:defRPr>
             </a:pPr>
             <a:r>
@@ -5930,9 +5930,9 @@
                 <a:solidFill>
                   <a:srgbClr val="111827"/>
                 </a:solidFill>
-                <a:latin typeface="Microsoft YaHei"/>
-                <a:ea typeface="Microsoft YaHei"/>
-                <a:cs typeface="Microsoft YaHei"/>
+                <a:latin typeface="Aptos"/>
+                <a:ea typeface="Aptos"/>
+                <a:cs typeface="Aptos"/>
               </a:rPr>
               <a:t>bottleneck</a:t>
             </a:r>
@@ -5943,9 +5943,9 @@
                 <a:solidFill>
                   <a:srgbClr val="111827"/>
                 </a:solidFill>
-                <a:latin typeface="Microsoft YaHei"/>
-                <a:ea typeface="Microsoft YaHei"/>
-                <a:cs typeface="Microsoft YaHei"/>
+                <a:latin typeface="Aptos"/>
+                <a:ea typeface="Aptos"/>
+                <a:cs typeface="Aptos"/>
               </a:defRPr>
             </a:pPr>
             <a:r>
@@ -5953,9 +5953,9 @@
                 <a:solidFill>
                   <a:srgbClr val="111827"/>
                 </a:solidFill>
-                <a:latin typeface="Microsoft YaHei"/>
-                <a:ea typeface="Microsoft YaHei"/>
-                <a:cs typeface="Microsoft YaHei"/>
+                <a:latin typeface="Aptos"/>
+                <a:ea typeface="Aptos"/>
+                <a:cs typeface="Aptos"/>
               </a:rPr>
               <a:t>NAFBlock x1</a:t>
             </a:r>
@@ -5966,9 +5966,9 @@
                 <a:solidFill>
                   <a:srgbClr val="111827"/>
                 </a:solidFill>
-                <a:latin typeface="Microsoft YaHei"/>
-                <a:ea typeface="Microsoft YaHei"/>
-                <a:cs typeface="Microsoft YaHei"/>
+                <a:latin typeface="Aptos"/>
+                <a:ea typeface="Aptos"/>
+                <a:cs typeface="Aptos"/>
               </a:defRPr>
             </a:pPr>
             <a:r>
@@ -5976,9 +5976,9 @@
                 <a:solidFill>
                   <a:srgbClr val="111827"/>
                 </a:solidFill>
-                <a:latin typeface="Microsoft YaHei"/>
-                <a:ea typeface="Microsoft YaHei"/>
-                <a:cs typeface="Microsoft YaHei"/>
+                <a:latin typeface="Aptos"/>
+                <a:ea typeface="Aptos"/>
+                <a:cs typeface="Aptos"/>
               </a:rPr>
               <a:t>B x 4C x N_sc/4 x T/4</a:t>
             </a:r>
@@ -5990,7 +5990,7 @@
           <p:cNvPr id="18" name="">
             <a:extLst xmlns:a="http://schemas.openxmlformats.org/drawingml/2006/main">
               <a:ext uri="{FF2B5EF4-FFF2-40B4-BE49-F238E27FC236}">
-                <a16:creationId xmlns:a16="http://schemas.microsoft.com/office/drawing/2014/main" id="{0D49E51C-C0B3-4ED6-A09A-80BDB3603B68}"/>
+                <a16:creationId xmlns:a16="http://schemas.microsoft.com/office/drawing/2014/main" id="{486AA489-B995-4AF9-A36B-BAA3E982AD9F}"/>
               </a:ext>
             </a:extLst>
           </p:cNvPr>
@@ -6020,7 +6020,7 @@
           <p:cNvPr id="19" name="">
             <a:extLst xmlns:a="http://schemas.openxmlformats.org/drawingml/2006/main">
               <a:ext uri="{FF2B5EF4-FFF2-40B4-BE49-F238E27FC236}">
-                <a16:creationId xmlns:a16="http://schemas.microsoft.com/office/drawing/2014/main" id="{439DF087-CFAB-4FD3-A014-1C389B8CF0B9}"/>
+                <a16:creationId xmlns:a16="http://schemas.microsoft.com/office/drawing/2014/main" id="{37DC431A-EA64-4694-BF81-7EB454CE7DB4}"/>
               </a:ext>
             </a:extLst>
           </p:cNvPr>
@@ -6053,7 +6053,7 @@
           <p:cNvPr id="20" name="">
             <a:extLst xmlns:a="http://schemas.openxmlformats.org/drawingml/2006/main">
               <a:ext uri="{FF2B5EF4-FFF2-40B4-BE49-F238E27FC236}">
-                <a16:creationId xmlns:a16="http://schemas.microsoft.com/office/drawing/2014/main" id="{29B1DA83-B208-4861-9789-9985F79E1ADE}"/>
+                <a16:creationId xmlns:a16="http://schemas.microsoft.com/office/drawing/2014/main" id="{7725DD00-541A-416F-9661-1F620D77E2E2}"/>
               </a:ext>
             </a:extLst>
           </p:cNvPr>
@@ -6086,7 +6086,7 @@
           <p:cNvPr id="21" name="">
             <a:extLst xmlns:a="http://schemas.openxmlformats.org/drawingml/2006/main">
               <a:ext uri="{FF2B5EF4-FFF2-40B4-BE49-F238E27FC236}">
-                <a16:creationId xmlns:a16="http://schemas.microsoft.com/office/drawing/2014/main" id="{4183CC64-E81E-47E5-AD8C-FE8F01B0CD1C}"/>
+                <a16:creationId xmlns:a16="http://schemas.microsoft.com/office/drawing/2014/main" id="{5DE65CE7-D386-4363-85C4-5FF416E4993E}"/>
               </a:ext>
             </a:extLst>
           </p:cNvPr>
@@ -6119,7 +6119,7 @@
           <p:cNvPr id="22" name="">
             <a:extLst xmlns:a="http://schemas.openxmlformats.org/drawingml/2006/main">
               <a:ext uri="{FF2B5EF4-FFF2-40B4-BE49-F238E27FC236}">
-                <a16:creationId xmlns:a16="http://schemas.microsoft.com/office/drawing/2014/main" id="{898E566D-5869-423E-9ECE-F11EB4D10175}"/>
+                <a16:creationId xmlns:a16="http://schemas.microsoft.com/office/drawing/2014/main" id="{1181EC20-3685-42A8-BDFA-FDE29A2C5B23}"/>
               </a:ext>
             </a:extLst>
           </p:cNvPr>
@@ -6159,9 +6159,9 @@
                 <a:solidFill>
                   <a:srgbClr val="5B6472"/>
                 </a:solidFill>
-                <a:latin typeface="Microsoft YaHei"/>
-                <a:ea typeface="Microsoft YaHei"/>
-                <a:cs typeface="Microsoft YaHei"/>
+                <a:latin typeface="Aptos"/>
+                <a:ea typeface="Aptos"/>
+                <a:cs typeface="Aptos"/>
               </a:defRPr>
             </a:pPr>
             <a:r>
@@ -6169,11 +6169,11 @@
                 <a:solidFill>
                   <a:srgbClr val="5B6472"/>
                 </a:solidFill>
-                <a:latin typeface="Microsoft YaHei"/>
-                <a:ea typeface="Microsoft YaHei"/>
-                <a:cs typeface="Microsoft YaHei"/>
-              </a:rPr>
-              <a:t>两次 stride=2 是各向同性下采样，频率轴和时间轴同时压缩。</a:t>
+                <a:latin typeface="Aptos"/>
+                <a:ea typeface="Aptos"/>
+                <a:cs typeface="Aptos"/>
+              </a:rPr>
+              <a:t>Both stride-2 operations are isotropic: frequency and time are compressed together.</a:t>
             </a:r>
           </a:p>
         </p:txBody>
@@ -6183,7 +6183,7 @@
           <p:cNvPr id="23" name="">
             <a:extLst xmlns:a="http://schemas.openxmlformats.org/drawingml/2006/main">
               <a:ext uri="{FF2B5EF4-FFF2-40B4-BE49-F238E27FC236}">
-                <a16:creationId xmlns:a16="http://schemas.microsoft.com/office/drawing/2014/main" id="{756E1C65-6945-4A21-BFCD-5011E3B50646}"/>
+                <a16:creationId xmlns:a16="http://schemas.microsoft.com/office/drawing/2014/main" id="{50B69452-804B-48E5-BC2F-2442C564DBDF}"/>
               </a:ext>
             </a:extLst>
           </p:cNvPr>
@@ -6216,7 +6216,7 @@
           <p:cNvPr id="24" name="">
             <a:extLst xmlns:a="http://schemas.openxmlformats.org/drawingml/2006/main">
               <a:ext uri="{FF2B5EF4-FFF2-40B4-BE49-F238E27FC236}">
-                <a16:creationId xmlns:a16="http://schemas.microsoft.com/office/drawing/2014/main" id="{2FDDE75A-980E-49A3-A32A-5DAB09A519B7}"/>
+                <a16:creationId xmlns:a16="http://schemas.microsoft.com/office/drawing/2014/main" id="{EBE4B2E3-C248-4463-A25C-D1868E3BF54B}"/>
               </a:ext>
             </a:extLst>
           </p:cNvPr>
@@ -6256,9 +6256,9 @@
                 <a:solidFill>
                   <a:srgbClr val="5B6472"/>
                 </a:solidFill>
-                <a:latin typeface="Microsoft YaHei"/>
-                <a:ea typeface="Microsoft YaHei"/>
-                <a:cs typeface="Microsoft YaHei"/>
+                <a:latin typeface="Aptos"/>
+                <a:ea typeface="Aptos"/>
+                <a:cs typeface="Aptos"/>
               </a:defRPr>
             </a:pPr>
             <a:r>
@@ -6266,11 +6266,11 @@
                 <a:solidFill>
                   <a:srgbClr val="5B6472"/>
                 </a:solidFill>
-                <a:latin typeface="Microsoft YaHei"/>
-                <a:ea typeface="Microsoft YaHei"/>
-                <a:cs typeface="Microsoft YaHei"/>
-              </a:rPr>
-              <a:t>当 T=2 时，第一次下采样后时间轴通常已经变成 1，因此 rho 不走时间 soft-argmax。</a:t>
+                <a:latin typeface="Aptos"/>
+                <a:ea typeface="Aptos"/>
+                <a:cs typeface="Aptos"/>
+              </a:rPr>
+              <a:t>With the current T=2 input, the time axis typically collapses to one bin after the first downsample, so rho uses an MLP instead of time-axis soft-argmax.</a:t>
             </a:r>
           </a:p>
         </p:txBody>
@@ -6278,7 +6278,7 @@
     </p:spTree>
     <p:extLst>
       <p:ext uri="{BB962C8B-B14F-4D97-AF65-F5344CB8AC3E}">
-        <p14:creationId xmlns:p14="http://schemas.microsoft.com/office/powerpoint/2010/main" val="510708966"/>
+        <p14:creationId xmlns:p14="http://schemas.microsoft.com/office/powerpoint/2010/main" val="780218397"/>
       </p:ext>
     </p:extLst>
   </p:cSld>
@@ -6309,7 +6309,7 @@
           <p:cNvPr id="1" name="">
             <a:extLst xmlns:a="http://schemas.openxmlformats.org/drawingml/2006/main">
               <a:ext uri="{FF2B5EF4-FFF2-40B4-BE49-F238E27FC236}">
-                <a16:creationId xmlns:a16="http://schemas.microsoft.com/office/drawing/2014/main" id="{F9CD0BC1-D476-490F-893C-B2201CE24D28}"/>
+                <a16:creationId xmlns:a16="http://schemas.microsoft.com/office/drawing/2014/main" id="{251E4B59-C7FF-47FA-9B0C-2A86E42A5C8D}"/>
               </a:ext>
             </a:extLst>
           </p:cNvPr>
@@ -6342,7 +6342,7 @@
           <p:cNvPr id="2" name="">
             <a:extLst xmlns:a="http://schemas.openxmlformats.org/drawingml/2006/main">
               <a:ext uri="{FF2B5EF4-FFF2-40B4-BE49-F238E27FC236}">
-                <a16:creationId xmlns:a16="http://schemas.microsoft.com/office/drawing/2014/main" id="{43886E20-2423-4049-BAB2-018672E046A0}"/>
+                <a16:creationId xmlns:a16="http://schemas.microsoft.com/office/drawing/2014/main" id="{A9C50773-4656-4E2E-829C-290AEEACC559}"/>
               </a:ext>
             </a:extLst>
           </p:cNvPr>
@@ -6382,9 +6382,9 @@
                 <a:solidFill>
                   <a:srgbClr val="5B6472"/>
                 </a:solidFill>
-                <a:latin typeface="Microsoft YaHei"/>
-                <a:ea typeface="Microsoft YaHei"/>
-                <a:cs typeface="Microsoft YaHei"/>
+                <a:latin typeface="Aptos"/>
+                <a:ea typeface="Aptos"/>
+                <a:cs typeface="Aptos"/>
               </a:defRPr>
             </a:pPr>
             <a:r>
@@ -6392,9 +6392,9 @@
                 <a:solidFill>
                   <a:srgbClr val="5B6472"/>
                 </a:solidFill>
-                <a:latin typeface="Microsoft YaHei"/>
-                <a:ea typeface="Microsoft YaHei"/>
-                <a:cs typeface="Microsoft YaHei"/>
+                <a:latin typeface="Aptos"/>
+                <a:ea typeface="Aptos"/>
+                <a:cs typeface="Aptos"/>
               </a:rPr>
               <a:t>NAFEncoderLSNet | 04</a:t>
             </a:r>
@@ -6406,7 +6406,7 @@
           <p:cNvPr id="3" name="">
             <a:extLst xmlns:a="http://schemas.openxmlformats.org/drawingml/2006/main">
               <a:ext uri="{FF2B5EF4-FFF2-40B4-BE49-F238E27FC236}">
-                <a16:creationId xmlns:a16="http://schemas.microsoft.com/office/drawing/2014/main" id="{E9B6726D-26CA-4F1C-91EA-4FC2A624E222}"/>
+                <a16:creationId xmlns:a16="http://schemas.microsoft.com/office/drawing/2014/main" id="{FB7F7830-ADC2-4397-923A-3EE426F682D1}"/>
               </a:ext>
             </a:extLst>
           </p:cNvPr>
@@ -6446,9 +6446,9 @@
                 <a:solidFill>
                   <a:srgbClr val="5B6472"/>
                 </a:solidFill>
-                <a:latin typeface="Microsoft YaHei"/>
-                <a:ea typeface="Microsoft YaHei"/>
-                <a:cs typeface="Microsoft YaHei"/>
+                <a:latin typeface="Aptos"/>
+                <a:ea typeface="Aptos"/>
+                <a:cs typeface="Aptos"/>
               </a:defRPr>
             </a:pPr>
             <a:r>
@@ -6456,9 +6456,9 @@
                 <a:solidFill>
                   <a:srgbClr val="5B6472"/>
                 </a:solidFill>
-                <a:latin typeface="Microsoft YaHei"/>
-                <a:ea typeface="Microsoft YaHei"/>
-                <a:cs typeface="Microsoft YaHei"/>
+                <a:latin typeface="Aptos"/>
+                <a:ea typeface="Aptos"/>
+                <a:cs typeface="Aptos"/>
               </a:rPr>
               <a:t>Path delay slope</a:t>
             </a:r>
@@ -6470,7 +6470,7 @@
           <p:cNvPr id="4" name="">
             <a:extLst xmlns:a="http://schemas.openxmlformats.org/drawingml/2006/main">
               <a:ext uri="{FF2B5EF4-FFF2-40B4-BE49-F238E27FC236}">
-                <a16:creationId xmlns:a16="http://schemas.microsoft.com/office/drawing/2014/main" id="{3DACC22F-680F-40E7-B737-C8392EA93A9D}"/>
+                <a16:creationId xmlns:a16="http://schemas.microsoft.com/office/drawing/2014/main" id="{C844B3A2-D168-4745-AE93-9F7450211481}"/>
               </a:ext>
             </a:extLst>
           </p:cNvPr>
@@ -6510,9 +6510,9 @@
                 <a:solidFill>
                   <a:srgbClr val="111827"/>
                 </a:solidFill>
-                <a:latin typeface="Microsoft YaHei UI"/>
-                <a:ea typeface="Microsoft YaHei UI"/>
-                <a:cs typeface="Microsoft YaHei UI"/>
+                <a:latin typeface="Aptos Display"/>
+                <a:ea typeface="Aptos Display"/>
+                <a:cs typeface="Aptos Display"/>
               </a:defRPr>
             </a:pPr>
             <a:r>
@@ -6520,11 +6520,11 @@
                 <a:solidFill>
                   <a:srgbClr val="111827"/>
                 </a:solidFill>
-                <a:latin typeface="Microsoft YaHei UI"/>
-                <a:ea typeface="Microsoft YaHei UI"/>
-                <a:cs typeface="Microsoft YaHei UI"/>
-              </a:rPr>
-              <a:t>mu Head: 频率轴 Soft-Argmax</a:t>
+                <a:latin typeface="Aptos Display"/>
+                <a:ea typeface="Aptos Display"/>
+                <a:cs typeface="Aptos Display"/>
+              </a:rPr>
+              <a:t>mu Head: Frequency-Axis Soft-Argmax</a:t>
             </a:r>
           </a:p>
         </p:txBody>
@@ -6534,7 +6534,7 @@
           <p:cNvPr id="5" name="">
             <a:extLst xmlns:a="http://schemas.openxmlformats.org/drawingml/2006/main">
               <a:ext uri="{FF2B5EF4-FFF2-40B4-BE49-F238E27FC236}">
-                <a16:creationId xmlns:a16="http://schemas.microsoft.com/office/drawing/2014/main" id="{8E6BEB2D-F6D1-4A51-846D-14269FD5F46B}"/>
+                <a16:creationId xmlns:a16="http://schemas.microsoft.com/office/drawing/2014/main" id="{A3A893F2-ACDF-42EB-83AD-58819F1A83CF}"/>
               </a:ext>
             </a:extLst>
           </p:cNvPr>
@@ -6567,7 +6567,7 @@
           <p:cNvPr id="6" name="">
             <a:extLst xmlns:a="http://schemas.openxmlformats.org/drawingml/2006/main">
               <a:ext uri="{FF2B5EF4-FFF2-40B4-BE49-F238E27FC236}">
-                <a16:creationId xmlns:a16="http://schemas.microsoft.com/office/drawing/2014/main" id="{9EF6FEFD-CE64-4C9A-A4B3-3085D3060541}"/>
+                <a16:creationId xmlns:a16="http://schemas.microsoft.com/office/drawing/2014/main" id="{41BF072D-9B3E-4D42-813A-99B633F3A5C4}"/>
               </a:ext>
             </a:extLst>
           </p:cNvPr>
@@ -6605,9 +6605,9 @@
                 <a:solidFill>
                   <a:srgbClr val="111827"/>
                 </a:solidFill>
-                <a:latin typeface="Microsoft YaHei"/>
-                <a:ea typeface="Microsoft YaHei"/>
-                <a:cs typeface="Microsoft YaHei"/>
+                <a:latin typeface="Aptos"/>
+                <a:ea typeface="Aptos"/>
+                <a:cs typeface="Aptos"/>
               </a:defRPr>
             </a:pPr>
             <a:r>
@@ -6615,9 +6615,9 @@
                 <a:solidFill>
                   <a:srgbClr val="111827"/>
                 </a:solidFill>
-                <a:latin typeface="Microsoft YaHei"/>
-                <a:ea typeface="Microsoft YaHei"/>
-                <a:cs typeface="Microsoft YaHei"/>
+                <a:latin typeface="Aptos"/>
+                <a:ea typeface="Aptos"/>
+                <a:cs typeface="Aptos"/>
               </a:rPr>
               <a:t>bottleneck feature f</a:t>
             </a:r>
@@ -6628,9 +6628,9 @@
                 <a:solidFill>
                   <a:srgbClr val="111827"/>
                 </a:solidFill>
-                <a:latin typeface="Microsoft YaHei"/>
-                <a:ea typeface="Microsoft YaHei"/>
-                <a:cs typeface="Microsoft YaHei"/>
+                <a:latin typeface="Aptos"/>
+                <a:ea typeface="Aptos"/>
+                <a:cs typeface="Aptos"/>
               </a:defRPr>
             </a:pPr>
             <a:r>
@@ -6638,9 +6638,9 @@
                 <a:solidFill>
                   <a:srgbClr val="111827"/>
                 </a:solidFill>
-                <a:latin typeface="Microsoft YaHei"/>
-                <a:ea typeface="Microsoft YaHei"/>
-                <a:cs typeface="Microsoft YaHei"/>
+                <a:latin typeface="Aptos"/>
+                <a:ea typeface="Aptos"/>
+                <a:cs typeface="Aptos"/>
               </a:rPr>
               <a:t>B x 4C x H' x T'</a:t>
             </a:r>
@@ -6652,7 +6652,7 @@
           <p:cNvPr id="7" name="">
             <a:extLst xmlns:a="http://schemas.openxmlformats.org/drawingml/2006/main">
               <a:ext uri="{FF2B5EF4-FFF2-40B4-BE49-F238E27FC236}">
-                <a16:creationId xmlns:a16="http://schemas.microsoft.com/office/drawing/2014/main" id="{150084E2-9FB8-4308-AFB0-F9C8071D71B8}"/>
+                <a16:creationId xmlns:a16="http://schemas.microsoft.com/office/drawing/2014/main" id="{13462A39-A45A-4624-BD74-5BF92430D19B}"/>
               </a:ext>
             </a:extLst>
           </p:cNvPr>
@@ -6690,9 +6690,9 @@
                 <a:solidFill>
                   <a:srgbClr val="111827"/>
                 </a:solidFill>
-                <a:latin typeface="Microsoft YaHei"/>
-                <a:ea typeface="Microsoft YaHei"/>
-                <a:cs typeface="Microsoft YaHei"/>
+                <a:latin typeface="Aptos"/>
+                <a:ea typeface="Aptos"/>
+                <a:cs typeface="Aptos"/>
               </a:defRPr>
             </a:pPr>
             <a:r>
@@ -6700,9 +6700,9 @@
                 <a:solidFill>
                   <a:srgbClr val="111827"/>
                 </a:solidFill>
-                <a:latin typeface="Microsoft YaHei"/>
-                <a:ea typeface="Microsoft YaHei"/>
-                <a:cs typeface="Microsoft YaHei"/>
+                <a:latin typeface="Aptos"/>
+                <a:ea typeface="Aptos"/>
+                <a:cs typeface="Aptos"/>
               </a:rPr>
               <a:t>mu_proj</a:t>
             </a:r>
@@ -6713,9 +6713,9 @@
                 <a:solidFill>
                   <a:srgbClr val="111827"/>
                 </a:solidFill>
-                <a:latin typeface="Microsoft YaHei"/>
-                <a:ea typeface="Microsoft YaHei"/>
-                <a:cs typeface="Microsoft YaHei"/>
+                <a:latin typeface="Aptos"/>
+                <a:ea typeface="Aptos"/>
+                <a:cs typeface="Aptos"/>
               </a:defRPr>
             </a:pPr>
             <a:r>
@@ -6723,9 +6723,9 @@
                 <a:solidFill>
                   <a:srgbClr val="111827"/>
                 </a:solidFill>
-                <a:latin typeface="Microsoft YaHei"/>
-                <a:ea typeface="Microsoft YaHei"/>
-                <a:cs typeface="Microsoft YaHei"/>
+                <a:latin typeface="Aptos"/>
+                <a:ea typeface="Aptos"/>
+                <a:cs typeface="Aptos"/>
               </a:rPr>
               <a:t>Conv1x1: 4C -&gt; L_eff</a:t>
             </a:r>
@@ -6737,7 +6737,7 @@
           <p:cNvPr id="8" name="">
             <a:extLst xmlns:a="http://schemas.openxmlformats.org/drawingml/2006/main">
               <a:ext uri="{FF2B5EF4-FFF2-40B4-BE49-F238E27FC236}">
-                <a16:creationId xmlns:a16="http://schemas.microsoft.com/office/drawing/2014/main" id="{608DDA1C-8A78-4C7C-AD31-E5EAE0C33BED}"/>
+                <a16:creationId xmlns:a16="http://schemas.microsoft.com/office/drawing/2014/main" id="{16C2538A-C532-4F2C-828D-ED77BDBD8AF9}"/>
               </a:ext>
             </a:extLst>
           </p:cNvPr>
@@ -6775,9 +6775,9 @@
                 <a:solidFill>
                   <a:srgbClr val="111827"/>
                 </a:solidFill>
-                <a:latin typeface="Microsoft YaHei"/>
-                <a:ea typeface="Microsoft YaHei"/>
-                <a:cs typeface="Microsoft YaHei"/>
+                <a:latin typeface="Aptos"/>
+                <a:ea typeface="Aptos"/>
+                <a:cs typeface="Aptos"/>
               </a:defRPr>
             </a:pPr>
             <a:r>
@@ -6785,9 +6785,9 @@
                 <a:solidFill>
                   <a:srgbClr val="111827"/>
                 </a:solidFill>
-                <a:latin typeface="Microsoft YaHei"/>
-                <a:ea typeface="Microsoft YaHei"/>
-                <a:cs typeface="Microsoft YaHei"/>
+                <a:latin typeface="Aptos"/>
+                <a:ea typeface="Aptos"/>
+                <a:cs typeface="Aptos"/>
               </a:rPr>
               <a:t>mean over time</a:t>
             </a:r>
@@ -6798,9 +6798,9 @@
                 <a:solidFill>
                   <a:srgbClr val="111827"/>
                 </a:solidFill>
-                <a:latin typeface="Microsoft YaHei"/>
-                <a:ea typeface="Microsoft YaHei"/>
-                <a:cs typeface="Microsoft YaHei"/>
+                <a:latin typeface="Aptos"/>
+                <a:ea typeface="Aptos"/>
+                <a:cs typeface="Aptos"/>
               </a:defRPr>
             </a:pPr>
             <a:r>
@@ -6808,9 +6808,9 @@
                 <a:solidFill>
                   <a:srgbClr val="111827"/>
                 </a:solidFill>
-                <a:latin typeface="Microsoft YaHei"/>
-                <a:ea typeface="Microsoft YaHei"/>
-                <a:cs typeface="Microsoft YaHei"/>
+                <a:latin typeface="Aptos"/>
+                <a:ea typeface="Aptos"/>
+                <a:cs typeface="Aptos"/>
               </a:rPr>
               <a:t>B x L_eff x H'</a:t>
             </a:r>
@@ -6822,7 +6822,7 @@
           <p:cNvPr id="9" name="">
             <a:extLst xmlns:a="http://schemas.openxmlformats.org/drawingml/2006/main">
               <a:ext uri="{FF2B5EF4-FFF2-40B4-BE49-F238E27FC236}">
-                <a16:creationId xmlns:a16="http://schemas.microsoft.com/office/drawing/2014/main" id="{F9F6D11E-3630-4918-BB9B-692890297978}"/>
+                <a16:creationId xmlns:a16="http://schemas.microsoft.com/office/drawing/2014/main" id="{4C6DFB45-9209-47F3-B3B4-511DB367C846}"/>
               </a:ext>
             </a:extLst>
           </p:cNvPr>
@@ -6860,9 +6860,9 @@
                 <a:solidFill>
                   <a:srgbClr val="111827"/>
                 </a:solidFill>
-                <a:latin typeface="Microsoft YaHei"/>
-                <a:ea typeface="Microsoft YaHei"/>
-                <a:cs typeface="Microsoft YaHei"/>
+                <a:latin typeface="Aptos"/>
+                <a:ea typeface="Aptos"/>
+                <a:cs typeface="Aptos"/>
               </a:defRPr>
             </a:pPr>
             <a:r>
@@ -6870,9 +6870,9 @@
                 <a:solidFill>
                   <a:srgbClr val="111827"/>
                 </a:solidFill>
-                <a:latin typeface="Microsoft YaHei"/>
-                <a:ea typeface="Microsoft YaHei"/>
-                <a:cs typeface="Microsoft YaHei"/>
+                <a:latin typeface="Aptos"/>
+                <a:ea typeface="Aptos"/>
+                <a:cs typeface="Aptos"/>
               </a:rPr>
               <a:t>softmax + grid sum</a:t>
             </a:r>
@@ -6883,9 +6883,9 @@
                 <a:solidFill>
                   <a:srgbClr val="111827"/>
                 </a:solidFill>
-                <a:latin typeface="Microsoft YaHei"/>
-                <a:ea typeface="Microsoft YaHei"/>
-                <a:cs typeface="Microsoft YaHei"/>
+                <a:latin typeface="Aptos"/>
+                <a:ea typeface="Aptos"/>
+                <a:cs typeface="Aptos"/>
               </a:defRPr>
             </a:pPr>
             <a:r>
@@ -6893,9 +6893,9 @@
                 <a:solidFill>
                   <a:srgbClr val="111827"/>
                 </a:solidFill>
-                <a:latin typeface="Microsoft YaHei"/>
-                <a:ea typeface="Microsoft YaHei"/>
-                <a:cs typeface="Microsoft YaHei"/>
+                <a:latin typeface="Aptos"/>
+                <a:ea typeface="Aptos"/>
+                <a:cs typeface="Aptos"/>
               </a:rPr>
               <a:t>range: [mu_min, mu_max]</a:t>
             </a:r>
@@ -6907,7 +6907,7 @@
           <p:cNvPr id="10" name="">
             <a:extLst xmlns:a="http://schemas.openxmlformats.org/drawingml/2006/main">
               <a:ext uri="{FF2B5EF4-FFF2-40B4-BE49-F238E27FC236}">
-                <a16:creationId xmlns:a16="http://schemas.microsoft.com/office/drawing/2014/main" id="{8F1DC9B3-E848-41F4-B086-09DCB37203E2}"/>
+                <a16:creationId xmlns:a16="http://schemas.microsoft.com/office/drawing/2014/main" id="{0F3019F1-4D9E-408E-A47E-35B31715EAAE}"/>
               </a:ext>
             </a:extLst>
           </p:cNvPr>
@@ -6940,7 +6940,7 @@
           <p:cNvPr id="11" name="">
             <a:extLst xmlns:a="http://schemas.openxmlformats.org/drawingml/2006/main">
               <a:ext uri="{FF2B5EF4-FFF2-40B4-BE49-F238E27FC236}">
-                <a16:creationId xmlns:a16="http://schemas.microsoft.com/office/drawing/2014/main" id="{1AA2F05F-647F-436C-93CF-EC509D1946C8}"/>
+                <a16:creationId xmlns:a16="http://schemas.microsoft.com/office/drawing/2014/main" id="{45039FA0-5682-428B-AE00-4DCF2E372EAE}"/>
               </a:ext>
             </a:extLst>
           </p:cNvPr>
@@ -6973,7 +6973,7 @@
           <p:cNvPr id="12" name="">
             <a:extLst xmlns:a="http://schemas.openxmlformats.org/drawingml/2006/main">
               <a:ext uri="{FF2B5EF4-FFF2-40B4-BE49-F238E27FC236}">
-                <a16:creationId xmlns:a16="http://schemas.microsoft.com/office/drawing/2014/main" id="{3D296D1D-897A-4998-B23D-CEBD7C1071AD}"/>
+                <a16:creationId xmlns:a16="http://schemas.microsoft.com/office/drawing/2014/main" id="{02ED03A3-88A3-4065-A75A-EF8E9C9BB2D2}"/>
               </a:ext>
             </a:extLst>
           </p:cNvPr>
@@ -7006,7 +7006,7 @@
           <p:cNvPr id="13" name="">
             <a:extLst xmlns:a="http://schemas.openxmlformats.org/drawingml/2006/main">
               <a:ext uri="{FF2B5EF4-FFF2-40B4-BE49-F238E27FC236}">
-                <a16:creationId xmlns:a16="http://schemas.microsoft.com/office/drawing/2014/main" id="{AC8CBE50-983E-4EEA-BA97-C38B6076D78F}"/>
+                <a16:creationId xmlns:a16="http://schemas.microsoft.com/office/drawing/2014/main" id="{E5DB328C-7991-46CD-8C39-EC79D59AE63C}"/>
               </a:ext>
             </a:extLst>
           </p:cNvPr>
@@ -7044,9 +7044,9 @@
                 <a:solidFill>
                   <a:srgbClr val="111827"/>
                 </a:solidFill>
-                <a:latin typeface="Microsoft YaHei"/>
-                <a:ea typeface="Microsoft YaHei"/>
-                <a:cs typeface="Microsoft YaHei"/>
+                <a:latin typeface="Aptos"/>
+                <a:ea typeface="Aptos"/>
+                <a:cs typeface="Aptos"/>
               </a:defRPr>
             </a:pPr>
             <a:r>
@@ -7054,9 +7054,9 @@
                 <a:solidFill>
                   <a:srgbClr val="111827"/>
                 </a:solidFill>
-                <a:latin typeface="Microsoft YaHei"/>
-                <a:ea typeface="Microsoft YaHei"/>
-                <a:cs typeface="Microsoft YaHei"/>
+                <a:latin typeface="Aptos"/>
+                <a:ea typeface="Aptos"/>
+                <a:cs typeface="Aptos"/>
               </a:rPr>
               <a:t>mu_abs</a:t>
             </a:r>
@@ -7067,9 +7067,9 @@
                 <a:solidFill>
                   <a:srgbClr val="111827"/>
                 </a:solidFill>
-                <a:latin typeface="Microsoft YaHei"/>
-                <a:ea typeface="Microsoft YaHei"/>
-                <a:cs typeface="Microsoft YaHei"/>
+                <a:latin typeface="Aptos"/>
+                <a:ea typeface="Aptos"/>
+                <a:cs typeface="Aptos"/>
               </a:defRPr>
             </a:pPr>
             <a:r>
@@ -7077,9 +7077,9 @@
                 <a:solidFill>
                   <a:srgbClr val="111827"/>
                 </a:solidFill>
-                <a:latin typeface="Microsoft YaHei"/>
-                <a:ea typeface="Microsoft YaHei"/>
-                <a:cs typeface="Microsoft YaHei"/>
+                <a:latin typeface="Aptos"/>
+                <a:ea typeface="Aptos"/>
+                <a:cs typeface="Aptos"/>
               </a:rPr>
               <a:t>B x L_eff</a:t>
             </a:r>
@@ -7091,7 +7091,7 @@
           <p:cNvPr id="14" name="">
             <a:extLst xmlns:a="http://schemas.openxmlformats.org/drawingml/2006/main">
               <a:ext uri="{FF2B5EF4-FFF2-40B4-BE49-F238E27FC236}">
-                <a16:creationId xmlns:a16="http://schemas.microsoft.com/office/drawing/2014/main" id="{9988AA82-5568-4FE5-AAA1-8AC4C3AB43BA}"/>
+                <a16:creationId xmlns:a16="http://schemas.microsoft.com/office/drawing/2014/main" id="{F4DDE093-3587-4505-8588-F4B38B91D1E2}"/>
               </a:ext>
             </a:extLst>
           </p:cNvPr>
@@ -7129,9 +7129,9 @@
                 <a:solidFill>
                   <a:srgbClr val="111827"/>
                 </a:solidFill>
-                <a:latin typeface="Microsoft YaHei"/>
-                <a:ea typeface="Microsoft YaHei"/>
-                <a:cs typeface="Microsoft YaHei"/>
+                <a:latin typeface="Aptos"/>
+                <a:ea typeface="Aptos"/>
+                <a:cs typeface="Aptos"/>
               </a:defRPr>
             </a:pPr>
             <a:r>
@@ -7139,9 +7139,9 @@
                 <a:solidFill>
                   <a:srgbClr val="111827"/>
                 </a:solidFill>
-                <a:latin typeface="Microsoft YaHei"/>
-                <a:ea typeface="Microsoft YaHei"/>
-                <a:cs typeface="Microsoft YaHei"/>
+                <a:latin typeface="Aptos"/>
+                <a:ea typeface="Aptos"/>
+                <a:cs typeface="Aptos"/>
               </a:rPr>
               <a:t>gauge_fix_mu(mu_abs)</a:t>
             </a:r>
@@ -7153,7 +7153,7 @@
           <p:cNvPr id="15" name="">
             <a:extLst xmlns:a="http://schemas.openxmlformats.org/drawingml/2006/main">
               <a:ext uri="{FF2B5EF4-FFF2-40B4-BE49-F238E27FC236}">
-                <a16:creationId xmlns:a16="http://schemas.microsoft.com/office/drawing/2014/main" id="{69198357-7573-442F-9724-5087FAC2D72F}"/>
+                <a16:creationId xmlns:a16="http://schemas.microsoft.com/office/drawing/2014/main" id="{A5E99797-FA4F-427F-9EB1-0D47B764D354}"/>
               </a:ext>
             </a:extLst>
           </p:cNvPr>
@@ -7191,9 +7191,9 @@
                 <a:solidFill>
                   <a:srgbClr val="111827"/>
                 </a:solidFill>
-                <a:latin typeface="Microsoft YaHei"/>
-                <a:ea typeface="Microsoft YaHei"/>
-                <a:cs typeface="Microsoft YaHei"/>
+                <a:latin typeface="Aptos"/>
+                <a:ea typeface="Aptos"/>
+                <a:cs typeface="Aptos"/>
               </a:defRPr>
             </a:pPr>
             <a:r>
@@ -7201,9 +7201,9 @@
                 <a:solidFill>
                   <a:srgbClr val="111827"/>
                 </a:solidFill>
-                <a:latin typeface="Microsoft YaHei"/>
-                <a:ea typeface="Microsoft YaHei"/>
-                <a:cs typeface="Microsoft YaHei"/>
+                <a:latin typeface="Aptos"/>
+                <a:ea typeface="Aptos"/>
+                <a:cs typeface="Aptos"/>
               </a:rPr>
               <a:t>mu0, mu_rel</a:t>
             </a:r>
@@ -7214,9 +7214,9 @@
                 <a:solidFill>
                   <a:srgbClr val="111827"/>
                 </a:solidFill>
-                <a:latin typeface="Microsoft YaHei"/>
-                <a:ea typeface="Microsoft YaHei"/>
-                <a:cs typeface="Microsoft YaHei"/>
+                <a:latin typeface="Aptos"/>
+                <a:ea typeface="Aptos"/>
+                <a:cs typeface="Aptos"/>
               </a:defRPr>
             </a:pPr>
             <a:r>
@@ -7224,9 +7224,9 @@
                 <a:solidFill>
                   <a:srgbClr val="111827"/>
                 </a:solidFill>
-                <a:latin typeface="Microsoft YaHei"/>
-                <a:ea typeface="Microsoft YaHei"/>
-                <a:cs typeface="Microsoft YaHei"/>
+                <a:latin typeface="Aptos"/>
+                <a:ea typeface="Aptos"/>
+                <a:cs typeface="Aptos"/>
               </a:rPr>
               <a:t>reference + relative paths</a:t>
             </a:r>
@@ -7238,7 +7238,7 @@
           <p:cNvPr id="16" name="">
             <a:extLst xmlns:a="http://schemas.openxmlformats.org/drawingml/2006/main">
               <a:ext uri="{FF2B5EF4-FFF2-40B4-BE49-F238E27FC236}">
-                <a16:creationId xmlns:a16="http://schemas.microsoft.com/office/drawing/2014/main" id="{EEADCAA4-F3EE-4BC6-BF48-B513A13FD11C}"/>
+                <a16:creationId xmlns:a16="http://schemas.microsoft.com/office/drawing/2014/main" id="{795D167F-C011-48DE-8338-B0FE621B4010}"/>
               </a:ext>
             </a:extLst>
           </p:cNvPr>
@@ -7268,7 +7268,7 @@
           <p:cNvPr id="17" name="">
             <a:extLst xmlns:a="http://schemas.openxmlformats.org/drawingml/2006/main">
               <a:ext uri="{FF2B5EF4-FFF2-40B4-BE49-F238E27FC236}">
-                <a16:creationId xmlns:a16="http://schemas.microsoft.com/office/drawing/2014/main" id="{4A86A2B1-A32B-41F0-B842-9904F06701AB}"/>
+                <a16:creationId xmlns:a16="http://schemas.microsoft.com/office/drawing/2014/main" id="{E2FF4BDB-F1E3-4E92-99F3-C03BEC378F11}"/>
               </a:ext>
             </a:extLst>
           </p:cNvPr>
@@ -7301,7 +7301,7 @@
           <p:cNvPr id="18" name="">
             <a:extLst xmlns:a="http://schemas.openxmlformats.org/drawingml/2006/main">
               <a:ext uri="{FF2B5EF4-FFF2-40B4-BE49-F238E27FC236}">
-                <a16:creationId xmlns:a16="http://schemas.microsoft.com/office/drawing/2014/main" id="{B664B664-F505-4005-9558-FE104377E54B}"/>
+                <a16:creationId xmlns:a16="http://schemas.microsoft.com/office/drawing/2014/main" id="{D04E3259-D767-48A9-A1E2-514238FBE723}"/>
               </a:ext>
             </a:extLst>
           </p:cNvPr>
@@ -7334,7 +7334,7 @@
           <p:cNvPr id="19" name="">
             <a:extLst xmlns:a="http://schemas.openxmlformats.org/drawingml/2006/main">
               <a:ext uri="{FF2B5EF4-FFF2-40B4-BE49-F238E27FC236}">
-                <a16:creationId xmlns:a16="http://schemas.microsoft.com/office/drawing/2014/main" id="{21CB27B4-E8E2-4190-9F90-E3C1FF80025B}"/>
+                <a16:creationId xmlns:a16="http://schemas.microsoft.com/office/drawing/2014/main" id="{6DAA33F7-CD96-4843-BC1D-D63F17B19EBD}"/>
               </a:ext>
             </a:extLst>
           </p:cNvPr>
@@ -7374,9 +7374,9 @@
                 <a:solidFill>
                   <a:srgbClr val="5B6472"/>
                 </a:solidFill>
-                <a:latin typeface="Microsoft YaHei"/>
-                <a:ea typeface="Microsoft YaHei"/>
-                <a:cs typeface="Microsoft YaHei"/>
+                <a:latin typeface="Aptos"/>
+                <a:ea typeface="Aptos"/>
+                <a:cs typeface="Aptos"/>
               </a:defRPr>
             </a:pPr>
             <a:r>
@@ -7384,11 +7384,11 @@
                 <a:solidFill>
                   <a:srgbClr val="5B6472"/>
                 </a:solidFill>
-                <a:latin typeface="Microsoft YaHei"/>
-                <a:ea typeface="Microsoft YaHei"/>
-                <a:cs typeface="Microsoft YaHei"/>
-              </a:rPr>
-              <a:t>核心思想：每条 path 在压缩频率轴 H' 上形成一个概率分布，用期望值把离散位置映射为连续的 mu_abs。</a:t>
+                <a:latin typeface="Aptos"/>
+                <a:ea typeface="Aptos"/>
+                <a:cs typeface="Aptos"/>
+              </a:rPr>
+              <a:t>Core idea: each path forms a probability distribution over the compressed frequency axis H'. The expected value maps the discrete location to continuous mu_abs.</a:t>
             </a:r>
           </a:p>
         </p:txBody>
@@ -7396,7 +7396,7 @@
     </p:spTree>
     <p:extLst>
       <p:ext uri="{BB962C8B-B14F-4D97-AF65-F5344CB8AC3E}">
-        <p14:creationId xmlns:p14="http://schemas.microsoft.com/office/powerpoint/2010/main" val="577784919"/>
+        <p14:creationId xmlns:p14="http://schemas.microsoft.com/office/powerpoint/2010/main" val="1344600259"/>
       </p:ext>
     </p:extLst>
   </p:cSld>
@@ -7427,7 +7427,7 @@
           <p:cNvPr id="1" name="">
             <a:extLst xmlns:a="http://schemas.openxmlformats.org/drawingml/2006/main">
               <a:ext uri="{FF2B5EF4-FFF2-40B4-BE49-F238E27FC236}">
-                <a16:creationId xmlns:a16="http://schemas.microsoft.com/office/drawing/2014/main" id="{953DFED1-CD64-4FF1-8CA1-C06A3211A504}"/>
+                <a16:creationId xmlns:a16="http://schemas.microsoft.com/office/drawing/2014/main" id="{66E7BD7C-2126-41D4-AF00-72892AE31600}"/>
               </a:ext>
             </a:extLst>
           </p:cNvPr>
@@ -7460,7 +7460,7 @@
           <p:cNvPr id="2" name="">
             <a:extLst xmlns:a="http://schemas.openxmlformats.org/drawingml/2006/main">
               <a:ext uri="{FF2B5EF4-FFF2-40B4-BE49-F238E27FC236}">
-                <a16:creationId xmlns:a16="http://schemas.microsoft.com/office/drawing/2014/main" id="{BEDB0C11-0E14-433F-A4AE-A02754417A73}"/>
+                <a16:creationId xmlns:a16="http://schemas.microsoft.com/office/drawing/2014/main" id="{B2E33360-B6F3-49C3-825D-389D29AF1A83}"/>
               </a:ext>
             </a:extLst>
           </p:cNvPr>
@@ -7500,9 +7500,9 @@
                 <a:solidFill>
                   <a:srgbClr val="5B6472"/>
                 </a:solidFill>
-                <a:latin typeface="Microsoft YaHei"/>
-                <a:ea typeface="Microsoft YaHei"/>
-                <a:cs typeface="Microsoft YaHei"/>
+                <a:latin typeface="Aptos"/>
+                <a:ea typeface="Aptos"/>
+                <a:cs typeface="Aptos"/>
               </a:defRPr>
             </a:pPr>
             <a:r>
@@ -7510,9 +7510,9 @@
                 <a:solidFill>
                   <a:srgbClr val="5B6472"/>
                 </a:solidFill>
-                <a:latin typeface="Microsoft YaHei"/>
-                <a:ea typeface="Microsoft YaHei"/>
-                <a:cs typeface="Microsoft YaHei"/>
+                <a:latin typeface="Aptos"/>
+                <a:ea typeface="Aptos"/>
+                <a:cs typeface="Aptos"/>
               </a:rPr>
               <a:t>NAFEncoderLSNet | 05</a:t>
             </a:r>
@@ -7524,7 +7524,7 @@
           <p:cNvPr id="3" name="">
             <a:extLst xmlns:a="http://schemas.openxmlformats.org/drawingml/2006/main">
               <a:ext uri="{FF2B5EF4-FFF2-40B4-BE49-F238E27FC236}">
-                <a16:creationId xmlns:a16="http://schemas.microsoft.com/office/drawing/2014/main" id="{09D697C0-7311-4709-86DA-BE3CC3B2ABF0}"/>
+                <a16:creationId xmlns:a16="http://schemas.microsoft.com/office/drawing/2014/main" id="{BFD6A18B-37C3-4661-80F2-B987BA997183}"/>
               </a:ext>
             </a:extLst>
           </p:cNvPr>
@@ -7564,9 +7564,9 @@
                 <a:solidFill>
                   <a:srgbClr val="5B6472"/>
                 </a:solidFill>
-                <a:latin typeface="Microsoft YaHei"/>
-                <a:ea typeface="Microsoft YaHei"/>
-                <a:cs typeface="Microsoft YaHei"/>
+                <a:latin typeface="Aptos"/>
+                <a:ea typeface="Aptos"/>
+                <a:cs typeface="Aptos"/>
               </a:defRPr>
             </a:pPr>
             <a:r>
@@ -7574,9 +7574,9 @@
                 <a:solidFill>
                   <a:srgbClr val="5B6472"/>
                 </a:solidFill>
-                <a:latin typeface="Microsoft YaHei"/>
-                <a:ea typeface="Microsoft YaHei"/>
-                <a:cs typeface="Microsoft YaHei"/>
+                <a:latin typeface="Aptos"/>
+                <a:ea typeface="Aptos"/>
+                <a:cs typeface="Aptos"/>
               </a:rPr>
               <a:t>Global pooled bottleneck</a:t>
             </a:r>
@@ -7588,7 +7588,7 @@
           <p:cNvPr id="4" name="">
             <a:extLst xmlns:a="http://schemas.openxmlformats.org/drawingml/2006/main">
               <a:ext uri="{FF2B5EF4-FFF2-40B4-BE49-F238E27FC236}">
-                <a16:creationId xmlns:a16="http://schemas.microsoft.com/office/drawing/2014/main" id="{A8A9B062-E0AB-41D2-9897-99686DE6A513}"/>
+                <a16:creationId xmlns:a16="http://schemas.microsoft.com/office/drawing/2014/main" id="{7C3A2B2B-9859-4724-AFC0-E643950EB612}"/>
               </a:ext>
             </a:extLst>
           </p:cNvPr>
@@ -7628,9 +7628,9 @@
                 <a:solidFill>
                   <a:srgbClr val="111827"/>
                 </a:solidFill>
-                <a:latin typeface="Microsoft YaHei UI"/>
-                <a:ea typeface="Microsoft YaHei UI"/>
-                <a:cs typeface="Microsoft YaHei UI"/>
+                <a:latin typeface="Aptos Display"/>
+                <a:ea typeface="Aptos Display"/>
+                <a:cs typeface="Aptos Display"/>
               </a:defRPr>
             </a:pPr>
             <a:r>
@@ -7638,9 +7638,9 @@
                 <a:solidFill>
                   <a:srgbClr val="111827"/>
                 </a:solidFill>
-                <a:latin typeface="Microsoft YaHei UI"/>
-                <a:ea typeface="Microsoft YaHei UI"/>
-                <a:cs typeface="Microsoft YaHei UI"/>
+                <a:latin typeface="Aptos Display"/>
+                <a:ea typeface="Aptos Display"/>
+                <a:cs typeface="Aptos Display"/>
               </a:rPr>
               <a:t>rho / delta / alpha Heads</a:t>
             </a:r>
@@ -7652,7 +7652,7 @@
           <p:cNvPr id="5" name="">
             <a:extLst xmlns:a="http://schemas.openxmlformats.org/drawingml/2006/main">
               <a:ext uri="{FF2B5EF4-FFF2-40B4-BE49-F238E27FC236}">
-                <a16:creationId xmlns:a16="http://schemas.microsoft.com/office/drawing/2014/main" id="{50B479F1-0BAB-4B58-A37E-FE862EDC3FC8}"/>
+                <a16:creationId xmlns:a16="http://schemas.microsoft.com/office/drawing/2014/main" id="{FD8741FA-2D81-4433-A5AA-7C530DE3FD40}"/>
               </a:ext>
             </a:extLst>
           </p:cNvPr>
@@ -7685,7 +7685,7 @@
           <p:cNvPr id="6" name="">
             <a:extLst xmlns:a="http://schemas.openxmlformats.org/drawingml/2006/main">
               <a:ext uri="{FF2B5EF4-FFF2-40B4-BE49-F238E27FC236}">
-                <a16:creationId xmlns:a16="http://schemas.microsoft.com/office/drawing/2014/main" id="{AE8926B5-D6BC-48AF-9DAE-31E5C3B5FB71}"/>
+                <a16:creationId xmlns:a16="http://schemas.microsoft.com/office/drawing/2014/main" id="{34A56B76-21EC-4BBE-B37C-53B032BC8749}"/>
               </a:ext>
             </a:extLst>
           </p:cNvPr>
@@ -7723,9 +7723,9 @@
                 <a:solidFill>
                   <a:srgbClr val="111827"/>
                 </a:solidFill>
-                <a:latin typeface="Microsoft YaHei"/>
-                <a:ea typeface="Microsoft YaHei"/>
-                <a:cs typeface="Microsoft YaHei"/>
+                <a:latin typeface="Aptos"/>
+                <a:ea typeface="Aptos"/>
+                <a:cs typeface="Aptos"/>
               </a:defRPr>
             </a:pPr>
             <a:r>
@@ -7733,9 +7733,9 @@
                 <a:solidFill>
                   <a:srgbClr val="111827"/>
                 </a:solidFill>
-                <a:latin typeface="Microsoft YaHei"/>
-                <a:ea typeface="Microsoft YaHei"/>
-                <a:cs typeface="Microsoft YaHei"/>
+                <a:latin typeface="Aptos"/>
+                <a:ea typeface="Aptos"/>
+                <a:cs typeface="Aptos"/>
               </a:rPr>
               <a:t>f.mean(dim=(2,3))</a:t>
             </a:r>
@@ -7746,9 +7746,9 @@
                 <a:solidFill>
                   <a:srgbClr val="111827"/>
                 </a:solidFill>
-                <a:latin typeface="Microsoft YaHei"/>
-                <a:ea typeface="Microsoft YaHei"/>
-                <a:cs typeface="Microsoft YaHei"/>
+                <a:latin typeface="Aptos"/>
+                <a:ea typeface="Aptos"/>
+                <a:cs typeface="Aptos"/>
               </a:defRPr>
             </a:pPr>
             <a:r>
@@ -7756,9 +7756,9 @@
                 <a:solidFill>
                   <a:srgbClr val="111827"/>
                 </a:solidFill>
-                <a:latin typeface="Microsoft YaHei"/>
-                <a:ea typeface="Microsoft YaHei"/>
-                <a:cs typeface="Microsoft YaHei"/>
+                <a:latin typeface="Aptos"/>
+                <a:ea typeface="Aptos"/>
+                <a:cs typeface="Aptos"/>
               </a:rPr>
               <a:t>pooled: B x 4C</a:t>
             </a:r>
@@ -7770,7 +7770,7 @@
           <p:cNvPr id="7" name="">
             <a:extLst xmlns:a="http://schemas.openxmlformats.org/drawingml/2006/main">
               <a:ext uri="{FF2B5EF4-FFF2-40B4-BE49-F238E27FC236}">
-                <a16:creationId xmlns:a16="http://schemas.microsoft.com/office/drawing/2014/main" id="{A52EBC41-89FB-4914-9A01-C46ED9DC35AF}"/>
+                <a16:creationId xmlns:a16="http://schemas.microsoft.com/office/drawing/2014/main" id="{DC2D8093-4511-4037-988B-7416701FC5B6}"/>
               </a:ext>
             </a:extLst>
           </p:cNvPr>
@@ -7808,9 +7808,9 @@
                 <a:solidFill>
                   <a:srgbClr val="111827"/>
                 </a:solidFill>
-                <a:latin typeface="Microsoft YaHei"/>
-                <a:ea typeface="Microsoft YaHei"/>
-                <a:cs typeface="Microsoft YaHei"/>
+                <a:latin typeface="Aptos"/>
+                <a:ea typeface="Aptos"/>
+                <a:cs typeface="Aptos"/>
               </a:defRPr>
             </a:pPr>
             <a:r>
@@ -7818,9 +7818,9 @@
                 <a:solidFill>
                   <a:srgbClr val="111827"/>
                 </a:solidFill>
-                <a:latin typeface="Microsoft YaHei"/>
-                <a:ea typeface="Microsoft YaHei"/>
-                <a:cs typeface="Microsoft YaHei"/>
+                <a:latin typeface="Aptos"/>
+                <a:ea typeface="Aptos"/>
+                <a:cs typeface="Aptos"/>
               </a:rPr>
               <a:t>rho_head</a:t>
             </a:r>
@@ -7831,9 +7831,9 @@
                 <a:solidFill>
                   <a:srgbClr val="111827"/>
                 </a:solidFill>
-                <a:latin typeface="Microsoft YaHei"/>
-                <a:ea typeface="Microsoft YaHei"/>
-                <a:cs typeface="Microsoft YaHei"/>
+                <a:latin typeface="Aptos"/>
+                <a:ea typeface="Aptos"/>
+                <a:cs typeface="Aptos"/>
               </a:defRPr>
             </a:pPr>
             <a:r>
@@ -7841,9 +7841,9 @@
                 <a:solidFill>
                   <a:srgbClr val="111827"/>
                 </a:solidFill>
-                <a:latin typeface="Microsoft YaHei"/>
-                <a:ea typeface="Microsoft YaHei"/>
-                <a:cs typeface="Microsoft YaHei"/>
+                <a:latin typeface="Aptos"/>
+                <a:ea typeface="Aptos"/>
+                <a:cs typeface="Aptos"/>
               </a:rPr>
               <a:t>Linear 4C -&gt; hidden -&gt; L_eff</a:t>
             </a:r>
@@ -7855,7 +7855,7 @@
           <p:cNvPr id="8" name="">
             <a:extLst xmlns:a="http://schemas.openxmlformats.org/drawingml/2006/main">
               <a:ext uri="{FF2B5EF4-FFF2-40B4-BE49-F238E27FC236}">
-                <a16:creationId xmlns:a16="http://schemas.microsoft.com/office/drawing/2014/main" id="{72FDF3C5-301F-4DE7-928E-9A4090B0515D}"/>
+                <a16:creationId xmlns:a16="http://schemas.microsoft.com/office/drawing/2014/main" id="{43ED5B0E-CF90-4D8C-B236-D47B4C6B1CF5}"/>
               </a:ext>
             </a:extLst>
           </p:cNvPr>
@@ -7893,9 +7893,9 @@
                 <a:solidFill>
                   <a:srgbClr val="111827"/>
                 </a:solidFill>
-                <a:latin typeface="Microsoft YaHei"/>
-                <a:ea typeface="Microsoft YaHei"/>
-                <a:cs typeface="Microsoft YaHei"/>
+                <a:latin typeface="Aptos"/>
+                <a:ea typeface="Aptos"/>
+                <a:cs typeface="Aptos"/>
               </a:defRPr>
             </a:pPr>
             <a:r>
@@ -7903,9 +7903,9 @@
                 <a:solidFill>
                   <a:srgbClr val="111827"/>
                 </a:solidFill>
-                <a:latin typeface="Microsoft YaHei"/>
-                <a:ea typeface="Microsoft YaHei"/>
-                <a:cs typeface="Microsoft YaHei"/>
+                <a:latin typeface="Aptos"/>
+                <a:ea typeface="Aptos"/>
+                <a:cs typeface="Aptos"/>
               </a:rPr>
               <a:t>sigmoid scale</a:t>
             </a:r>
@@ -7916,9 +7916,9 @@
                 <a:solidFill>
                   <a:srgbClr val="111827"/>
                 </a:solidFill>
-                <a:latin typeface="Microsoft YaHei"/>
-                <a:ea typeface="Microsoft YaHei"/>
-                <a:cs typeface="Microsoft YaHei"/>
+                <a:latin typeface="Aptos"/>
+                <a:ea typeface="Aptos"/>
+                <a:cs typeface="Aptos"/>
               </a:defRPr>
             </a:pPr>
             <a:r>
@@ -7926,9 +7926,9 @@
                 <a:solidFill>
                   <a:srgbClr val="111827"/>
                 </a:solidFill>
-                <a:latin typeface="Microsoft YaHei"/>
-                <a:ea typeface="Microsoft YaHei"/>
-                <a:cs typeface="Microsoft YaHei"/>
+                <a:latin typeface="Aptos"/>
+                <a:ea typeface="Aptos"/>
+                <a:cs typeface="Aptos"/>
               </a:rPr>
               <a:t>rho_min + extent * sigmoid</a:t>
             </a:r>
@@ -7940,7 +7940,7 @@
           <p:cNvPr id="9" name="">
             <a:extLst xmlns:a="http://schemas.openxmlformats.org/drawingml/2006/main">
               <a:ext uri="{FF2B5EF4-FFF2-40B4-BE49-F238E27FC236}">
-                <a16:creationId xmlns:a16="http://schemas.microsoft.com/office/drawing/2014/main" id="{E1B96AE1-9B31-4D2E-B64C-C4B98160535C}"/>
+                <a16:creationId xmlns:a16="http://schemas.microsoft.com/office/drawing/2014/main" id="{E192BF77-E197-49D9-9BC5-60F7DA0BFEB2}"/>
               </a:ext>
             </a:extLst>
           </p:cNvPr>
@@ -7978,9 +7978,9 @@
                 <a:solidFill>
                   <a:srgbClr val="111827"/>
                 </a:solidFill>
-                <a:latin typeface="Microsoft YaHei"/>
-                <a:ea typeface="Microsoft YaHei"/>
-                <a:cs typeface="Microsoft YaHei"/>
+                <a:latin typeface="Aptos"/>
+                <a:ea typeface="Aptos"/>
+                <a:cs typeface="Aptos"/>
               </a:defRPr>
             </a:pPr>
             <a:r>
@@ -7988,9 +7988,9 @@
                 <a:solidFill>
                   <a:srgbClr val="111827"/>
                 </a:solidFill>
-                <a:latin typeface="Microsoft YaHei"/>
-                <a:ea typeface="Microsoft YaHei"/>
-                <a:cs typeface="Microsoft YaHei"/>
+                <a:latin typeface="Aptos"/>
+                <a:ea typeface="Aptos"/>
+                <a:cs typeface="Aptos"/>
               </a:rPr>
               <a:t>gauge_fix_rho</a:t>
             </a:r>
@@ -8001,9 +8001,9 @@
                 <a:solidFill>
                   <a:srgbClr val="111827"/>
                 </a:solidFill>
-                <a:latin typeface="Microsoft YaHei"/>
-                <a:ea typeface="Microsoft YaHei"/>
-                <a:cs typeface="Microsoft YaHei"/>
+                <a:latin typeface="Aptos"/>
+                <a:ea typeface="Aptos"/>
+                <a:cs typeface="Aptos"/>
               </a:defRPr>
             </a:pPr>
             <a:r>
@@ -8011,9 +8011,9 @@
                 <a:solidFill>
                   <a:srgbClr val="111827"/>
                 </a:solidFill>
-                <a:latin typeface="Microsoft YaHei"/>
-                <a:ea typeface="Microsoft YaHei"/>
-                <a:cs typeface="Microsoft YaHei"/>
+                <a:latin typeface="Aptos"/>
+                <a:ea typeface="Aptos"/>
+                <a:cs typeface="Aptos"/>
               </a:rPr>
               <a:t>rho0, rho_rel</a:t>
             </a:r>
@@ -8025,7 +8025,7 @@
           <p:cNvPr id="10" name="">
             <a:extLst xmlns:a="http://schemas.openxmlformats.org/drawingml/2006/main">
               <a:ext uri="{FF2B5EF4-FFF2-40B4-BE49-F238E27FC236}">
-                <a16:creationId xmlns:a16="http://schemas.microsoft.com/office/drawing/2014/main" id="{6CEBCBFA-C9B8-4EDA-BDDB-17090F950838}"/>
+                <a16:creationId xmlns:a16="http://schemas.microsoft.com/office/drawing/2014/main" id="{E2EDEF1E-1A83-4EDD-853A-97ED857BC1E9}"/>
               </a:ext>
             </a:extLst>
           </p:cNvPr>
@@ -8055,7 +8055,7 @@
           <p:cNvPr id="11" name="">
             <a:extLst xmlns:a="http://schemas.openxmlformats.org/drawingml/2006/main">
               <a:ext uri="{FF2B5EF4-FFF2-40B4-BE49-F238E27FC236}">
-                <a16:creationId xmlns:a16="http://schemas.microsoft.com/office/drawing/2014/main" id="{9C5BB097-DB4A-4406-BF5A-CA984A64E7A2}"/>
+                <a16:creationId xmlns:a16="http://schemas.microsoft.com/office/drawing/2014/main" id="{B2C6419B-6672-4D13-A389-11794D342609}"/>
               </a:ext>
             </a:extLst>
           </p:cNvPr>
@@ -8088,7 +8088,7 @@
           <p:cNvPr id="12" name="">
             <a:extLst xmlns:a="http://schemas.openxmlformats.org/drawingml/2006/main">
               <a:ext uri="{FF2B5EF4-FFF2-40B4-BE49-F238E27FC236}">
-                <a16:creationId xmlns:a16="http://schemas.microsoft.com/office/drawing/2014/main" id="{1C9B2FEC-5B9F-4ED0-ABBC-6F6E153957DF}"/>
+                <a16:creationId xmlns:a16="http://schemas.microsoft.com/office/drawing/2014/main" id="{76144C5E-2CBF-48EA-863A-B7FF77578A6B}"/>
               </a:ext>
             </a:extLst>
           </p:cNvPr>
@@ -8121,7 +8121,7 @@
           <p:cNvPr id="13" name="">
             <a:extLst xmlns:a="http://schemas.openxmlformats.org/drawingml/2006/main">
               <a:ext uri="{FF2B5EF4-FFF2-40B4-BE49-F238E27FC236}">
-                <a16:creationId xmlns:a16="http://schemas.microsoft.com/office/drawing/2014/main" id="{7FFD4C34-55D9-430A-B6DA-DEAAC3A9F1C6}"/>
+                <a16:creationId xmlns:a16="http://schemas.microsoft.com/office/drawing/2014/main" id="{F13EF747-C9E5-4BEB-86BA-0CCB3E6EEB99}"/>
               </a:ext>
             </a:extLst>
           </p:cNvPr>
@@ -8159,9 +8159,9 @@
                 <a:solidFill>
                   <a:srgbClr val="111827"/>
                 </a:solidFill>
-                <a:latin typeface="Microsoft YaHei"/>
-                <a:ea typeface="Microsoft YaHei"/>
-                <a:cs typeface="Microsoft YaHei"/>
+                <a:latin typeface="Aptos"/>
+                <a:ea typeface="Aptos"/>
+                <a:cs typeface="Aptos"/>
               </a:defRPr>
             </a:pPr>
             <a:r>
@@ -8169,9 +8169,9 @@
                 <a:solidFill>
                   <a:srgbClr val="111827"/>
                 </a:solidFill>
-                <a:latin typeface="Microsoft YaHei"/>
-                <a:ea typeface="Microsoft YaHei"/>
-                <a:cs typeface="Microsoft YaHei"/>
+                <a:latin typeface="Aptos"/>
+                <a:ea typeface="Aptos"/>
+                <a:cs typeface="Aptos"/>
               </a:rPr>
               <a:t>delta_head</a:t>
             </a:r>
@@ -8182,9 +8182,9 @@
                 <a:solidFill>
                   <a:srgbClr val="111827"/>
                 </a:solidFill>
-                <a:latin typeface="Microsoft YaHei"/>
-                <a:ea typeface="Microsoft YaHei"/>
-                <a:cs typeface="Microsoft YaHei"/>
+                <a:latin typeface="Aptos"/>
+                <a:ea typeface="Aptos"/>
+                <a:cs typeface="Aptos"/>
               </a:defRPr>
             </a:pPr>
             <a:r>
@@ -8192,9 +8192,9 @@
                 <a:solidFill>
                   <a:srgbClr val="111827"/>
                 </a:solidFill>
-                <a:latin typeface="Microsoft YaHei"/>
-                <a:ea typeface="Microsoft YaHei"/>
-                <a:cs typeface="Microsoft YaHei"/>
+                <a:latin typeface="Aptos"/>
+                <a:ea typeface="Aptos"/>
+                <a:cs typeface="Aptos"/>
               </a:rPr>
               <a:t>Linear 4C -&gt; hidden -&gt; N_rx-1</a:t>
             </a:r>
@@ -8206,7 +8206,7 @@
           <p:cNvPr id="14" name="">
             <a:extLst xmlns:a="http://schemas.openxmlformats.org/drawingml/2006/main">
               <a:ext uri="{FF2B5EF4-FFF2-40B4-BE49-F238E27FC236}">
-                <a16:creationId xmlns:a16="http://schemas.microsoft.com/office/drawing/2014/main" id="{BDDAA0A2-21FB-4369-9F36-E182A883D35F}"/>
+                <a16:creationId xmlns:a16="http://schemas.microsoft.com/office/drawing/2014/main" id="{C257CFBD-98D1-4CA6-A961-EC7C633C394B}"/>
               </a:ext>
             </a:extLst>
           </p:cNvPr>
@@ -8244,9 +8244,9 @@
                 <a:solidFill>
                   <a:srgbClr val="111827"/>
                 </a:solidFill>
-                <a:latin typeface="Microsoft YaHei"/>
-                <a:ea typeface="Microsoft YaHei"/>
-                <a:cs typeface="Microsoft YaHei"/>
+                <a:latin typeface="Aptos"/>
+                <a:ea typeface="Aptos"/>
+                <a:cs typeface="Aptos"/>
               </a:defRPr>
             </a:pPr>
             <a:r>
@@ -8254,9 +8254,9 @@
                 <a:solidFill>
                   <a:srgbClr val="111827"/>
                 </a:solidFill>
-                <a:latin typeface="Microsoft YaHei"/>
-                <a:ea typeface="Microsoft YaHei"/>
-                <a:cs typeface="Microsoft YaHei"/>
+                <a:latin typeface="Aptos"/>
+                <a:ea typeface="Aptos"/>
+                <a:cs typeface="Aptos"/>
               </a:rPr>
               <a:t>tanh scale</a:t>
             </a:r>
@@ -8267,9 +8267,9 @@
                 <a:solidFill>
                   <a:srgbClr val="111827"/>
                 </a:solidFill>
-                <a:latin typeface="Microsoft YaHei"/>
-                <a:ea typeface="Microsoft YaHei"/>
-                <a:cs typeface="Microsoft YaHei"/>
+                <a:latin typeface="Aptos"/>
+                <a:ea typeface="Aptos"/>
+                <a:cs typeface="Aptos"/>
               </a:defRPr>
             </a:pPr>
             <a:r>
@@ -8277,9 +8277,9 @@
                 <a:solidFill>
                   <a:srgbClr val="111827"/>
                 </a:solidFill>
-                <a:latin typeface="Microsoft YaHei"/>
-                <a:ea typeface="Microsoft YaHei"/>
-                <a:cs typeface="Microsoft YaHei"/>
+                <a:latin typeface="Aptos"/>
+                <a:ea typeface="Aptos"/>
+                <a:cs typeface="Aptos"/>
               </a:rPr>
               <a:t>[-delta_bound, delta_bound]</a:t>
             </a:r>
@@ -8291,7 +8291,7 @@
           <p:cNvPr id="15" name="">
             <a:extLst xmlns:a="http://schemas.openxmlformats.org/drawingml/2006/main">
               <a:ext uri="{FF2B5EF4-FFF2-40B4-BE49-F238E27FC236}">
-                <a16:creationId xmlns:a16="http://schemas.microsoft.com/office/drawing/2014/main" id="{ED681FC3-DC17-4C23-88AE-D6D23A0BAB57}"/>
+                <a16:creationId xmlns:a16="http://schemas.microsoft.com/office/drawing/2014/main" id="{07E0EB50-DC6E-49BA-B021-46883A576729}"/>
               </a:ext>
             </a:extLst>
           </p:cNvPr>
@@ -8329,9 +8329,9 @@
                 <a:solidFill>
                   <a:srgbClr val="111827"/>
                 </a:solidFill>
-                <a:latin typeface="Microsoft YaHei"/>
-                <a:ea typeface="Microsoft YaHei"/>
-                <a:cs typeface="Microsoft YaHei"/>
+                <a:latin typeface="Aptos"/>
+                <a:ea typeface="Aptos"/>
+                <a:cs typeface="Aptos"/>
               </a:defRPr>
             </a:pPr>
             <a:r>
@@ -8339,9 +8339,9 @@
                 <a:solidFill>
                   <a:srgbClr val="111827"/>
                 </a:solidFill>
-                <a:latin typeface="Microsoft YaHei"/>
-                <a:ea typeface="Microsoft YaHei"/>
-                <a:cs typeface="Microsoft YaHei"/>
+                <a:latin typeface="Aptos"/>
+                <a:ea typeface="Aptos"/>
+                <a:cs typeface="Aptos"/>
               </a:rPr>
               <a:t>prepend zero + gauge_fix_delta</a:t>
             </a:r>
@@ -8352,9 +8352,9 @@
                 <a:solidFill>
                   <a:srgbClr val="111827"/>
                 </a:solidFill>
-                <a:latin typeface="Microsoft YaHei"/>
-                <a:ea typeface="Microsoft YaHei"/>
-                <a:cs typeface="Microsoft YaHei"/>
+                <a:latin typeface="Aptos"/>
+                <a:ea typeface="Aptos"/>
+                <a:cs typeface="Aptos"/>
               </a:defRPr>
             </a:pPr>
             <a:r>
@@ -8362,9 +8362,9 @@
                 <a:solidFill>
                   <a:srgbClr val="111827"/>
                 </a:solidFill>
-                <a:latin typeface="Microsoft YaHei"/>
-                <a:ea typeface="Microsoft YaHei"/>
-                <a:cs typeface="Microsoft YaHei"/>
+                <a:latin typeface="Aptos"/>
+                <a:ea typeface="Aptos"/>
+                <a:cs typeface="Aptos"/>
               </a:rPr>
               <a:t>delta_rx</a:t>
             </a:r>
@@ -8376,7 +8376,7 @@
           <p:cNvPr id="16" name="">
             <a:extLst xmlns:a="http://schemas.openxmlformats.org/drawingml/2006/main">
               <a:ext uri="{FF2B5EF4-FFF2-40B4-BE49-F238E27FC236}">
-                <a16:creationId xmlns:a16="http://schemas.microsoft.com/office/drawing/2014/main" id="{149044B2-3902-4140-A787-8F977ED9F50D}"/>
+                <a16:creationId xmlns:a16="http://schemas.microsoft.com/office/drawing/2014/main" id="{7AA6D1DD-ADC8-49A1-A793-18876AE18B4A}"/>
               </a:ext>
             </a:extLst>
           </p:cNvPr>
@@ -8406,7 +8406,7 @@
           <p:cNvPr id="17" name="">
             <a:extLst xmlns:a="http://schemas.openxmlformats.org/drawingml/2006/main">
               <a:ext uri="{FF2B5EF4-FFF2-40B4-BE49-F238E27FC236}">
-                <a16:creationId xmlns:a16="http://schemas.microsoft.com/office/drawing/2014/main" id="{00148855-DDF2-43DE-98B4-3CFD65AFBF97}"/>
+                <a16:creationId xmlns:a16="http://schemas.microsoft.com/office/drawing/2014/main" id="{04055E53-936D-40B8-B135-79EA794FA07B}"/>
               </a:ext>
             </a:extLst>
           </p:cNvPr>
@@ -8439,7 +8439,7 @@
           <p:cNvPr id="18" name="">
             <a:extLst xmlns:a="http://schemas.openxmlformats.org/drawingml/2006/main">
               <a:ext uri="{FF2B5EF4-FFF2-40B4-BE49-F238E27FC236}">
-                <a16:creationId xmlns:a16="http://schemas.microsoft.com/office/drawing/2014/main" id="{A589FD12-5ECE-4341-B350-EB5617D97202}"/>
+                <a16:creationId xmlns:a16="http://schemas.microsoft.com/office/drawing/2014/main" id="{45594784-52D5-488E-8543-907CCD9D0998}"/>
               </a:ext>
             </a:extLst>
           </p:cNvPr>
@@ -8472,7 +8472,7 @@
           <p:cNvPr id="19" name="">
             <a:extLst xmlns:a="http://schemas.openxmlformats.org/drawingml/2006/main">
               <a:ext uri="{FF2B5EF4-FFF2-40B4-BE49-F238E27FC236}">
-                <a16:creationId xmlns:a16="http://schemas.microsoft.com/office/drawing/2014/main" id="{A5337626-A302-4AE2-BC89-A4FA4D0D46CB}"/>
+                <a16:creationId xmlns:a16="http://schemas.microsoft.com/office/drawing/2014/main" id="{37C3FB1F-BB33-48A4-BA64-CEE2159E6BF5}"/>
               </a:ext>
             </a:extLst>
           </p:cNvPr>
@@ -8510,9 +8510,9 @@
                 <a:solidFill>
                   <a:srgbClr val="111827"/>
                 </a:solidFill>
-                <a:latin typeface="Microsoft YaHei"/>
-                <a:ea typeface="Microsoft YaHei"/>
-                <a:cs typeface="Microsoft YaHei"/>
+                <a:latin typeface="Aptos"/>
+                <a:ea typeface="Aptos"/>
+                <a:cs typeface="Aptos"/>
               </a:defRPr>
             </a:pPr>
             <a:r>
@@ -8520,9 +8520,9 @@
                 <a:solidFill>
                   <a:srgbClr val="111827"/>
                 </a:solidFill>
-                <a:latin typeface="Microsoft YaHei"/>
-                <a:ea typeface="Microsoft YaHei"/>
-                <a:cs typeface="Microsoft YaHei"/>
+                <a:latin typeface="Aptos"/>
+                <a:ea typeface="Aptos"/>
+                <a:cs typeface="Aptos"/>
               </a:rPr>
               <a:t>alpha_head</a:t>
             </a:r>
@@ -8533,9 +8533,9 @@
                 <a:solidFill>
                   <a:srgbClr val="111827"/>
                 </a:solidFill>
-                <a:latin typeface="Microsoft YaHei"/>
-                <a:ea typeface="Microsoft YaHei"/>
-                <a:cs typeface="Microsoft YaHei"/>
+                <a:latin typeface="Aptos"/>
+                <a:ea typeface="Aptos"/>
+                <a:cs typeface="Aptos"/>
               </a:defRPr>
             </a:pPr>
             <a:r>
@@ -8543,9 +8543,9 @@
                 <a:solidFill>
                   <a:srgbClr val="111827"/>
                 </a:solidFill>
-                <a:latin typeface="Microsoft YaHei"/>
-                <a:ea typeface="Microsoft YaHei"/>
-                <a:cs typeface="Microsoft YaHei"/>
+                <a:latin typeface="Aptos"/>
+                <a:ea typeface="Aptos"/>
+                <a:cs typeface="Aptos"/>
               </a:rPr>
               <a:t>Linear 4C -&gt; hidden -&gt; L_eff</a:t>
             </a:r>
@@ -8557,7 +8557,7 @@
           <p:cNvPr id="20" name="">
             <a:extLst xmlns:a="http://schemas.openxmlformats.org/drawingml/2006/main">
               <a:ext uri="{FF2B5EF4-FFF2-40B4-BE49-F238E27FC236}">
-                <a16:creationId xmlns:a16="http://schemas.microsoft.com/office/drawing/2014/main" id="{5F3A263D-F0AB-49B8-AA2A-9EF0DF74BAE0}"/>
+                <a16:creationId xmlns:a16="http://schemas.microsoft.com/office/drawing/2014/main" id="{F59FAA1E-988A-4942-8814-2CA1295E5433}"/>
               </a:ext>
             </a:extLst>
           </p:cNvPr>
@@ -8595,9 +8595,9 @@
                 <a:solidFill>
                   <a:srgbClr val="111827"/>
                 </a:solidFill>
-                <a:latin typeface="Microsoft YaHei"/>
-                <a:ea typeface="Microsoft YaHei"/>
-                <a:cs typeface="Microsoft YaHei"/>
+                <a:latin typeface="Aptos"/>
+                <a:ea typeface="Aptos"/>
+                <a:cs typeface="Aptos"/>
               </a:defRPr>
             </a:pPr>
             <a:r>
@@ -8605,9 +8605,9 @@
                 <a:solidFill>
                   <a:srgbClr val="111827"/>
                 </a:solidFill>
-                <a:latin typeface="Microsoft YaHei"/>
-                <a:ea typeface="Microsoft YaHei"/>
-                <a:cs typeface="Microsoft YaHei"/>
+                <a:latin typeface="Aptos"/>
+                <a:ea typeface="Aptos"/>
+                <a:cs typeface="Aptos"/>
               </a:rPr>
               <a:t>softplus</a:t>
             </a:r>
@@ -8618,9 +8618,9 @@
                 <a:solidFill>
                   <a:srgbClr val="111827"/>
                 </a:solidFill>
-                <a:latin typeface="Microsoft YaHei"/>
-                <a:ea typeface="Microsoft YaHei"/>
-                <a:cs typeface="Microsoft YaHei"/>
+                <a:latin typeface="Aptos"/>
+                <a:ea typeface="Aptos"/>
+                <a:cs typeface="Aptos"/>
               </a:defRPr>
             </a:pPr>
             <a:r>
@@ -8628,9 +8628,9 @@
                 <a:solidFill>
                   <a:srgbClr val="111827"/>
                 </a:solidFill>
-                <a:latin typeface="Microsoft YaHei"/>
-                <a:ea typeface="Microsoft YaHei"/>
-                <a:cs typeface="Microsoft YaHei"/>
+                <a:latin typeface="Aptos"/>
+                <a:ea typeface="Aptos"/>
+                <a:cs typeface="Aptos"/>
               </a:rPr>
               <a:t>positive path strength</a:t>
             </a:r>
@@ -8642,7 +8642,7 @@
           <p:cNvPr id="21" name="">
             <a:extLst xmlns:a="http://schemas.openxmlformats.org/drawingml/2006/main">
               <a:ext uri="{FF2B5EF4-FFF2-40B4-BE49-F238E27FC236}">
-                <a16:creationId xmlns:a16="http://schemas.microsoft.com/office/drawing/2014/main" id="{794F6781-A8C5-417B-9FA1-597FE4A18550}"/>
+                <a16:creationId xmlns:a16="http://schemas.microsoft.com/office/drawing/2014/main" id="{AD5294DC-B301-4732-9953-09E92E087E88}"/>
               </a:ext>
             </a:extLst>
           </p:cNvPr>
@@ -8680,9 +8680,9 @@
                 <a:solidFill>
                   <a:srgbClr val="111827"/>
                 </a:solidFill>
-                <a:latin typeface="Microsoft YaHei"/>
-                <a:ea typeface="Microsoft YaHei"/>
-                <a:cs typeface="Microsoft YaHei"/>
+                <a:latin typeface="Aptos"/>
+                <a:ea typeface="Aptos"/>
+                <a:cs typeface="Aptos"/>
               </a:defRPr>
             </a:pPr>
             <a:r>
@@ -8690,9 +8690,9 @@
                 <a:solidFill>
                   <a:srgbClr val="111827"/>
                 </a:solidFill>
-                <a:latin typeface="Microsoft YaHei"/>
-                <a:ea typeface="Microsoft YaHei"/>
-                <a:cs typeface="Microsoft YaHei"/>
+                <a:latin typeface="Aptos"/>
+                <a:ea typeface="Aptos"/>
+                <a:cs typeface="Aptos"/>
               </a:rPr>
               <a:t>alpha</a:t>
             </a:r>
@@ -8703,9 +8703,9 @@
                 <a:solidFill>
                   <a:srgbClr val="111827"/>
                 </a:solidFill>
-                <a:latin typeface="Microsoft YaHei"/>
-                <a:ea typeface="Microsoft YaHei"/>
-                <a:cs typeface="Microsoft YaHei"/>
+                <a:latin typeface="Aptos"/>
+                <a:ea typeface="Aptos"/>
+                <a:cs typeface="Aptos"/>
               </a:defRPr>
             </a:pPr>
             <a:r>
@@ -8713,9 +8713,9 @@
                 <a:solidFill>
                   <a:srgbClr val="111827"/>
                 </a:solidFill>
-                <a:latin typeface="Microsoft YaHei"/>
-                <a:ea typeface="Microsoft YaHei"/>
-                <a:cs typeface="Microsoft YaHei"/>
+                <a:latin typeface="Aptos"/>
+                <a:ea typeface="Aptos"/>
+                <a:cs typeface="Aptos"/>
               </a:rPr>
               <a:t>B x L_eff</a:t>
             </a:r>
@@ -8727,7 +8727,7 @@
           <p:cNvPr id="22" name="">
             <a:extLst xmlns:a="http://schemas.openxmlformats.org/drawingml/2006/main">
               <a:ext uri="{FF2B5EF4-FFF2-40B4-BE49-F238E27FC236}">
-                <a16:creationId xmlns:a16="http://schemas.microsoft.com/office/drawing/2014/main" id="{77F516CE-C870-4803-BD71-76D29C2EF50E}"/>
+                <a16:creationId xmlns:a16="http://schemas.microsoft.com/office/drawing/2014/main" id="{3A8E4329-21ED-40F9-A97D-44A449C6F8E4}"/>
               </a:ext>
             </a:extLst>
           </p:cNvPr>
@@ -8757,7 +8757,7 @@
           <p:cNvPr id="23" name="">
             <a:extLst xmlns:a="http://schemas.openxmlformats.org/drawingml/2006/main">
               <a:ext uri="{FF2B5EF4-FFF2-40B4-BE49-F238E27FC236}">
-                <a16:creationId xmlns:a16="http://schemas.microsoft.com/office/drawing/2014/main" id="{9FC07A58-E6F0-4CF5-A4DB-9F700AB0B516}"/>
+                <a16:creationId xmlns:a16="http://schemas.microsoft.com/office/drawing/2014/main" id="{709C85C7-E091-46E7-8F3E-1222CCA99F11}"/>
               </a:ext>
             </a:extLst>
           </p:cNvPr>
@@ -8790,7 +8790,7 @@
           <p:cNvPr id="24" name="">
             <a:extLst xmlns:a="http://schemas.openxmlformats.org/drawingml/2006/main">
               <a:ext uri="{FF2B5EF4-FFF2-40B4-BE49-F238E27FC236}">
-                <a16:creationId xmlns:a16="http://schemas.microsoft.com/office/drawing/2014/main" id="{E435BB18-56BF-445B-A6A2-50C02848FD4D}"/>
+                <a16:creationId xmlns:a16="http://schemas.microsoft.com/office/drawing/2014/main" id="{DBBC448E-AB6B-4C51-8CB5-CB7C5F816EDB}"/>
               </a:ext>
             </a:extLst>
           </p:cNvPr>
@@ -8823,7 +8823,7 @@
           <p:cNvPr id="25" name="">
             <a:extLst xmlns:a="http://schemas.openxmlformats.org/drawingml/2006/main">
               <a:ext uri="{FF2B5EF4-FFF2-40B4-BE49-F238E27FC236}">
-                <a16:creationId xmlns:a16="http://schemas.microsoft.com/office/drawing/2014/main" id="{0BFB982A-BED6-4150-B761-88B4F2560AAC}"/>
+                <a16:creationId xmlns:a16="http://schemas.microsoft.com/office/drawing/2014/main" id="{E144B355-A262-4790-B105-CE515C05111F}"/>
               </a:ext>
             </a:extLst>
           </p:cNvPr>
@@ -8863,9 +8863,9 @@
                 <a:solidFill>
                   <a:srgbClr val="5B6472"/>
                 </a:solidFill>
-                <a:latin typeface="Microsoft YaHei"/>
-                <a:ea typeface="Microsoft YaHei"/>
-                <a:cs typeface="Microsoft YaHei"/>
+                <a:latin typeface="Aptos"/>
+                <a:ea typeface="Aptos"/>
+                <a:cs typeface="Aptos"/>
               </a:defRPr>
             </a:pPr>
             <a:r>
@@ -8873,11 +8873,11 @@
                 <a:solidFill>
                   <a:srgbClr val="5B6472"/>
                 </a:solidFill>
-                <a:latin typeface="Microsoft YaHei"/>
-                <a:ea typeface="Microsoft YaHei"/>
-                <a:cs typeface="Microsoft YaHei"/>
-              </a:rPr>
-              <a:t>rho 选择全局池化 MLP，是因为当前 T=2 时 bottleneck 时间轴会坍缩为单点；alpha 用 softplus 保证非负。</a:t>
+                <a:latin typeface="Aptos"/>
+                <a:ea typeface="Aptos"/>
+                <a:cs typeface="Aptos"/>
+              </a:rPr>
+              <a:t>rho uses a globally pooled MLP because the current T=2 setting collapses the bottleneck time axis to a single bin; alpha uses softplus to stay non-negative.</a:t>
             </a:r>
           </a:p>
         </p:txBody>
@@ -8885,7 +8885,7 @@
     </p:spTree>
     <p:extLst>
       <p:ext uri="{BB962C8B-B14F-4D97-AF65-F5344CB8AC3E}">
-        <p14:creationId xmlns:p14="http://schemas.microsoft.com/office/powerpoint/2010/main" val="390403670"/>
+        <p14:creationId xmlns:p14="http://schemas.microsoft.com/office/powerpoint/2010/main" val="61017850"/>
       </p:ext>
     </p:extLst>
   </p:cSld>
@@ -8916,7 +8916,7 @@
           <p:cNvPr id="1" name="">
             <a:extLst xmlns:a="http://schemas.openxmlformats.org/drawingml/2006/main">
               <a:ext uri="{FF2B5EF4-FFF2-40B4-BE49-F238E27FC236}">
-                <a16:creationId xmlns:a16="http://schemas.microsoft.com/office/drawing/2014/main" id="{49A7EC1B-19A9-450F-8FF3-BD3988B6C3E2}"/>
+                <a16:creationId xmlns:a16="http://schemas.microsoft.com/office/drawing/2014/main" id="{C1930047-133B-4E16-A302-D861E91C2640}"/>
               </a:ext>
             </a:extLst>
           </p:cNvPr>
@@ -8949,7 +8949,7 @@
           <p:cNvPr id="2" name="">
             <a:extLst xmlns:a="http://schemas.openxmlformats.org/drawingml/2006/main">
               <a:ext uri="{FF2B5EF4-FFF2-40B4-BE49-F238E27FC236}">
-                <a16:creationId xmlns:a16="http://schemas.microsoft.com/office/drawing/2014/main" id="{5181D6CC-98D3-4C39-9DCE-A6FFE1F309DC}"/>
+                <a16:creationId xmlns:a16="http://schemas.microsoft.com/office/drawing/2014/main" id="{43093327-F11D-4289-A0BA-2F51243EF9B7}"/>
               </a:ext>
             </a:extLst>
           </p:cNvPr>
@@ -8989,9 +8989,9 @@
                 <a:solidFill>
                   <a:srgbClr val="5B6472"/>
                 </a:solidFill>
-                <a:latin typeface="Microsoft YaHei"/>
-                <a:ea typeface="Microsoft YaHei"/>
-                <a:cs typeface="Microsoft YaHei"/>
+                <a:latin typeface="Aptos"/>
+                <a:ea typeface="Aptos"/>
+                <a:cs typeface="Aptos"/>
               </a:defRPr>
             </a:pPr>
             <a:r>
@@ -8999,9 +8999,9 @@
                 <a:solidFill>
                   <a:srgbClr val="5B6472"/>
                 </a:solidFill>
-                <a:latin typeface="Microsoft YaHei"/>
-                <a:ea typeface="Microsoft YaHei"/>
-                <a:cs typeface="Microsoft YaHei"/>
+                <a:latin typeface="Aptos"/>
+                <a:ea typeface="Aptos"/>
+                <a:cs typeface="Aptos"/>
               </a:rPr>
               <a:t>NAFEncoderLSNet | 06</a:t>
             </a:r>
@@ -9013,7 +9013,7 @@
           <p:cNvPr id="3" name="">
             <a:extLst xmlns:a="http://schemas.openxmlformats.org/drawingml/2006/main">
               <a:ext uri="{FF2B5EF4-FFF2-40B4-BE49-F238E27FC236}">
-                <a16:creationId xmlns:a16="http://schemas.microsoft.com/office/drawing/2014/main" id="{8927BA2C-E3DE-462B-975C-C348878B6152}"/>
+                <a16:creationId xmlns:a16="http://schemas.microsoft.com/office/drawing/2014/main" id="{768FFD5D-9522-4032-9F24-1FF4641FC6F0}"/>
               </a:ext>
             </a:extLst>
           </p:cNvPr>
@@ -9053,9 +9053,9 @@
                 <a:solidFill>
                   <a:srgbClr val="5B6472"/>
                 </a:solidFill>
-                <a:latin typeface="Microsoft YaHei"/>
-                <a:ea typeface="Microsoft YaHei"/>
-                <a:cs typeface="Microsoft YaHei"/>
+                <a:latin typeface="Aptos"/>
+                <a:ea typeface="Aptos"/>
+                <a:cs typeface="Aptos"/>
               </a:defRPr>
             </a:pPr>
             <a:r>
@@ -9063,9 +9063,9 @@
                 <a:solidFill>
                   <a:srgbClr val="5B6472"/>
                 </a:solidFill>
-                <a:latin typeface="Microsoft YaHei"/>
-                <a:ea typeface="Microsoft YaHei"/>
-                <a:cs typeface="Microsoft YaHei"/>
+                <a:latin typeface="Aptos"/>
+                <a:ea typeface="Aptos"/>
+                <a:cs typeface="Aptos"/>
               </a:rPr>
               <a:t>Optional existence probability</a:t>
             </a:r>
@@ -9077,7 +9077,7 @@
           <p:cNvPr id="4" name="">
             <a:extLst xmlns:a="http://schemas.openxmlformats.org/drawingml/2006/main">
               <a:ext uri="{FF2B5EF4-FFF2-40B4-BE49-F238E27FC236}">
-                <a16:creationId xmlns:a16="http://schemas.microsoft.com/office/drawing/2014/main" id="{2F29E4DA-47A4-438E-A881-202428D24965}"/>
+                <a16:creationId xmlns:a16="http://schemas.microsoft.com/office/drawing/2014/main" id="{0F6905C6-531A-44E0-A4A3-B076A0A415C2}"/>
               </a:ext>
             </a:extLst>
           </p:cNvPr>
@@ -9117,9 +9117,9 @@
                 <a:solidFill>
                   <a:srgbClr val="111827"/>
                 </a:solidFill>
-                <a:latin typeface="Microsoft YaHei UI"/>
-                <a:ea typeface="Microsoft YaHei UI"/>
-                <a:cs typeface="Microsoft YaHei UI"/>
+                <a:latin typeface="Aptos Display"/>
+                <a:ea typeface="Aptos Display"/>
+                <a:cs typeface="Aptos Display"/>
               </a:defRPr>
             </a:pPr>
             <a:r>
@@ -9127,11 +9127,11 @@
                 <a:solidFill>
                   <a:srgbClr val="111827"/>
                 </a:solidFill>
-                <a:latin typeface="Microsoft YaHei UI"/>
-                <a:ea typeface="Microsoft YaHei UI"/>
-                <a:cs typeface="Microsoft YaHei UI"/>
-              </a:rPr>
-              <a:t>path_prob Head 与兼容性</a:t>
+                <a:latin typeface="Aptos Display"/>
+                <a:ea typeface="Aptos Display"/>
+                <a:cs typeface="Aptos Display"/>
+              </a:rPr>
+              <a:t>path_prob Head and Compatibility</a:t>
             </a:r>
           </a:p>
         </p:txBody>
@@ -9141,7 +9141,7 @@
           <p:cNvPr id="5" name="">
             <a:extLst xmlns:a="http://schemas.openxmlformats.org/drawingml/2006/main">
               <a:ext uri="{FF2B5EF4-FFF2-40B4-BE49-F238E27FC236}">
-                <a16:creationId xmlns:a16="http://schemas.microsoft.com/office/drawing/2014/main" id="{44987598-B952-4542-BF89-1F554585A958}"/>
+                <a16:creationId xmlns:a16="http://schemas.microsoft.com/office/drawing/2014/main" id="{00341A93-7B71-4042-9BCC-DADF0F1CDC85}"/>
               </a:ext>
             </a:extLst>
           </p:cNvPr>
@@ -9174,7 +9174,7 @@
           <p:cNvPr id="6" name="">
             <a:extLst xmlns:a="http://schemas.openxmlformats.org/drawingml/2006/main">
               <a:ext uri="{FF2B5EF4-FFF2-40B4-BE49-F238E27FC236}">
-                <a16:creationId xmlns:a16="http://schemas.microsoft.com/office/drawing/2014/main" id="{F83FC260-D12F-47D5-81AE-F9DE9CD11052}"/>
+                <a16:creationId xmlns:a16="http://schemas.microsoft.com/office/drawing/2014/main" id="{DE830335-A86A-4B44-B90D-1646125ECC38}"/>
               </a:ext>
             </a:extLst>
           </p:cNvPr>
@@ -9212,9 +9212,9 @@
                 <a:solidFill>
                   <a:srgbClr val="111827"/>
                 </a:solidFill>
-                <a:latin typeface="Microsoft YaHei"/>
-                <a:ea typeface="Microsoft YaHei"/>
-                <a:cs typeface="Microsoft YaHei"/>
+                <a:latin typeface="Aptos"/>
+                <a:ea typeface="Aptos"/>
+                <a:cs typeface="Aptos"/>
               </a:defRPr>
             </a:pPr>
             <a:r>
@@ -9222,9 +9222,9 @@
                 <a:solidFill>
                   <a:srgbClr val="111827"/>
                 </a:solidFill>
-                <a:latin typeface="Microsoft YaHei"/>
-                <a:ea typeface="Microsoft YaHei"/>
-                <a:cs typeface="Microsoft YaHei"/>
+                <a:latin typeface="Aptos"/>
+                <a:ea typeface="Aptos"/>
+                <a:cs typeface="Aptos"/>
               </a:rPr>
               <a:t>cfg.usePathProbHead</a:t>
             </a:r>
@@ -9236,7 +9236,7 @@
           <p:cNvPr id="7" name="">
             <a:extLst xmlns:a="http://schemas.openxmlformats.org/drawingml/2006/main">
               <a:ext uri="{FF2B5EF4-FFF2-40B4-BE49-F238E27FC236}">
-                <a16:creationId xmlns:a16="http://schemas.microsoft.com/office/drawing/2014/main" id="{0F476AFC-1429-4B66-960A-B21F2665D80F}"/>
+                <a16:creationId xmlns:a16="http://schemas.microsoft.com/office/drawing/2014/main" id="{E91321D7-6B18-427F-AB38-3CC5BA86ABF4}"/>
               </a:ext>
             </a:extLst>
           </p:cNvPr>
@@ -9274,9 +9274,9 @@
                 <a:solidFill>
                   <a:srgbClr val="111827"/>
                 </a:solidFill>
-                <a:latin typeface="Microsoft YaHei"/>
-                <a:ea typeface="Microsoft YaHei"/>
-                <a:cs typeface="Microsoft YaHei"/>
+                <a:latin typeface="Aptos"/>
+                <a:ea typeface="Aptos"/>
+                <a:cs typeface="Aptos"/>
               </a:defRPr>
             </a:pPr>
             <a:r>
@@ -9284,9 +9284,9 @@
                 <a:solidFill>
                   <a:srgbClr val="111827"/>
                 </a:solidFill>
-                <a:latin typeface="Microsoft YaHei"/>
-                <a:ea typeface="Microsoft YaHei"/>
-                <a:cs typeface="Microsoft YaHei"/>
+                <a:latin typeface="Aptos"/>
+                <a:ea typeface="Aptos"/>
+                <a:cs typeface="Aptos"/>
               </a:rPr>
               <a:t>True</a:t>
             </a:r>
@@ -9297,9 +9297,9 @@
                 <a:solidFill>
                   <a:srgbClr val="111827"/>
                 </a:solidFill>
-                <a:latin typeface="Microsoft YaHei"/>
-                <a:ea typeface="Microsoft YaHei"/>
-                <a:cs typeface="Microsoft YaHei"/>
+                <a:latin typeface="Aptos"/>
+                <a:ea typeface="Aptos"/>
+                <a:cs typeface="Aptos"/>
               </a:defRPr>
             </a:pPr>
             <a:r>
@@ -9307,9 +9307,9 @@
                 <a:solidFill>
                   <a:srgbClr val="111827"/>
                 </a:solidFill>
-                <a:latin typeface="Microsoft YaHei"/>
-                <a:ea typeface="Microsoft YaHei"/>
-                <a:cs typeface="Microsoft YaHei"/>
+                <a:latin typeface="Aptos"/>
+                <a:ea typeface="Aptos"/>
+                <a:cs typeface="Aptos"/>
               </a:rPr>
               <a:t>path_prob_head MLP</a:t>
             </a:r>
@@ -9320,9 +9320,9 @@
                 <a:solidFill>
                   <a:srgbClr val="111827"/>
                 </a:solidFill>
-                <a:latin typeface="Microsoft YaHei"/>
-                <a:ea typeface="Microsoft YaHei"/>
-                <a:cs typeface="Microsoft YaHei"/>
+                <a:latin typeface="Aptos"/>
+                <a:ea typeface="Aptos"/>
+                <a:cs typeface="Aptos"/>
               </a:defRPr>
             </a:pPr>
             <a:r>
@@ -9330,9 +9330,9 @@
                 <a:solidFill>
                   <a:srgbClr val="111827"/>
                 </a:solidFill>
-                <a:latin typeface="Microsoft YaHei"/>
-                <a:ea typeface="Microsoft YaHei"/>
-                <a:cs typeface="Microsoft YaHei"/>
+                <a:latin typeface="Aptos"/>
+                <a:ea typeface="Aptos"/>
+                <a:cs typeface="Aptos"/>
               </a:rPr>
               <a:t>4C -&gt; hidden -&gt; L_eff</a:t>
             </a:r>
@@ -9344,7 +9344,7 @@
           <p:cNvPr id="8" name="">
             <a:extLst xmlns:a="http://schemas.openxmlformats.org/drawingml/2006/main">
               <a:ext uri="{FF2B5EF4-FFF2-40B4-BE49-F238E27FC236}">
-                <a16:creationId xmlns:a16="http://schemas.microsoft.com/office/drawing/2014/main" id="{47967892-8CBA-4E47-A447-3963E397BCCA}"/>
+                <a16:creationId xmlns:a16="http://schemas.microsoft.com/office/drawing/2014/main" id="{BCD0E184-DE5F-429C-B6B3-3C880964BD33}"/>
               </a:ext>
             </a:extLst>
           </p:cNvPr>
@@ -9382,9 +9382,9 @@
                 <a:solidFill>
                   <a:srgbClr val="111827"/>
                 </a:solidFill>
-                <a:latin typeface="Microsoft YaHei"/>
-                <a:ea typeface="Microsoft YaHei"/>
-                <a:cs typeface="Microsoft YaHei"/>
+                <a:latin typeface="Aptos"/>
+                <a:ea typeface="Aptos"/>
+                <a:cs typeface="Aptos"/>
               </a:defRPr>
             </a:pPr>
             <a:r>
@@ -9392,9 +9392,9 @@
                 <a:solidFill>
                   <a:srgbClr val="111827"/>
                 </a:solidFill>
-                <a:latin typeface="Microsoft YaHei"/>
-                <a:ea typeface="Microsoft YaHei"/>
-                <a:cs typeface="Microsoft YaHei"/>
+                <a:latin typeface="Aptos"/>
+                <a:ea typeface="Aptos"/>
+                <a:cs typeface="Aptos"/>
               </a:rPr>
               <a:t>False</a:t>
             </a:r>
@@ -9405,9 +9405,9 @@
                 <a:solidFill>
                   <a:srgbClr val="111827"/>
                 </a:solidFill>
-                <a:latin typeface="Microsoft YaHei"/>
-                <a:ea typeface="Microsoft YaHei"/>
-                <a:cs typeface="Microsoft YaHei"/>
+                <a:latin typeface="Aptos"/>
+                <a:ea typeface="Aptos"/>
+                <a:cs typeface="Aptos"/>
               </a:defRPr>
             </a:pPr>
             <a:r>
@@ -9415,9 +9415,9 @@
                 <a:solidFill>
                   <a:srgbClr val="111827"/>
                 </a:solidFill>
-                <a:latin typeface="Microsoft YaHei"/>
-                <a:ea typeface="Microsoft YaHei"/>
-                <a:cs typeface="Microsoft YaHei"/>
+                <a:latin typeface="Aptos"/>
+                <a:ea typeface="Aptos"/>
+                <a:cs typeface="Aptos"/>
               </a:rPr>
               <a:t>ones(B, L_eff)</a:t>
             </a:r>
@@ -9429,7 +9429,7 @@
           <p:cNvPr id="9" name="">
             <a:extLst xmlns:a="http://schemas.openxmlformats.org/drawingml/2006/main">
               <a:ext uri="{FF2B5EF4-FFF2-40B4-BE49-F238E27FC236}">
-                <a16:creationId xmlns:a16="http://schemas.microsoft.com/office/drawing/2014/main" id="{65DEA88E-1550-4A5E-B933-651FC0D53914}"/>
+                <a16:creationId xmlns:a16="http://schemas.microsoft.com/office/drawing/2014/main" id="{981D229C-02EB-42C0-A6DC-3E359309833F}"/>
               </a:ext>
             </a:extLst>
           </p:cNvPr>
@@ -9467,9 +9467,9 @@
                 <a:solidFill>
                   <a:srgbClr val="111827"/>
                 </a:solidFill>
-                <a:latin typeface="Microsoft YaHei"/>
-                <a:ea typeface="Microsoft YaHei"/>
-                <a:cs typeface="Microsoft YaHei"/>
+                <a:latin typeface="Aptos"/>
+                <a:ea typeface="Aptos"/>
+                <a:cs typeface="Aptos"/>
               </a:defRPr>
             </a:pPr>
             <a:r>
@@ -9477,9 +9477,9 @@
                 <a:solidFill>
                   <a:srgbClr val="111827"/>
                 </a:solidFill>
-                <a:latin typeface="Microsoft YaHei"/>
-                <a:ea typeface="Microsoft YaHei"/>
-                <a:cs typeface="Microsoft YaHei"/>
+                <a:latin typeface="Aptos"/>
+                <a:ea typeface="Aptos"/>
+                <a:cs typeface="Aptos"/>
               </a:rPr>
               <a:t>path_prob</a:t>
             </a:r>
@@ -9490,9 +9490,9 @@
                 <a:solidFill>
                   <a:srgbClr val="111827"/>
                 </a:solidFill>
-                <a:latin typeface="Microsoft YaHei"/>
-                <a:ea typeface="Microsoft YaHei"/>
-                <a:cs typeface="Microsoft YaHei"/>
+                <a:latin typeface="Aptos"/>
+                <a:ea typeface="Aptos"/>
+                <a:cs typeface="Aptos"/>
               </a:defRPr>
             </a:pPr>
             <a:r>
@@ -9500,9 +9500,9 @@
                 <a:solidFill>
                   <a:srgbClr val="111827"/>
                 </a:solidFill>
-                <a:latin typeface="Microsoft YaHei"/>
-                <a:ea typeface="Microsoft YaHei"/>
-                <a:cs typeface="Microsoft YaHei"/>
+                <a:latin typeface="Aptos"/>
+                <a:ea typeface="Aptos"/>
+                <a:cs typeface="Aptos"/>
               </a:rPr>
               <a:t>B x L_eff</a:t>
             </a:r>
@@ -9514,7 +9514,7 @@
           <p:cNvPr id="10" name="">
             <a:extLst xmlns:a="http://schemas.openxmlformats.org/drawingml/2006/main">
               <a:ext uri="{FF2B5EF4-FFF2-40B4-BE49-F238E27FC236}">
-                <a16:creationId xmlns:a16="http://schemas.microsoft.com/office/drawing/2014/main" id="{E5EECC91-3CEF-49C0-8B22-1C8C2CF20A9D}"/>
+                <a16:creationId xmlns:a16="http://schemas.microsoft.com/office/drawing/2014/main" id="{1F53DC9A-F501-42BC-9D4B-A16BEBB2D1E8}"/>
               </a:ext>
             </a:extLst>
           </p:cNvPr>
@@ -9544,7 +9544,7 @@
           <p:cNvPr id="11" name="">
             <a:extLst xmlns:a="http://schemas.openxmlformats.org/drawingml/2006/main">
               <a:ext uri="{FF2B5EF4-FFF2-40B4-BE49-F238E27FC236}">
-                <a16:creationId xmlns:a16="http://schemas.microsoft.com/office/drawing/2014/main" id="{957B8BB3-1CA2-469B-B3F4-E1CBEA8FACB0}"/>
+                <a16:creationId xmlns:a16="http://schemas.microsoft.com/office/drawing/2014/main" id="{09944764-9EF7-4825-A92B-C91CFAAFAB3A}"/>
               </a:ext>
             </a:extLst>
           </p:cNvPr>
@@ -9574,7 +9574,7 @@
           <p:cNvPr id="12" name="">
             <a:extLst xmlns:a="http://schemas.openxmlformats.org/drawingml/2006/main">
               <a:ext uri="{FF2B5EF4-FFF2-40B4-BE49-F238E27FC236}">
-                <a16:creationId xmlns:a16="http://schemas.microsoft.com/office/drawing/2014/main" id="{892F6D63-FE31-475A-8C2D-F1C930B2DB61}"/>
+                <a16:creationId xmlns:a16="http://schemas.microsoft.com/office/drawing/2014/main" id="{89145A10-3337-47CA-A8EF-E1C9375AABE5}"/>
               </a:ext>
             </a:extLst>
           </p:cNvPr>
@@ -9604,7 +9604,7 @@
           <p:cNvPr id="13" name="">
             <a:extLst xmlns:a="http://schemas.openxmlformats.org/drawingml/2006/main">
               <a:ext uri="{FF2B5EF4-FFF2-40B4-BE49-F238E27FC236}">
-                <a16:creationId xmlns:a16="http://schemas.microsoft.com/office/drawing/2014/main" id="{5BF7AACF-6CA0-47DA-B58C-29438D62F79A}"/>
+                <a16:creationId xmlns:a16="http://schemas.microsoft.com/office/drawing/2014/main" id="{189113D0-300E-4386-8066-B46C5ACF170E}"/>
               </a:ext>
             </a:extLst>
           </p:cNvPr>
@@ -9634,7 +9634,7 @@
           <p:cNvPr id="14" name="">
             <a:extLst xmlns:a="http://schemas.openxmlformats.org/drawingml/2006/main">
               <a:ext uri="{FF2B5EF4-FFF2-40B4-BE49-F238E27FC236}">
-                <a16:creationId xmlns:a16="http://schemas.microsoft.com/office/drawing/2014/main" id="{7EDB0817-8465-477E-92C6-9736EA0E6B94}"/>
+                <a16:creationId xmlns:a16="http://schemas.microsoft.com/office/drawing/2014/main" id="{DEEAC51F-EC15-4B46-86B9-C54F4B17E4A7}"/>
               </a:ext>
             </a:extLst>
           </p:cNvPr>
@@ -9667,7 +9667,7 @@
           <p:cNvPr id="15" name="">
             <a:extLst xmlns:a="http://schemas.openxmlformats.org/drawingml/2006/main">
               <a:ext uri="{FF2B5EF4-FFF2-40B4-BE49-F238E27FC236}">
-                <a16:creationId xmlns:a16="http://schemas.microsoft.com/office/drawing/2014/main" id="{7757C31B-0325-4139-A178-F97C9F25ECBC}"/>
+                <a16:creationId xmlns:a16="http://schemas.microsoft.com/office/drawing/2014/main" id="{8AFCEDE9-18D8-4130-AD07-031CE9129EBC}"/>
               </a:ext>
             </a:extLst>
           </p:cNvPr>
@@ -9707,9 +9707,9 @@
                 <a:solidFill>
                   <a:srgbClr val="5B6472"/>
                 </a:solidFill>
-                <a:latin typeface="Microsoft YaHei"/>
-                <a:ea typeface="Microsoft YaHei"/>
-                <a:cs typeface="Microsoft YaHei"/>
+                <a:latin typeface="Aptos"/>
+                <a:ea typeface="Aptos"/>
+                <a:cs typeface="Aptos"/>
               </a:defRPr>
             </a:pPr>
             <a:r>
@@ -9717,11 +9717,11 @@
                 <a:solidFill>
                   <a:srgbClr val="5B6472"/>
                 </a:solidFill>
-                <a:latin typeface="Microsoft YaHei"/>
-                <a:ea typeface="Microsoft YaHei"/>
-                <a:cs typeface="Microsoft YaHei"/>
-              </a:rPr>
-              <a:t>默认关闭时保持旧 checkpoint 可加载：模型没有 path_prob_head 权重，也不会出现 missing key。</a:t>
+                <a:latin typeface="Aptos"/>
+                <a:ea typeface="Aptos"/>
+                <a:cs typeface="Aptos"/>
+              </a:rPr>
+              <a:t>Default-off behavior preserves old checkpoint loading: there are no path_prob_head weights and no missing-key mismatch.</a:t>
             </a:r>
           </a:p>
         </p:txBody>
@@ -9731,7 +9731,7 @@
           <p:cNvPr id="16" name="">
             <a:extLst xmlns:a="http://schemas.openxmlformats.org/drawingml/2006/main">
               <a:ext uri="{FF2B5EF4-FFF2-40B4-BE49-F238E27FC236}">
-                <a16:creationId xmlns:a16="http://schemas.microsoft.com/office/drawing/2014/main" id="{BA3497F7-457B-4B18-B8A6-42B9456176A3}"/>
+                <a16:creationId xmlns:a16="http://schemas.microsoft.com/office/drawing/2014/main" id="{8B2ED964-FDFD-4CE0-A4DF-600DC32B4540}"/>
               </a:ext>
             </a:extLst>
           </p:cNvPr>
@@ -9764,7 +9764,7 @@
           <p:cNvPr id="17" name="">
             <a:extLst xmlns:a="http://schemas.openxmlformats.org/drawingml/2006/main">
               <a:ext uri="{FF2B5EF4-FFF2-40B4-BE49-F238E27FC236}">
-                <a16:creationId xmlns:a16="http://schemas.microsoft.com/office/drawing/2014/main" id="{349EE848-483C-43C1-92BA-34F178007958}"/>
+                <a16:creationId xmlns:a16="http://schemas.microsoft.com/office/drawing/2014/main" id="{175F3613-C3D4-4B83-8C23-341C3D91D2E8}"/>
               </a:ext>
             </a:extLst>
           </p:cNvPr>
@@ -9804,9 +9804,9 @@
                 <a:solidFill>
                   <a:srgbClr val="5B6472"/>
                 </a:solidFill>
-                <a:latin typeface="Microsoft YaHei"/>
-                <a:ea typeface="Microsoft YaHei"/>
-                <a:cs typeface="Microsoft YaHei"/>
+                <a:latin typeface="Aptos"/>
+                <a:ea typeface="Aptos"/>
+                <a:cs typeface="Aptos"/>
               </a:defRPr>
             </a:pPr>
             <a:r>
@@ -9814,11 +9814,11 @@
                 <a:solidFill>
                   <a:srgbClr val="5B6472"/>
                 </a:solidFill>
-                <a:latin typeface="Microsoft YaHei"/>
-                <a:ea typeface="Microsoft YaHei"/>
-                <a:cs typeface="Microsoft YaHei"/>
-              </a:rPr>
-              <a:t>开启时每条 path 额外学习一个存在概率，经过 sigmoid 限制在 0 到 1。</a:t>
+                <a:latin typeface="Aptos"/>
+                <a:ea typeface="Aptos"/>
+                <a:cs typeface="Aptos"/>
+              </a:rPr>
+              <a:t>When enabled, each path learns an additional existence probability constrained to [0, 1] by sigmoid.</a:t>
             </a:r>
           </a:p>
         </p:txBody>
@@ -9828,7 +9828,7 @@
           <p:cNvPr id="18" name="">
             <a:extLst xmlns:a="http://schemas.openxmlformats.org/drawingml/2006/main">
               <a:ext uri="{FF2B5EF4-FFF2-40B4-BE49-F238E27FC236}">
-                <a16:creationId xmlns:a16="http://schemas.microsoft.com/office/drawing/2014/main" id="{10D458C9-B8AB-4644-B855-1C4F36FAA0A7}"/>
+                <a16:creationId xmlns:a16="http://schemas.microsoft.com/office/drawing/2014/main" id="{6451F3DC-F26E-48C9-B9D5-4C8BD447E215}"/>
               </a:ext>
             </a:extLst>
           </p:cNvPr>
@@ -9861,7 +9861,7 @@
           <p:cNvPr id="19" name="">
             <a:extLst xmlns:a="http://schemas.openxmlformats.org/drawingml/2006/main">
               <a:ext uri="{FF2B5EF4-FFF2-40B4-BE49-F238E27FC236}">
-                <a16:creationId xmlns:a16="http://schemas.microsoft.com/office/drawing/2014/main" id="{2245F818-A32B-4D68-AF61-C6B97DD227EA}"/>
+                <a16:creationId xmlns:a16="http://schemas.microsoft.com/office/drawing/2014/main" id="{251A2FF8-CF30-43E9-B052-751328A8E90C}"/>
               </a:ext>
             </a:extLst>
           </p:cNvPr>
@@ -9901,9 +9901,9 @@
                 <a:solidFill>
                   <a:srgbClr val="5B6472"/>
                 </a:solidFill>
-                <a:latin typeface="Microsoft YaHei"/>
-                <a:ea typeface="Microsoft YaHei"/>
-                <a:cs typeface="Microsoft YaHei"/>
+                <a:latin typeface="Aptos"/>
+                <a:ea typeface="Aptos"/>
+                <a:cs typeface="Aptos"/>
               </a:defRPr>
             </a:pPr>
             <a:r>
@@ -9911,11 +9911,11 @@
                 <a:solidFill>
                   <a:srgbClr val="5B6472"/>
                 </a:solidFill>
-                <a:latin typeface="Microsoft YaHei"/>
-                <a:ea typeface="Microsoft YaHei"/>
-                <a:cs typeface="Microsoft YaHei"/>
-              </a:rPr>
-              <a:t>关闭时等价于 legacy 行为：所有 L_eff 条 path 都被认为存在。</a:t>
+                <a:latin typeface="Aptos"/>
+                <a:ea typeface="Aptos"/>
+                <a:cs typeface="Aptos"/>
+              </a:rPr>
+              <a:t>When disabled, the behavior matches the legacy path: all L_eff paths are treated as present.</a:t>
             </a:r>
           </a:p>
         </p:txBody>
@@ -9923,7 +9923,7 @@
     </p:spTree>
     <p:extLst>
       <p:ext uri="{BB962C8B-B14F-4D97-AF65-F5344CB8AC3E}">
-        <p14:creationId xmlns:p14="http://schemas.microsoft.com/office/powerpoint/2010/main" val="506603349"/>
+        <p14:creationId xmlns:p14="http://schemas.microsoft.com/office/powerpoint/2010/main" val="1836372093"/>
       </p:ext>
     </p:extLst>
   </p:cSld>
@@ -9954,7 +9954,7 @@
           <p:cNvPr id="1" name="">
             <a:extLst xmlns:a="http://schemas.openxmlformats.org/drawingml/2006/main">
               <a:ext uri="{FF2B5EF4-FFF2-40B4-BE49-F238E27FC236}">
-                <a16:creationId xmlns:a16="http://schemas.microsoft.com/office/drawing/2014/main" id="{F71F035A-BA1C-467A-8893-749D8BBE24E1}"/>
+                <a16:creationId xmlns:a16="http://schemas.microsoft.com/office/drawing/2014/main" id="{64BF0674-5B0C-4123-BC39-6E8281ADB80A}"/>
               </a:ext>
             </a:extLst>
           </p:cNvPr>
@@ -9987,7 +9987,7 @@
           <p:cNvPr id="2" name="">
             <a:extLst xmlns:a="http://schemas.openxmlformats.org/drawingml/2006/main">
               <a:ext uri="{FF2B5EF4-FFF2-40B4-BE49-F238E27FC236}">
-                <a16:creationId xmlns:a16="http://schemas.microsoft.com/office/drawing/2014/main" id="{5C30AAAF-0CC5-4A64-9244-8F8FA1708249}"/>
+                <a16:creationId xmlns:a16="http://schemas.microsoft.com/office/drawing/2014/main" id="{47C31D42-8CDC-4E04-804A-C95CBCBF4F8E}"/>
               </a:ext>
             </a:extLst>
           </p:cNvPr>
@@ -10027,9 +10027,9 @@
                 <a:solidFill>
                   <a:srgbClr val="5B6472"/>
                 </a:solidFill>
-                <a:latin typeface="Microsoft YaHei"/>
-                <a:ea typeface="Microsoft YaHei"/>
-                <a:cs typeface="Microsoft YaHei"/>
+                <a:latin typeface="Aptos"/>
+                <a:ea typeface="Aptos"/>
+                <a:cs typeface="Aptos"/>
               </a:defRPr>
             </a:pPr>
             <a:r>
@@ -10037,9 +10037,9 @@
                 <a:solidFill>
                   <a:srgbClr val="5B6472"/>
                 </a:solidFill>
-                <a:latin typeface="Microsoft YaHei"/>
-                <a:ea typeface="Microsoft YaHei"/>
-                <a:cs typeface="Microsoft YaHei"/>
+                <a:latin typeface="Aptos"/>
+                <a:ea typeface="Aptos"/>
+                <a:cs typeface="Aptos"/>
               </a:rPr>
               <a:t>NAFEncoderLSNet | 07</a:t>
             </a:r>
@@ -10051,7 +10051,7 @@
           <p:cNvPr id="3" name="">
             <a:extLst xmlns:a="http://schemas.openxmlformats.org/drawingml/2006/main">
               <a:ext uri="{FF2B5EF4-FFF2-40B4-BE49-F238E27FC236}">
-                <a16:creationId xmlns:a16="http://schemas.microsoft.com/office/drawing/2014/main" id="{FC9AD65F-D428-4916-8082-75BF94491277}"/>
+                <a16:creationId xmlns:a16="http://schemas.microsoft.com/office/drawing/2014/main" id="{177475E8-64D6-4D65-ADB0-DAF0EDEFB1D9}"/>
               </a:ext>
             </a:extLst>
           </p:cNvPr>
@@ -10091,9 +10091,9 @@
                 <a:solidFill>
                   <a:srgbClr val="5B6472"/>
                 </a:solidFill>
-                <a:latin typeface="Microsoft YaHei"/>
-                <a:ea typeface="Microsoft YaHei"/>
-                <a:cs typeface="Microsoft YaHei"/>
+                <a:latin typeface="Aptos"/>
+                <a:ea typeface="Aptos"/>
+                <a:cs typeface="Aptos"/>
               </a:defRPr>
             </a:pPr>
             <a:r>
@@ -10101,9 +10101,9 @@
                 <a:solidFill>
                   <a:srgbClr val="5B6472"/>
                 </a:solidFill>
-                <a:latin typeface="Microsoft YaHei"/>
-                <a:ea typeface="Microsoft YaHei"/>
-                <a:cs typeface="Microsoft YaHei"/>
+                <a:latin typeface="Aptos"/>
+                <a:ea typeface="Aptos"/>
+                <a:cs typeface="Aptos"/>
               </a:rPr>
               <a:t>Runtime data flow</a:t>
             </a:r>
@@ -10115,7 +10115,7 @@
           <p:cNvPr id="4" name="">
             <a:extLst xmlns:a="http://schemas.openxmlformats.org/drawingml/2006/main">
               <a:ext uri="{FF2B5EF4-FFF2-40B4-BE49-F238E27FC236}">
-                <a16:creationId xmlns:a16="http://schemas.microsoft.com/office/drawing/2014/main" id="{5AF29AAB-54D1-40CF-A733-9214B2978C21}"/>
+                <a16:creationId xmlns:a16="http://schemas.microsoft.com/office/drawing/2014/main" id="{C5A9D7B8-E1C4-48E8-84D1-D48AF454190C}"/>
               </a:ext>
             </a:extLst>
           </p:cNvPr>
@@ -10155,9 +10155,9 @@
                 <a:solidFill>
                   <a:srgbClr val="111827"/>
                 </a:solidFill>
-                <a:latin typeface="Microsoft YaHei UI"/>
-                <a:ea typeface="Microsoft YaHei UI"/>
-                <a:cs typeface="Microsoft YaHei UI"/>
+                <a:latin typeface="Aptos Display"/>
+                <a:ea typeface="Aptos Display"/>
+                <a:cs typeface="Aptos Display"/>
               </a:defRPr>
             </a:pPr>
             <a:r>
@@ -10165,11 +10165,11 @@
                 <a:solidFill>
                   <a:srgbClr val="111827"/>
                 </a:solidFill>
-                <a:latin typeface="Microsoft YaHei UI"/>
-                <a:ea typeface="Microsoft YaHei UI"/>
-                <a:cs typeface="Microsoft YaHei UI"/>
-              </a:rPr>
-              <a:t>Forward Pass 汇总</a:t>
+                <a:latin typeface="Aptos Display"/>
+                <a:ea typeface="Aptos Display"/>
+                <a:cs typeface="Aptos Display"/>
+              </a:rPr>
+              <a:t>Forward Pass Summary</a:t>
             </a:r>
           </a:p>
         </p:txBody>
@@ -10179,7 +10179,7 @@
           <p:cNvPr id="5" name="">
             <a:extLst xmlns:a="http://schemas.openxmlformats.org/drawingml/2006/main">
               <a:ext uri="{FF2B5EF4-FFF2-40B4-BE49-F238E27FC236}">
-                <a16:creationId xmlns:a16="http://schemas.microsoft.com/office/drawing/2014/main" id="{96627255-B278-4156-BF5D-6EF3E0A5E43D}"/>
+                <a16:creationId xmlns:a16="http://schemas.microsoft.com/office/drawing/2014/main" id="{1DC8D0D1-3300-4E2B-A050-BD2A7ACDF7B0}"/>
               </a:ext>
             </a:extLst>
           </p:cNvPr>
@@ -10212,7 +10212,7 @@
           <p:cNvPr id="6" name="">
             <a:extLst xmlns:a="http://schemas.openxmlformats.org/drawingml/2006/main">
               <a:ext uri="{FF2B5EF4-FFF2-40B4-BE49-F238E27FC236}">
-                <a16:creationId xmlns:a16="http://schemas.microsoft.com/office/drawing/2014/main" id="{F4EB90B9-9E65-452C-A054-5FB27BB9A4E0}"/>
+                <a16:creationId xmlns:a16="http://schemas.microsoft.com/office/drawing/2014/main" id="{40CDEB22-67D1-47D3-A433-41D1C5246BCA}"/>
               </a:ext>
             </a:extLst>
           </p:cNvPr>
@@ -10250,9 +10250,9 @@
                 <a:solidFill>
                   <a:srgbClr val="111827"/>
                 </a:solidFill>
-                <a:latin typeface="Microsoft YaHei"/>
-                <a:ea typeface="Microsoft YaHei"/>
-                <a:cs typeface="Microsoft YaHei"/>
+                <a:latin typeface="Aptos"/>
+                <a:ea typeface="Aptos"/>
+                <a:cs typeface="Aptos"/>
               </a:defRPr>
             </a:pPr>
             <a:r>
@@ -10260,9 +10260,9 @@
                 <a:solidFill>
                   <a:srgbClr val="111827"/>
                 </a:solidFill>
-                <a:latin typeface="Microsoft YaHei"/>
-                <a:ea typeface="Microsoft YaHei"/>
-                <a:cs typeface="Microsoft YaHei"/>
+                <a:latin typeface="Aptos"/>
+                <a:ea typeface="Aptos"/>
+                <a:cs typeface="Aptos"/>
               </a:rPr>
               <a:t>shape check</a:t>
             </a:r>
@@ -10273,9 +10273,9 @@
                 <a:solidFill>
                   <a:srgbClr val="111827"/>
                 </a:solidFill>
-                <a:latin typeface="Microsoft YaHei"/>
-                <a:ea typeface="Microsoft YaHei"/>
-                <a:cs typeface="Microsoft YaHei"/>
+                <a:latin typeface="Aptos"/>
+                <a:ea typeface="Aptos"/>
+                <a:cs typeface="Aptos"/>
               </a:defRPr>
             </a:pPr>
             <a:r>
@@ -10283,9 +10283,9 @@
                 <a:solidFill>
                   <a:srgbClr val="111827"/>
                 </a:solidFill>
-                <a:latin typeface="Microsoft YaHei"/>
-                <a:ea typeface="Microsoft YaHei"/>
-                <a:cs typeface="Microsoft YaHei"/>
+                <a:latin typeface="Aptos"/>
+                <a:ea typeface="Aptos"/>
+                <a:cs typeface="Aptos"/>
               </a:rPr>
               <a:t>x.ndim == 4</a:t>
             </a:r>
@@ -10297,7 +10297,7 @@
           <p:cNvPr id="7" name="">
             <a:extLst xmlns:a="http://schemas.openxmlformats.org/drawingml/2006/main">
               <a:ext uri="{FF2B5EF4-FFF2-40B4-BE49-F238E27FC236}">
-                <a16:creationId xmlns:a16="http://schemas.microsoft.com/office/drawing/2014/main" id="{4D9B97D4-4731-4FF4-994D-0B60C3059DBD}"/>
+                <a16:creationId xmlns:a16="http://schemas.microsoft.com/office/drawing/2014/main" id="{042AE240-BB4C-4EAB-ABE6-D726F54D4EEF}"/>
               </a:ext>
             </a:extLst>
           </p:cNvPr>
@@ -10330,7 +10330,7 @@
           <p:cNvPr id="8" name="">
             <a:extLst xmlns:a="http://schemas.openxmlformats.org/drawingml/2006/main">
               <a:ext uri="{FF2B5EF4-FFF2-40B4-BE49-F238E27FC236}">
-                <a16:creationId xmlns:a16="http://schemas.microsoft.com/office/drawing/2014/main" id="{F3CE2210-BCBE-4485-9C39-39E588BEFC79}"/>
+                <a16:creationId xmlns:a16="http://schemas.microsoft.com/office/drawing/2014/main" id="{FFC13E00-A43F-45A4-8613-7AFEDC83C657}"/>
               </a:ext>
             </a:extLst>
           </p:cNvPr>
@@ -10368,9 +10368,9 @@
                 <a:solidFill>
                   <a:srgbClr val="111827"/>
                 </a:solidFill>
-                <a:latin typeface="Microsoft YaHei"/>
-                <a:ea typeface="Microsoft YaHei"/>
-                <a:cs typeface="Microsoft YaHei"/>
+                <a:latin typeface="Aptos"/>
+                <a:ea typeface="Aptos"/>
+                <a:cs typeface="Aptos"/>
               </a:defRPr>
             </a:pPr>
             <a:r>
@@ -10378,9 +10378,9 @@
                 <a:solidFill>
                   <a:srgbClr val="111827"/>
                 </a:solidFill>
-                <a:latin typeface="Microsoft YaHei"/>
-                <a:ea typeface="Microsoft YaHei"/>
-                <a:cs typeface="Microsoft YaHei"/>
+                <a:latin typeface="Aptos"/>
+                <a:ea typeface="Aptos"/>
+                <a:cs typeface="Aptos"/>
               </a:rPr>
               <a:t>encode</a:t>
             </a:r>
@@ -10391,9 +10391,9 @@
                 <a:solidFill>
                   <a:srgbClr val="111827"/>
                 </a:solidFill>
-                <a:latin typeface="Microsoft YaHei"/>
-                <a:ea typeface="Microsoft YaHei"/>
-                <a:cs typeface="Microsoft YaHei"/>
+                <a:latin typeface="Aptos"/>
+                <a:ea typeface="Aptos"/>
+                <a:cs typeface="Aptos"/>
               </a:defRPr>
             </a:pPr>
             <a:r>
@@ -10401,9 +10401,9 @@
                 <a:solidFill>
                   <a:srgbClr val="111827"/>
                 </a:solidFill>
-                <a:latin typeface="Microsoft YaHei"/>
-                <a:ea typeface="Microsoft YaHei"/>
-                <a:cs typeface="Microsoft YaHei"/>
+                <a:latin typeface="Aptos"/>
+                <a:ea typeface="Aptos"/>
+                <a:cs typeface="Aptos"/>
               </a:rPr>
               <a:t>stem -&gt; stage1 -&gt; down1 -&gt; stage2 -&gt; down2 -&gt; bottleneck</a:t>
             </a:r>
@@ -10415,7 +10415,7 @@
           <p:cNvPr id="9" name="">
             <a:extLst xmlns:a="http://schemas.openxmlformats.org/drawingml/2006/main">
               <a:ext uri="{FF2B5EF4-FFF2-40B4-BE49-F238E27FC236}">
-                <a16:creationId xmlns:a16="http://schemas.microsoft.com/office/drawing/2014/main" id="{9E26A242-D223-4D61-B9E1-41B2A6D37FF6}"/>
+                <a16:creationId xmlns:a16="http://schemas.microsoft.com/office/drawing/2014/main" id="{B7365726-9C0B-46B0-8F30-FF5F3678481C}"/>
               </a:ext>
             </a:extLst>
           </p:cNvPr>
@@ -10448,7 +10448,7 @@
           <p:cNvPr id="10" name="">
             <a:extLst xmlns:a="http://schemas.openxmlformats.org/drawingml/2006/main">
               <a:ext uri="{FF2B5EF4-FFF2-40B4-BE49-F238E27FC236}">
-                <a16:creationId xmlns:a16="http://schemas.microsoft.com/office/drawing/2014/main" id="{0A1D65EB-13F4-4F56-8332-960450E08055}"/>
+                <a16:creationId xmlns:a16="http://schemas.microsoft.com/office/drawing/2014/main" id="{BEAE7F80-2816-4BA4-9041-BEC5C62FA4E8}"/>
               </a:ext>
             </a:extLst>
           </p:cNvPr>
@@ -10486,9 +10486,9 @@
                 <a:solidFill>
                   <a:srgbClr val="111827"/>
                 </a:solidFill>
-                <a:latin typeface="Microsoft YaHei"/>
-                <a:ea typeface="Microsoft YaHei"/>
-                <a:cs typeface="Microsoft YaHei"/>
+                <a:latin typeface="Aptos"/>
+                <a:ea typeface="Aptos"/>
+                <a:cs typeface="Aptos"/>
               </a:defRPr>
             </a:pPr>
             <a:r>
@@ -10496,9 +10496,9 @@
                 <a:solidFill>
                   <a:srgbClr val="111827"/>
                 </a:solidFill>
-                <a:latin typeface="Microsoft YaHei"/>
-                <a:ea typeface="Microsoft YaHei"/>
-                <a:cs typeface="Microsoft YaHei"/>
+                <a:latin typeface="Aptos"/>
+                <a:ea typeface="Aptos"/>
+                <a:cs typeface="Aptos"/>
               </a:rPr>
               <a:t>pooled</a:t>
             </a:r>
@@ -10509,9 +10509,9 @@
                 <a:solidFill>
                   <a:srgbClr val="111827"/>
                 </a:solidFill>
-                <a:latin typeface="Microsoft YaHei"/>
-                <a:ea typeface="Microsoft YaHei"/>
-                <a:cs typeface="Microsoft YaHei"/>
+                <a:latin typeface="Aptos"/>
+                <a:ea typeface="Aptos"/>
+                <a:cs typeface="Aptos"/>
               </a:defRPr>
             </a:pPr>
             <a:r>
@@ -10519,9 +10519,9 @@
                 <a:solidFill>
                   <a:srgbClr val="111827"/>
                 </a:solidFill>
-                <a:latin typeface="Microsoft YaHei"/>
-                <a:ea typeface="Microsoft YaHei"/>
-                <a:cs typeface="Microsoft YaHei"/>
+                <a:latin typeface="Aptos"/>
+                <a:ea typeface="Aptos"/>
+                <a:cs typeface="Aptos"/>
               </a:rPr>
               <a:t>mean over H', T'</a:t>
             </a:r>
@@ -10533,7 +10533,7 @@
           <p:cNvPr id="11" name="">
             <a:extLst xmlns:a="http://schemas.openxmlformats.org/drawingml/2006/main">
               <a:ext uri="{FF2B5EF4-FFF2-40B4-BE49-F238E27FC236}">
-                <a16:creationId xmlns:a16="http://schemas.microsoft.com/office/drawing/2014/main" id="{18EFAC69-C1B2-4C42-B0B0-FA8A1D909377}"/>
+                <a16:creationId xmlns:a16="http://schemas.microsoft.com/office/drawing/2014/main" id="{B34F18F2-ECF7-461C-9C99-898A2CAD6008}"/>
               </a:ext>
             </a:extLst>
           </p:cNvPr>
@@ -10566,7 +10566,7 @@
           <p:cNvPr id="12" name="">
             <a:extLst xmlns:a="http://schemas.openxmlformats.org/drawingml/2006/main">
               <a:ext uri="{FF2B5EF4-FFF2-40B4-BE49-F238E27FC236}">
-                <a16:creationId xmlns:a16="http://schemas.microsoft.com/office/drawing/2014/main" id="{125B2CC4-1161-4AC2-AE38-9F1BA787A9B2}"/>
+                <a16:creationId xmlns:a16="http://schemas.microsoft.com/office/drawing/2014/main" id="{BF675519-6359-4DB5-8761-1FD9DB9EF682}"/>
               </a:ext>
             </a:extLst>
           </p:cNvPr>
@@ -10604,9 +10604,9 @@
                 <a:solidFill>
                   <a:srgbClr val="111827"/>
                 </a:solidFill>
-                <a:latin typeface="Microsoft YaHei"/>
-                <a:ea typeface="Microsoft YaHei"/>
-                <a:cs typeface="Microsoft YaHei"/>
+                <a:latin typeface="Aptos"/>
+                <a:ea typeface="Aptos"/>
+                <a:cs typeface="Aptos"/>
               </a:defRPr>
             </a:pPr>
             <a:r>
@@ -10614,9 +10614,9 @@
                 <a:solidFill>
                   <a:srgbClr val="111827"/>
                 </a:solidFill>
-                <a:latin typeface="Microsoft YaHei"/>
-                <a:ea typeface="Microsoft YaHei"/>
-                <a:cs typeface="Microsoft YaHei"/>
+                <a:latin typeface="Aptos"/>
+                <a:ea typeface="Aptos"/>
+                <a:cs typeface="Aptos"/>
               </a:rPr>
               <a:t>parameter heads</a:t>
             </a:r>
@@ -10627,9 +10627,9 @@
                 <a:solidFill>
                   <a:srgbClr val="111827"/>
                 </a:solidFill>
-                <a:latin typeface="Microsoft YaHei"/>
-                <a:ea typeface="Microsoft YaHei"/>
-                <a:cs typeface="Microsoft YaHei"/>
+                <a:latin typeface="Aptos"/>
+                <a:ea typeface="Aptos"/>
+                <a:cs typeface="Aptos"/>
               </a:defRPr>
             </a:pPr>
             <a:r>
@@ -10637,9 +10637,9 @@
                 <a:solidFill>
                   <a:srgbClr val="111827"/>
                 </a:solidFill>
-                <a:latin typeface="Microsoft YaHei"/>
-                <a:ea typeface="Microsoft YaHei"/>
-                <a:cs typeface="Microsoft YaHei"/>
+                <a:latin typeface="Aptos"/>
+                <a:ea typeface="Aptos"/>
+                <a:cs typeface="Aptos"/>
               </a:rPr>
               <a:t>mu, rho, delta, alpha, path_prob</a:t>
             </a:r>
@@ -10651,7 +10651,7 @@
           <p:cNvPr id="13" name="">
             <a:extLst xmlns:a="http://schemas.openxmlformats.org/drawingml/2006/main">
               <a:ext uri="{FF2B5EF4-FFF2-40B4-BE49-F238E27FC236}">
-                <a16:creationId xmlns:a16="http://schemas.microsoft.com/office/drawing/2014/main" id="{9DEB0941-A5DA-4514-B034-F3AA1FC6A7B7}"/>
+                <a16:creationId xmlns:a16="http://schemas.microsoft.com/office/drawing/2014/main" id="{3EA8EFBE-7870-4C80-B4D0-0449CF3EDEB4}"/>
               </a:ext>
             </a:extLst>
           </p:cNvPr>
@@ -10689,9 +10689,9 @@
                 <a:solidFill>
                   <a:srgbClr val="111827"/>
                 </a:solidFill>
-                <a:latin typeface="Microsoft YaHei"/>
-                <a:ea typeface="Microsoft YaHei"/>
-                <a:cs typeface="Microsoft YaHei"/>
+                <a:latin typeface="Aptos"/>
+                <a:ea typeface="Aptos"/>
+                <a:cs typeface="Aptos"/>
               </a:defRPr>
             </a:pPr>
             <a:r>
@@ -10699,9 +10699,9 @@
                 <a:solidFill>
                   <a:srgbClr val="111827"/>
                 </a:solidFill>
-                <a:latin typeface="Microsoft YaHei"/>
-                <a:ea typeface="Microsoft YaHei"/>
-                <a:cs typeface="Microsoft YaHei"/>
+                <a:latin typeface="Aptos"/>
+                <a:ea typeface="Aptos"/>
+                <a:cs typeface="Aptos"/>
               </a:rPr>
               <a:t>theta dict</a:t>
             </a:r>
@@ -10712,9 +10712,9 @@
                 <a:solidFill>
                   <a:srgbClr val="111827"/>
                 </a:solidFill>
-                <a:latin typeface="Microsoft YaHei"/>
-                <a:ea typeface="Microsoft YaHei"/>
-                <a:cs typeface="Microsoft YaHei"/>
+                <a:latin typeface="Aptos"/>
+                <a:ea typeface="Aptos"/>
+                <a:cs typeface="Aptos"/>
               </a:defRPr>
             </a:pPr>
             <a:r>
@@ -10722,9 +10722,9 @@
                 <a:solidFill>
                   <a:srgbClr val="111827"/>
                 </a:solidFill>
-                <a:latin typeface="Microsoft YaHei"/>
-                <a:ea typeface="Microsoft YaHei"/>
-                <a:cs typeface="Microsoft YaHei"/>
+                <a:latin typeface="Aptos"/>
+                <a:ea typeface="Aptos"/>
+                <a:cs typeface="Aptos"/>
               </a:rPr>
               <a:t>mu0 / rho0 / delta_rx / mu_rel / rho_rel</a:t>
             </a:r>
@@ -10736,7 +10736,7 @@
           <p:cNvPr id="14" name="">
             <a:extLst xmlns:a="http://schemas.openxmlformats.org/drawingml/2006/main">
               <a:ext uri="{FF2B5EF4-FFF2-40B4-BE49-F238E27FC236}">
-                <a16:creationId xmlns:a16="http://schemas.microsoft.com/office/drawing/2014/main" id="{2F0A21D5-7E92-4548-9EE2-3772BABE2FD7}"/>
+                <a16:creationId xmlns:a16="http://schemas.microsoft.com/office/drawing/2014/main" id="{B418DFBA-7521-4628-9FF3-CDAEB23D017E}"/>
               </a:ext>
             </a:extLst>
           </p:cNvPr>
@@ -10774,9 +10774,9 @@
                 <a:solidFill>
                   <a:srgbClr val="111827"/>
                 </a:solidFill>
-                <a:latin typeface="Microsoft YaHei"/>
-                <a:ea typeface="Microsoft YaHei"/>
-                <a:cs typeface="Microsoft YaHei"/>
+                <a:latin typeface="Aptos"/>
+                <a:ea typeface="Aptos"/>
+                <a:cs typeface="Aptos"/>
               </a:defRPr>
             </a:pPr>
             <a:r>
@@ -10784,9 +10784,9 @@
                 <a:solidFill>
                   <a:srgbClr val="111827"/>
                 </a:solidFill>
-                <a:latin typeface="Microsoft YaHei"/>
-                <a:ea typeface="Microsoft YaHei"/>
-                <a:cs typeface="Microsoft YaHei"/>
+                <a:latin typeface="Aptos"/>
+                <a:ea typeface="Aptos"/>
+                <a:cs typeface="Aptos"/>
               </a:rPr>
               <a:t>alpha</a:t>
             </a:r>
@@ -10797,9 +10797,9 @@
                 <a:solidFill>
                   <a:srgbClr val="111827"/>
                 </a:solidFill>
-                <a:latin typeface="Microsoft YaHei"/>
-                <a:ea typeface="Microsoft YaHei"/>
-                <a:cs typeface="Microsoft YaHei"/>
+                <a:latin typeface="Aptos"/>
+                <a:ea typeface="Aptos"/>
+                <a:cs typeface="Aptos"/>
               </a:defRPr>
             </a:pPr>
             <a:r>
@@ -10807,9 +10807,9 @@
                 <a:solidFill>
                   <a:srgbClr val="111827"/>
                 </a:solidFill>
-                <a:latin typeface="Microsoft YaHei"/>
-                <a:ea typeface="Microsoft YaHei"/>
-                <a:cs typeface="Microsoft YaHei"/>
+                <a:latin typeface="Aptos"/>
+                <a:ea typeface="Aptos"/>
+                <a:cs typeface="Aptos"/>
               </a:rPr>
               <a:t>path strengths</a:t>
             </a:r>
@@ -10821,7 +10821,7 @@
           <p:cNvPr id="15" name="">
             <a:extLst xmlns:a="http://schemas.openxmlformats.org/drawingml/2006/main">
               <a:ext uri="{FF2B5EF4-FFF2-40B4-BE49-F238E27FC236}">
-                <a16:creationId xmlns:a16="http://schemas.microsoft.com/office/drawing/2014/main" id="{0726BF13-0C48-4CDB-8978-FDC418EEE44D}"/>
+                <a16:creationId xmlns:a16="http://schemas.microsoft.com/office/drawing/2014/main" id="{080A5229-0046-41A4-AA16-0A52109AECFC}"/>
               </a:ext>
             </a:extLst>
           </p:cNvPr>
@@ -10859,9 +10859,9 @@
                 <a:solidFill>
                   <a:srgbClr val="111827"/>
                 </a:solidFill>
-                <a:latin typeface="Microsoft YaHei"/>
-                <a:ea typeface="Microsoft YaHei"/>
-                <a:cs typeface="Microsoft YaHei"/>
+                <a:latin typeface="Aptos"/>
+                <a:ea typeface="Aptos"/>
+                <a:cs typeface="Aptos"/>
               </a:defRPr>
             </a:pPr>
             <a:r>
@@ -10869,9 +10869,9 @@
                 <a:solidFill>
                   <a:srgbClr val="111827"/>
                 </a:solidFill>
-                <a:latin typeface="Microsoft YaHei"/>
-                <a:ea typeface="Microsoft YaHei"/>
-                <a:cs typeface="Microsoft YaHei"/>
+                <a:latin typeface="Aptos"/>
+                <a:ea typeface="Aptos"/>
+                <a:cs typeface="Aptos"/>
               </a:rPr>
               <a:t>path_prob</a:t>
             </a:r>
@@ -10882,9 +10882,9 @@
                 <a:solidFill>
                   <a:srgbClr val="111827"/>
                 </a:solidFill>
-                <a:latin typeface="Microsoft YaHei"/>
-                <a:ea typeface="Microsoft YaHei"/>
-                <a:cs typeface="Microsoft YaHei"/>
+                <a:latin typeface="Aptos"/>
+                <a:ea typeface="Aptos"/>
+                <a:cs typeface="Aptos"/>
               </a:defRPr>
             </a:pPr>
             <a:r>
@@ -10892,9 +10892,9 @@
                 <a:solidFill>
                   <a:srgbClr val="111827"/>
                 </a:solidFill>
-                <a:latin typeface="Microsoft YaHei"/>
-                <a:ea typeface="Microsoft YaHei"/>
-                <a:cs typeface="Microsoft YaHei"/>
+                <a:latin typeface="Aptos"/>
+                <a:ea typeface="Aptos"/>
+                <a:cs typeface="Aptos"/>
               </a:rPr>
               <a:t>existence scores</a:t>
             </a:r>
@@ -10906,7 +10906,7 @@
           <p:cNvPr id="16" name="">
             <a:extLst xmlns:a="http://schemas.openxmlformats.org/drawingml/2006/main">
               <a:ext uri="{FF2B5EF4-FFF2-40B4-BE49-F238E27FC236}">
-                <a16:creationId xmlns:a16="http://schemas.microsoft.com/office/drawing/2014/main" id="{0CF0EE3E-B4C8-4083-9E58-0EBB54787437}"/>
+                <a16:creationId xmlns:a16="http://schemas.microsoft.com/office/drawing/2014/main" id="{53BCCEE0-6E8A-40A6-96BE-CE183E58F937}"/>
               </a:ext>
             </a:extLst>
           </p:cNvPr>
@@ -10936,7 +10936,7 @@
           <p:cNvPr id="17" name="">
             <a:extLst xmlns:a="http://schemas.openxmlformats.org/drawingml/2006/main">
               <a:ext uri="{FF2B5EF4-FFF2-40B4-BE49-F238E27FC236}">
-                <a16:creationId xmlns:a16="http://schemas.microsoft.com/office/drawing/2014/main" id="{24C8EC11-18CC-43CD-9ADC-46768C72885E}"/>
+                <a16:creationId xmlns:a16="http://schemas.microsoft.com/office/drawing/2014/main" id="{E636D9CC-0E39-4605-802A-8D66B73BEE4A}"/>
               </a:ext>
             </a:extLst>
           </p:cNvPr>
@@ -10966,7 +10966,7 @@
           <p:cNvPr id="18" name="">
             <a:extLst xmlns:a="http://schemas.openxmlformats.org/drawingml/2006/main">
               <a:ext uri="{FF2B5EF4-FFF2-40B4-BE49-F238E27FC236}">
-                <a16:creationId xmlns:a16="http://schemas.microsoft.com/office/drawing/2014/main" id="{66974873-FE3D-406D-80EE-DFAFE4F21357}"/>
+                <a16:creationId xmlns:a16="http://schemas.microsoft.com/office/drawing/2014/main" id="{1EDCEF0C-7919-44B4-9F38-278E717684B1}"/>
               </a:ext>
             </a:extLst>
           </p:cNvPr>
@@ -10996,7 +10996,7 @@
           <p:cNvPr id="19" name="">
             <a:extLst xmlns:a="http://schemas.openxmlformats.org/drawingml/2006/main">
               <a:ext uri="{FF2B5EF4-FFF2-40B4-BE49-F238E27FC236}">
-                <a16:creationId xmlns:a16="http://schemas.microsoft.com/office/drawing/2014/main" id="{87180D78-56DA-47B3-BB9D-83BECAE46BE9}"/>
+                <a16:creationId xmlns:a16="http://schemas.microsoft.com/office/drawing/2014/main" id="{5545361F-3601-4331-9C82-728CD3053421}"/>
               </a:ext>
             </a:extLst>
           </p:cNvPr>
@@ -11036,9 +11036,9 @@
                 <a:solidFill>
                   <a:srgbClr val="5B6472"/>
                 </a:solidFill>
-                <a:latin typeface="Microsoft YaHei"/>
-                <a:ea typeface="Microsoft YaHei"/>
-                <a:cs typeface="Microsoft YaHei"/>
+                <a:latin typeface="Aptos"/>
+                <a:ea typeface="Aptos"/>
+                <a:cs typeface="Aptos"/>
               </a:defRPr>
             </a:pPr>
             <a:r>
@@ -11046,11 +11046,11 @@
                 <a:solidFill>
                   <a:srgbClr val="5B6472"/>
                 </a:solidFill>
-                <a:latin typeface="Microsoft YaHei"/>
-                <a:ea typeface="Microsoft YaHei"/>
-                <a:cs typeface="Microsoft YaHei"/>
-              </a:rPr>
-              <a:t>返回值严格匹配 detr_path_dict 的 modelOutputMode contract；forward 不输出 G_hat。</a:t>
+                <a:latin typeface="Aptos"/>
+                <a:ea typeface="Aptos"/>
+                <a:cs typeface="Aptos"/>
+              </a:rPr>
+              <a:t>The return value matches the detr_path_dict modelOutputMode contract; forward does not output G_hat.</a:t>
             </a:r>
           </a:p>
         </p:txBody>
@@ -11058,7 +11058,7 @@
     </p:spTree>
     <p:extLst>
       <p:ext uri="{BB962C8B-B14F-4D97-AF65-F5344CB8AC3E}">
-        <p14:creationId xmlns:p14="http://schemas.microsoft.com/office/powerpoint/2010/main" val="596488533"/>
+        <p14:creationId xmlns:p14="http://schemas.microsoft.com/office/powerpoint/2010/main" val="137205965"/>
       </p:ext>
     </p:extLst>
   </p:cSld>
@@ -11089,7 +11089,7 @@
           <p:cNvPr id="1" name="">
             <a:extLst xmlns:a="http://schemas.openxmlformats.org/drawingml/2006/main">
               <a:ext uri="{FF2B5EF4-FFF2-40B4-BE49-F238E27FC236}">
-                <a16:creationId xmlns:a16="http://schemas.microsoft.com/office/drawing/2014/main" id="{D7307D2C-9BE5-4C5F-A48E-58118D5468A8}"/>
+                <a16:creationId xmlns:a16="http://schemas.microsoft.com/office/drawing/2014/main" id="{DB53CF6B-74B0-4E30-995D-739B6A28A8E9}"/>
               </a:ext>
             </a:extLst>
           </p:cNvPr>
@@ -11122,7 +11122,7 @@
           <p:cNvPr id="2" name="">
             <a:extLst xmlns:a="http://schemas.openxmlformats.org/drawingml/2006/main">
               <a:ext uri="{FF2B5EF4-FFF2-40B4-BE49-F238E27FC236}">
-                <a16:creationId xmlns:a16="http://schemas.microsoft.com/office/drawing/2014/main" id="{A1B54615-FC14-4B74-A52F-E0E0EADBAA82}"/>
+                <a16:creationId xmlns:a16="http://schemas.microsoft.com/office/drawing/2014/main" id="{DED81459-1898-4353-84E5-EF48437FA4FD}"/>
               </a:ext>
             </a:extLst>
           </p:cNvPr>
@@ -11162,9 +11162,9 @@
                 <a:solidFill>
                   <a:srgbClr val="5B6472"/>
                 </a:solidFill>
-                <a:latin typeface="Microsoft YaHei"/>
-                <a:ea typeface="Microsoft YaHei"/>
-                <a:cs typeface="Microsoft YaHei"/>
+                <a:latin typeface="Aptos"/>
+                <a:ea typeface="Aptos"/>
+                <a:cs typeface="Aptos"/>
               </a:defRPr>
             </a:pPr>
             <a:r>
@@ -11172,9 +11172,9 @@
                 <a:solidFill>
                   <a:srgbClr val="5B6472"/>
                 </a:solidFill>
-                <a:latin typeface="Microsoft YaHei"/>
-                <a:ea typeface="Microsoft YaHei"/>
-                <a:cs typeface="Microsoft YaHei"/>
+                <a:latin typeface="Aptos"/>
+                <a:ea typeface="Aptos"/>
+                <a:cs typeface="Aptos"/>
               </a:rPr>
               <a:t>NAFEncoderLSNet | 08</a:t>
             </a:r>
@@ -11186,7 +11186,7 @@
           <p:cNvPr id="3" name="">
             <a:extLst xmlns:a="http://schemas.openxmlformats.org/drawingml/2006/main">
               <a:ext uri="{FF2B5EF4-FFF2-40B4-BE49-F238E27FC236}">
-                <a16:creationId xmlns:a16="http://schemas.microsoft.com/office/drawing/2014/main" id="{699292B5-7395-43FE-8914-68AC5F50D936}"/>
+                <a16:creationId xmlns:a16="http://schemas.microsoft.com/office/drawing/2014/main" id="{23607194-9829-488A-9A08-5A26EB9A15C9}"/>
               </a:ext>
             </a:extLst>
           </p:cNvPr>
@@ -11226,9 +11226,9 @@
                 <a:solidFill>
                   <a:srgbClr val="5B6472"/>
                 </a:solidFill>
-                <a:latin typeface="Microsoft YaHei"/>
-                <a:ea typeface="Microsoft YaHei"/>
-                <a:cs typeface="Microsoft YaHei"/>
+                <a:latin typeface="Aptos"/>
+                <a:ea typeface="Aptos"/>
+                <a:cs typeface="Aptos"/>
               </a:defRPr>
             </a:pPr>
             <a:r>
@@ -11236,9 +11236,9 @@
                 <a:solidFill>
                   <a:srgbClr val="5B6472"/>
                 </a:solidFill>
-                <a:latin typeface="Microsoft YaHei"/>
-                <a:ea typeface="Microsoft YaHei"/>
-                <a:cs typeface="Microsoft YaHei"/>
+                <a:latin typeface="Aptos"/>
+                <a:ea typeface="Aptos"/>
+                <a:cs typeface="Aptos"/>
               </a:rPr>
               <a:t>Closing view</a:t>
             </a:r>
@@ -11250,7 +11250,7 @@
           <p:cNvPr id="4" name="">
             <a:extLst xmlns:a="http://schemas.openxmlformats.org/drawingml/2006/main">
               <a:ext uri="{FF2B5EF4-FFF2-40B4-BE49-F238E27FC236}">
-                <a16:creationId xmlns:a16="http://schemas.microsoft.com/office/drawing/2014/main" id="{0547E2ED-F795-4627-8F45-4B2921B9900A}"/>
+                <a16:creationId xmlns:a16="http://schemas.microsoft.com/office/drawing/2014/main" id="{7C59AD41-C93E-4210-A89D-3104E45CAEF5}"/>
               </a:ext>
             </a:extLst>
           </p:cNvPr>
@@ -11290,9 +11290,9 @@
                 <a:solidFill>
                   <a:srgbClr val="111827"/>
                 </a:solidFill>
-                <a:latin typeface="Microsoft YaHei UI"/>
-                <a:ea typeface="Microsoft YaHei UI"/>
-                <a:cs typeface="Microsoft YaHei UI"/>
+                <a:latin typeface="Aptos Display"/>
+                <a:ea typeface="Aptos Display"/>
+                <a:cs typeface="Aptos Display"/>
               </a:defRPr>
             </a:pPr>
             <a:r>
@@ -11300,11 +11300,11 @@
                 <a:solidFill>
                   <a:srgbClr val="111827"/>
                 </a:solidFill>
-                <a:latin typeface="Microsoft YaHei UI"/>
-                <a:ea typeface="Microsoft YaHei UI"/>
-                <a:cs typeface="Microsoft YaHei UI"/>
-              </a:rPr>
-              <a:t>输出接口与 LS Recovery</a:t>
+                <a:latin typeface="Aptos Display"/>
+                <a:ea typeface="Aptos Display"/>
+                <a:cs typeface="Aptos Display"/>
+              </a:rPr>
+              <a:t>Output Interface and LS Recovery</a:t>
             </a:r>
           </a:p>
         </p:txBody>
@@ -11314,7 +11314,7 @@
           <p:cNvPr id="5" name="">
             <a:extLst xmlns:a="http://schemas.openxmlformats.org/drawingml/2006/main">
               <a:ext uri="{FF2B5EF4-FFF2-40B4-BE49-F238E27FC236}">
-                <a16:creationId xmlns:a16="http://schemas.microsoft.com/office/drawing/2014/main" id="{A2FCAB6E-04BD-42AA-894D-C72A98EDEFBD}"/>
+                <a16:creationId xmlns:a16="http://schemas.microsoft.com/office/drawing/2014/main" id="{4F0F8158-B264-421D-99EF-1229F2FCC42D}"/>
               </a:ext>
             </a:extLst>
           </p:cNvPr>
@@ -11347,7 +11347,7 @@
           <p:cNvPr id="6" name="">
             <a:extLst xmlns:a="http://schemas.openxmlformats.org/drawingml/2006/main">
               <a:ext uri="{FF2B5EF4-FFF2-40B4-BE49-F238E27FC236}">
-                <a16:creationId xmlns:a16="http://schemas.microsoft.com/office/drawing/2014/main" id="{06167781-2A63-44AE-90CE-D9981D9EFC9F}"/>
+                <a16:creationId xmlns:a16="http://schemas.microsoft.com/office/drawing/2014/main" id="{E490EFB1-1476-4CDA-8A74-FE61984121B4}"/>
               </a:ext>
             </a:extLst>
           </p:cNvPr>
@@ -11380,7 +11380,7 @@
           <p:cNvPr id="7" name="">
             <a:extLst xmlns:a="http://schemas.openxmlformats.org/drawingml/2006/main">
               <a:ext uri="{FF2B5EF4-FFF2-40B4-BE49-F238E27FC236}">
-                <a16:creationId xmlns:a16="http://schemas.microsoft.com/office/drawing/2014/main" id="{5A224413-78B2-4203-A6EC-749C2BD225FF}"/>
+                <a16:creationId xmlns:a16="http://schemas.microsoft.com/office/drawing/2014/main" id="{3437F43C-254F-4D8F-89DA-A3062149F221}"/>
               </a:ext>
             </a:extLst>
           </p:cNvPr>
@@ -11420,9 +11420,9 @@
                 <a:solidFill>
                   <a:srgbClr val="111827"/>
                 </a:solidFill>
-                <a:latin typeface="Microsoft YaHei"/>
-                <a:ea typeface="Microsoft YaHei"/>
-                <a:cs typeface="Microsoft YaHei"/>
+                <a:latin typeface="Aptos"/>
+                <a:ea typeface="Aptos"/>
+                <a:cs typeface="Aptos"/>
               </a:defRPr>
             </a:pPr>
             <a:r>
@@ -11430,9 +11430,9 @@
                 <a:solidFill>
                   <a:srgbClr val="111827"/>
                 </a:solidFill>
-                <a:latin typeface="Microsoft YaHei"/>
-                <a:ea typeface="Microsoft YaHei"/>
-                <a:cs typeface="Microsoft YaHei"/>
+                <a:latin typeface="Aptos"/>
+                <a:ea typeface="Aptos"/>
+                <a:cs typeface="Aptos"/>
               </a:rPr>
               <a:t>Field</a:t>
             </a:r>
@@ -11444,7 +11444,7 @@
           <p:cNvPr id="8" name="">
             <a:extLst xmlns:a="http://schemas.openxmlformats.org/drawingml/2006/main">
               <a:ext uri="{FF2B5EF4-FFF2-40B4-BE49-F238E27FC236}">
-                <a16:creationId xmlns:a16="http://schemas.microsoft.com/office/drawing/2014/main" id="{408E85BF-C7C2-4682-88D3-A905C19F24BD}"/>
+                <a16:creationId xmlns:a16="http://schemas.microsoft.com/office/drawing/2014/main" id="{DD04E4F1-C455-416A-B688-C3FF303E588B}"/>
               </a:ext>
             </a:extLst>
           </p:cNvPr>
@@ -11477,7 +11477,7 @@
           <p:cNvPr id="9" name="">
             <a:extLst xmlns:a="http://schemas.openxmlformats.org/drawingml/2006/main">
               <a:ext uri="{FF2B5EF4-FFF2-40B4-BE49-F238E27FC236}">
-                <a16:creationId xmlns:a16="http://schemas.microsoft.com/office/drawing/2014/main" id="{4457F67C-A49A-4F09-B57A-C94D36866131}"/>
+                <a16:creationId xmlns:a16="http://schemas.microsoft.com/office/drawing/2014/main" id="{A701D9F2-30A7-4472-813B-D49E56680546}"/>
               </a:ext>
             </a:extLst>
           </p:cNvPr>
@@ -11517,9 +11517,9 @@
                 <a:solidFill>
                   <a:srgbClr val="111827"/>
                 </a:solidFill>
-                <a:latin typeface="Microsoft YaHei"/>
-                <a:ea typeface="Microsoft YaHei"/>
-                <a:cs typeface="Microsoft YaHei"/>
+                <a:latin typeface="Aptos"/>
+                <a:ea typeface="Aptos"/>
+                <a:cs typeface="Aptos"/>
               </a:defRPr>
             </a:pPr>
             <a:r>
@@ -11527,9 +11527,9 @@
                 <a:solidFill>
                   <a:srgbClr val="111827"/>
                 </a:solidFill>
-                <a:latin typeface="Microsoft YaHei"/>
-                <a:ea typeface="Microsoft YaHei"/>
-                <a:cs typeface="Microsoft YaHei"/>
+                <a:latin typeface="Aptos"/>
+                <a:ea typeface="Aptos"/>
+                <a:cs typeface="Aptos"/>
               </a:rPr>
               <a:t>Shape</a:t>
             </a:r>
@@ -11541,7 +11541,7 @@
           <p:cNvPr id="10" name="">
             <a:extLst xmlns:a="http://schemas.openxmlformats.org/drawingml/2006/main">
               <a:ext uri="{FF2B5EF4-FFF2-40B4-BE49-F238E27FC236}">
-                <a16:creationId xmlns:a16="http://schemas.microsoft.com/office/drawing/2014/main" id="{0A54870C-9D1F-409C-947C-F0CD84922FFE}"/>
+                <a16:creationId xmlns:a16="http://schemas.microsoft.com/office/drawing/2014/main" id="{0485676F-BA7C-4C9F-B2AF-1D7F3B73A944}"/>
               </a:ext>
             </a:extLst>
           </p:cNvPr>
@@ -11574,7 +11574,7 @@
           <p:cNvPr id="11" name="">
             <a:extLst xmlns:a="http://schemas.openxmlformats.org/drawingml/2006/main">
               <a:ext uri="{FF2B5EF4-FFF2-40B4-BE49-F238E27FC236}">
-                <a16:creationId xmlns:a16="http://schemas.microsoft.com/office/drawing/2014/main" id="{029C8363-80B8-418E-937A-4FE24D161673}"/>
+                <a16:creationId xmlns:a16="http://schemas.microsoft.com/office/drawing/2014/main" id="{7AE8B375-1D41-4CEC-802A-2A557655060A}"/>
               </a:ext>
             </a:extLst>
           </p:cNvPr>
@@ -11614,9 +11614,9 @@
                 <a:solidFill>
                   <a:srgbClr val="111827"/>
                 </a:solidFill>
-                <a:latin typeface="Microsoft YaHei"/>
-                <a:ea typeface="Microsoft YaHei"/>
-                <a:cs typeface="Microsoft YaHei"/>
+                <a:latin typeface="Aptos"/>
+                <a:ea typeface="Aptos"/>
+                <a:cs typeface="Aptos"/>
               </a:defRPr>
             </a:pPr>
             <a:r>
@@ -11624,9 +11624,9 @@
                 <a:solidFill>
                   <a:srgbClr val="111827"/>
                 </a:solidFill>
-                <a:latin typeface="Microsoft YaHei"/>
-                <a:ea typeface="Microsoft YaHei"/>
-                <a:cs typeface="Microsoft YaHei"/>
+                <a:latin typeface="Aptos"/>
+                <a:ea typeface="Aptos"/>
+                <a:cs typeface="Aptos"/>
               </a:rPr>
               <a:t>Meaning</a:t>
             </a:r>
@@ -11638,7 +11638,7 @@
           <p:cNvPr id="12" name="">
             <a:extLst xmlns:a="http://schemas.openxmlformats.org/drawingml/2006/main">
               <a:ext uri="{FF2B5EF4-FFF2-40B4-BE49-F238E27FC236}">
-                <a16:creationId xmlns:a16="http://schemas.microsoft.com/office/drawing/2014/main" id="{AC3F6CF7-2A2F-4527-AE2C-BDCF54239465}"/>
+                <a16:creationId xmlns:a16="http://schemas.microsoft.com/office/drawing/2014/main" id="{2A0265DE-E240-470B-BF7F-7F3BB204E5BB}"/>
               </a:ext>
             </a:extLst>
           </p:cNvPr>
@@ -11671,7 +11671,7 @@
           <p:cNvPr id="13" name="">
             <a:extLst xmlns:a="http://schemas.openxmlformats.org/drawingml/2006/main">
               <a:ext uri="{FF2B5EF4-FFF2-40B4-BE49-F238E27FC236}">
-                <a16:creationId xmlns:a16="http://schemas.microsoft.com/office/drawing/2014/main" id="{21831637-E5DA-44CD-8044-17189EDC7D25}"/>
+                <a16:creationId xmlns:a16="http://schemas.microsoft.com/office/drawing/2014/main" id="{CB9333F6-9892-4773-86EF-1C6F342359FA}"/>
               </a:ext>
             </a:extLst>
           </p:cNvPr>
@@ -11735,7 +11735,7 @@
           <p:cNvPr id="14" name="">
             <a:extLst xmlns:a="http://schemas.openxmlformats.org/drawingml/2006/main">
               <a:ext uri="{FF2B5EF4-FFF2-40B4-BE49-F238E27FC236}">
-                <a16:creationId xmlns:a16="http://schemas.microsoft.com/office/drawing/2014/main" id="{0152FF8C-57E6-40DF-BECA-A3C99500BF36}"/>
+                <a16:creationId xmlns:a16="http://schemas.microsoft.com/office/drawing/2014/main" id="{3D2DDEFB-240E-4C56-A534-455112F04D19}"/>
               </a:ext>
             </a:extLst>
           </p:cNvPr>
@@ -11768,7 +11768,7 @@
           <p:cNvPr id="15" name="">
             <a:extLst xmlns:a="http://schemas.openxmlformats.org/drawingml/2006/main">
               <a:ext uri="{FF2B5EF4-FFF2-40B4-BE49-F238E27FC236}">
-                <a16:creationId xmlns:a16="http://schemas.microsoft.com/office/drawing/2014/main" id="{042DEB16-A778-45B4-8969-0E14C6CFC76D}"/>
+                <a16:creationId xmlns:a16="http://schemas.microsoft.com/office/drawing/2014/main" id="{A875A617-1ECD-43B3-8A5F-4DCE0A933BA0}"/>
               </a:ext>
             </a:extLst>
           </p:cNvPr>
@@ -11808,9 +11808,9 @@
                 <a:solidFill>
                   <a:srgbClr val="5B6472"/>
                 </a:solidFill>
-                <a:latin typeface="Microsoft YaHei"/>
-                <a:ea typeface="Microsoft YaHei"/>
-                <a:cs typeface="Microsoft YaHei"/>
+                <a:latin typeface="Aptos"/>
+                <a:ea typeface="Aptos"/>
+                <a:cs typeface="Aptos"/>
               </a:defRPr>
             </a:pPr>
             <a:r>
@@ -11818,9 +11818,9 @@
                 <a:solidFill>
                   <a:srgbClr val="5B6472"/>
                 </a:solidFill>
-                <a:latin typeface="Microsoft YaHei"/>
-                <a:ea typeface="Microsoft YaHei"/>
-                <a:cs typeface="Microsoft YaHei"/>
+                <a:latin typeface="Aptos"/>
+                <a:ea typeface="Aptos"/>
+                <a:cs typeface="Aptos"/>
               </a:rPr>
               <a:t>B x 1</a:t>
             </a:r>
@@ -11832,7 +11832,7 @@
           <p:cNvPr id="16" name="">
             <a:extLst xmlns:a="http://schemas.openxmlformats.org/drawingml/2006/main">
               <a:ext uri="{FF2B5EF4-FFF2-40B4-BE49-F238E27FC236}">
-                <a16:creationId xmlns:a16="http://schemas.microsoft.com/office/drawing/2014/main" id="{D72B1A6C-D017-4CC6-9A15-6FA19F1E6B60}"/>
+                <a16:creationId xmlns:a16="http://schemas.microsoft.com/office/drawing/2014/main" id="{4112E325-371E-4393-94B9-2AD3E8ABCF10}"/>
               </a:ext>
             </a:extLst>
           </p:cNvPr>
@@ -11865,7 +11865,7 @@
           <p:cNvPr id="17" name="">
             <a:extLst xmlns:a="http://schemas.openxmlformats.org/drawingml/2006/main">
               <a:ext uri="{FF2B5EF4-FFF2-40B4-BE49-F238E27FC236}">
-                <a16:creationId xmlns:a16="http://schemas.microsoft.com/office/drawing/2014/main" id="{BA35D828-ADBE-48BC-A09C-7FA31458C4E5}"/>
+                <a16:creationId xmlns:a16="http://schemas.microsoft.com/office/drawing/2014/main" id="{93FDDA58-516E-475C-8EB5-9D1D8DB2E918}"/>
               </a:ext>
             </a:extLst>
           </p:cNvPr>
@@ -11905,9 +11905,9 @@
                 <a:solidFill>
                   <a:srgbClr val="5B6472"/>
                 </a:solidFill>
-                <a:latin typeface="Microsoft YaHei"/>
-                <a:ea typeface="Microsoft YaHei"/>
-                <a:cs typeface="Microsoft YaHei"/>
+                <a:latin typeface="Aptos"/>
+                <a:ea typeface="Aptos"/>
+                <a:cs typeface="Aptos"/>
               </a:defRPr>
             </a:pPr>
             <a:r>
@@ -11915,11 +11915,11 @@
                 <a:solidFill>
                   <a:srgbClr val="5B6472"/>
                 </a:solidFill>
-                <a:latin typeface="Microsoft YaHei"/>
-                <a:ea typeface="Microsoft YaHei"/>
-                <a:cs typeface="Microsoft YaHei"/>
-              </a:rPr>
-              <a:t>mu 的参考项</a:t>
+                <a:latin typeface="Aptos"/>
+                <a:ea typeface="Aptos"/>
+                <a:cs typeface="Aptos"/>
+              </a:rPr>
+              <a:t>Reference term for mu</a:t>
             </a:r>
           </a:p>
         </p:txBody>
@@ -11929,7 +11929,7 @@
           <p:cNvPr id="18" name="">
             <a:extLst xmlns:a="http://schemas.openxmlformats.org/drawingml/2006/main">
               <a:ext uri="{FF2B5EF4-FFF2-40B4-BE49-F238E27FC236}">
-                <a16:creationId xmlns:a16="http://schemas.microsoft.com/office/drawing/2014/main" id="{5EEABD8C-3C35-47E6-A6F9-A704D482E77B}"/>
+                <a16:creationId xmlns:a16="http://schemas.microsoft.com/office/drawing/2014/main" id="{3AFAE93F-C4D3-4EAD-860B-053C86AC5BE7}"/>
               </a:ext>
             </a:extLst>
           </p:cNvPr>
@@ -11962,7 +11962,7 @@
           <p:cNvPr id="19" name="">
             <a:extLst xmlns:a="http://schemas.openxmlformats.org/drawingml/2006/main">
               <a:ext uri="{FF2B5EF4-FFF2-40B4-BE49-F238E27FC236}">
-                <a16:creationId xmlns:a16="http://schemas.microsoft.com/office/drawing/2014/main" id="{CFBCBA9D-1492-4F15-859F-AAD06A019C39}"/>
+                <a16:creationId xmlns:a16="http://schemas.microsoft.com/office/drawing/2014/main" id="{2BDAB6FA-2671-4AE2-BA67-63DA90323F80}"/>
               </a:ext>
             </a:extLst>
           </p:cNvPr>
@@ -12026,7 +12026,7 @@
           <p:cNvPr id="20" name="">
             <a:extLst xmlns:a="http://schemas.openxmlformats.org/drawingml/2006/main">
               <a:ext uri="{FF2B5EF4-FFF2-40B4-BE49-F238E27FC236}">
-                <a16:creationId xmlns:a16="http://schemas.microsoft.com/office/drawing/2014/main" id="{4B1EAC07-AE8B-42EF-984B-0B3661507985}"/>
+                <a16:creationId xmlns:a16="http://schemas.microsoft.com/office/drawing/2014/main" id="{92C9EAFD-333F-430D-A868-781941738066}"/>
               </a:ext>
             </a:extLst>
           </p:cNvPr>
@@ -12059,7 +12059,7 @@
           <p:cNvPr id="21" name="">
             <a:extLst xmlns:a="http://schemas.openxmlformats.org/drawingml/2006/main">
               <a:ext uri="{FF2B5EF4-FFF2-40B4-BE49-F238E27FC236}">
-                <a16:creationId xmlns:a16="http://schemas.microsoft.com/office/drawing/2014/main" id="{A368101C-C47C-4D6F-904F-3AA4CB071F8C}"/>
+                <a16:creationId xmlns:a16="http://schemas.microsoft.com/office/drawing/2014/main" id="{1E92BE74-D973-4082-BF38-3E33E2E9B4AD}"/>
               </a:ext>
             </a:extLst>
           </p:cNvPr>
@@ -12099,9 +12099,9 @@
                 <a:solidFill>
                   <a:srgbClr val="5B6472"/>
                 </a:solidFill>
-                <a:latin typeface="Microsoft YaHei"/>
-                <a:ea typeface="Microsoft YaHei"/>
-                <a:cs typeface="Microsoft YaHei"/>
+                <a:latin typeface="Aptos"/>
+                <a:ea typeface="Aptos"/>
+                <a:cs typeface="Aptos"/>
               </a:defRPr>
             </a:pPr>
             <a:r>
@@ -12109,9 +12109,9 @@
                 <a:solidFill>
                   <a:srgbClr val="5B6472"/>
                 </a:solidFill>
-                <a:latin typeface="Microsoft YaHei"/>
-                <a:ea typeface="Microsoft YaHei"/>
-                <a:cs typeface="Microsoft YaHei"/>
+                <a:latin typeface="Aptos"/>
+                <a:ea typeface="Aptos"/>
+                <a:cs typeface="Aptos"/>
               </a:rPr>
               <a:t>B x 1</a:t>
             </a:r>
@@ -12123,7 +12123,7 @@
           <p:cNvPr id="22" name="">
             <a:extLst xmlns:a="http://schemas.openxmlformats.org/drawingml/2006/main">
               <a:ext uri="{FF2B5EF4-FFF2-40B4-BE49-F238E27FC236}">
-                <a16:creationId xmlns:a16="http://schemas.microsoft.com/office/drawing/2014/main" id="{A9A96A4B-E59F-4E96-A0D6-7D22717C547F}"/>
+                <a16:creationId xmlns:a16="http://schemas.microsoft.com/office/drawing/2014/main" id="{9AA477B9-2916-488A-AF94-108A39D471E0}"/>
               </a:ext>
             </a:extLst>
           </p:cNvPr>
@@ -12156,7 +12156,7 @@
           <p:cNvPr id="23" name="">
             <a:extLst xmlns:a="http://schemas.openxmlformats.org/drawingml/2006/main">
               <a:ext uri="{FF2B5EF4-FFF2-40B4-BE49-F238E27FC236}">
-                <a16:creationId xmlns:a16="http://schemas.microsoft.com/office/drawing/2014/main" id="{690103F2-378E-4594-8C08-77C60BB590B6}"/>
+                <a16:creationId xmlns:a16="http://schemas.microsoft.com/office/drawing/2014/main" id="{537AE56F-5CA2-4F7F-85C5-9E55BA1FDD93}"/>
               </a:ext>
             </a:extLst>
           </p:cNvPr>
@@ -12196,9 +12196,9 @@
                 <a:solidFill>
                   <a:srgbClr val="5B6472"/>
                 </a:solidFill>
-                <a:latin typeface="Microsoft YaHei"/>
-                <a:ea typeface="Microsoft YaHei"/>
-                <a:cs typeface="Microsoft YaHei"/>
+                <a:latin typeface="Aptos"/>
+                <a:ea typeface="Aptos"/>
+                <a:cs typeface="Aptos"/>
               </a:defRPr>
             </a:pPr>
             <a:r>
@@ -12206,11 +12206,11 @@
                 <a:solidFill>
                   <a:srgbClr val="5B6472"/>
                 </a:solidFill>
-                <a:latin typeface="Microsoft YaHei"/>
-                <a:ea typeface="Microsoft YaHei"/>
-                <a:cs typeface="Microsoft YaHei"/>
-              </a:rPr>
-              <a:t>rho 的参考项</a:t>
+                <a:latin typeface="Aptos"/>
+                <a:ea typeface="Aptos"/>
+                <a:cs typeface="Aptos"/>
+              </a:rPr>
+              <a:t>Reference term for rho</a:t>
             </a:r>
           </a:p>
         </p:txBody>
@@ -12220,7 +12220,7 @@
           <p:cNvPr id="24" name="">
             <a:extLst xmlns:a="http://schemas.openxmlformats.org/drawingml/2006/main">
               <a:ext uri="{FF2B5EF4-FFF2-40B4-BE49-F238E27FC236}">
-                <a16:creationId xmlns:a16="http://schemas.microsoft.com/office/drawing/2014/main" id="{8D740932-2A4C-4BD7-85A6-3579ACEB2F3C}"/>
+                <a16:creationId xmlns:a16="http://schemas.microsoft.com/office/drawing/2014/main" id="{F93AB072-AA78-42FD-AB17-3E02F8477918}"/>
               </a:ext>
             </a:extLst>
           </p:cNvPr>
@@ -12253,7 +12253,7 @@
           <p:cNvPr id="25" name="">
             <a:extLst xmlns:a="http://schemas.openxmlformats.org/drawingml/2006/main">
               <a:ext uri="{FF2B5EF4-FFF2-40B4-BE49-F238E27FC236}">
-                <a16:creationId xmlns:a16="http://schemas.microsoft.com/office/drawing/2014/main" id="{9B4C9921-DE85-4A56-A774-C17A1600A352}"/>
+                <a16:creationId xmlns:a16="http://schemas.microsoft.com/office/drawing/2014/main" id="{F3908A58-A8E2-4DE3-A193-7E2EBD26012D}"/>
               </a:ext>
             </a:extLst>
           </p:cNvPr>
@@ -12317,7 +12317,7 @@
           <p:cNvPr id="26" name="">
             <a:extLst xmlns:a="http://schemas.openxmlformats.org/drawingml/2006/main">
               <a:ext uri="{FF2B5EF4-FFF2-40B4-BE49-F238E27FC236}">
-                <a16:creationId xmlns:a16="http://schemas.microsoft.com/office/drawing/2014/main" id="{3428BE87-B959-456F-8EA2-7BA54A31942A}"/>
+                <a16:creationId xmlns:a16="http://schemas.microsoft.com/office/drawing/2014/main" id="{A32D1606-C7E6-44B4-8081-34FBDAD15F7F}"/>
               </a:ext>
             </a:extLst>
           </p:cNvPr>
@@ -12350,7 +12350,7 @@
           <p:cNvPr id="27" name="">
             <a:extLst xmlns:a="http://schemas.openxmlformats.org/drawingml/2006/main">
               <a:ext uri="{FF2B5EF4-FFF2-40B4-BE49-F238E27FC236}">
-                <a16:creationId xmlns:a16="http://schemas.microsoft.com/office/drawing/2014/main" id="{BAFB0EDC-A179-47B8-8EF5-4F4FEA4A6B02}"/>
+                <a16:creationId xmlns:a16="http://schemas.microsoft.com/office/drawing/2014/main" id="{D9D20447-99B1-4B0A-80A7-880B6E6A0729}"/>
               </a:ext>
             </a:extLst>
           </p:cNvPr>
@@ -12390,9 +12390,9 @@
                 <a:solidFill>
                   <a:srgbClr val="5B6472"/>
                 </a:solidFill>
-                <a:latin typeface="Microsoft YaHei"/>
-                <a:ea typeface="Microsoft YaHei"/>
-                <a:cs typeface="Microsoft YaHei"/>
+                <a:latin typeface="Aptos"/>
+                <a:ea typeface="Aptos"/>
+                <a:cs typeface="Aptos"/>
               </a:defRPr>
             </a:pPr>
             <a:r>
@@ -12400,9 +12400,9 @@
                 <a:solidFill>
                   <a:srgbClr val="5B6472"/>
                 </a:solidFill>
-                <a:latin typeface="Microsoft YaHei"/>
-                <a:ea typeface="Microsoft YaHei"/>
-                <a:cs typeface="Microsoft YaHei"/>
+                <a:latin typeface="Aptos"/>
+                <a:ea typeface="Aptos"/>
+                <a:cs typeface="Aptos"/>
               </a:rPr>
               <a:t>B x N_rx</a:t>
             </a:r>
@@ -12414,7 +12414,7 @@
           <p:cNvPr id="28" name="">
             <a:extLst xmlns:a="http://schemas.openxmlformats.org/drawingml/2006/main">
               <a:ext uri="{FF2B5EF4-FFF2-40B4-BE49-F238E27FC236}">
-                <a16:creationId xmlns:a16="http://schemas.microsoft.com/office/drawing/2014/main" id="{6D7228B6-300C-4544-A56B-387BCC17ED93}"/>
+                <a16:creationId xmlns:a16="http://schemas.microsoft.com/office/drawing/2014/main" id="{A2F2F788-70B4-4CC6-BED8-D472336AB426}"/>
               </a:ext>
             </a:extLst>
           </p:cNvPr>
@@ -12447,7 +12447,7 @@
           <p:cNvPr id="29" name="">
             <a:extLst xmlns:a="http://schemas.openxmlformats.org/drawingml/2006/main">
               <a:ext uri="{FF2B5EF4-FFF2-40B4-BE49-F238E27FC236}">
-                <a16:creationId xmlns:a16="http://schemas.microsoft.com/office/drawing/2014/main" id="{DFB9F944-1799-4B56-9D13-FE076049F8B3}"/>
+                <a16:creationId xmlns:a16="http://schemas.microsoft.com/office/drawing/2014/main" id="{401CF466-4043-4D50-A701-290BC5729CD1}"/>
               </a:ext>
             </a:extLst>
           </p:cNvPr>
@@ -12487,9 +12487,9 @@
                 <a:solidFill>
                   <a:srgbClr val="5B6472"/>
                 </a:solidFill>
-                <a:latin typeface="Microsoft YaHei"/>
-                <a:ea typeface="Microsoft YaHei"/>
-                <a:cs typeface="Microsoft YaHei"/>
+                <a:latin typeface="Aptos"/>
+                <a:ea typeface="Aptos"/>
+                <a:cs typeface="Aptos"/>
               </a:defRPr>
             </a:pPr>
             <a:r>
@@ -12497,11 +12497,11 @@
                 <a:solidFill>
                   <a:srgbClr val="5B6472"/>
                 </a:solidFill>
-                <a:latin typeface="Microsoft YaHei"/>
-                <a:ea typeface="Microsoft YaHei"/>
-                <a:cs typeface="Microsoft YaHei"/>
-              </a:rPr>
-              <a:t>接收端相对 offset</a:t>
+                <a:latin typeface="Aptos"/>
+                <a:ea typeface="Aptos"/>
+                <a:cs typeface="Aptos"/>
+              </a:rPr>
+              <a:t>Receiver-side relative offset</a:t>
             </a:r>
           </a:p>
         </p:txBody>
@@ -12511,7 +12511,7 @@
           <p:cNvPr id="30" name="">
             <a:extLst xmlns:a="http://schemas.openxmlformats.org/drawingml/2006/main">
               <a:ext uri="{FF2B5EF4-FFF2-40B4-BE49-F238E27FC236}">
-                <a16:creationId xmlns:a16="http://schemas.microsoft.com/office/drawing/2014/main" id="{01DB4255-408A-4EA0-9FCD-EA8C2FA9A726}"/>
+                <a16:creationId xmlns:a16="http://schemas.microsoft.com/office/drawing/2014/main" id="{55C11186-FFCD-44A6-95D4-4F9AAA5C25CA}"/>
               </a:ext>
             </a:extLst>
           </p:cNvPr>
@@ -12544,7 +12544,7 @@
           <p:cNvPr id="31" name="">
             <a:extLst xmlns:a="http://schemas.openxmlformats.org/drawingml/2006/main">
               <a:ext uri="{FF2B5EF4-FFF2-40B4-BE49-F238E27FC236}">
-                <a16:creationId xmlns:a16="http://schemas.microsoft.com/office/drawing/2014/main" id="{038AD633-69CC-467A-957E-939A2BC7DF4E}"/>
+                <a16:creationId xmlns:a16="http://schemas.microsoft.com/office/drawing/2014/main" id="{2AC96CC7-4E6F-4914-89DD-655548583D0B}"/>
               </a:ext>
             </a:extLst>
           </p:cNvPr>
@@ -12608,7 +12608,7 @@
           <p:cNvPr id="32" name="">
             <a:extLst xmlns:a="http://schemas.openxmlformats.org/drawingml/2006/main">
               <a:ext uri="{FF2B5EF4-FFF2-40B4-BE49-F238E27FC236}">
-                <a16:creationId xmlns:a16="http://schemas.microsoft.com/office/drawing/2014/main" id="{32CAC5E2-059A-4C08-AD83-2D99B9EF2660}"/>
+                <a16:creationId xmlns:a16="http://schemas.microsoft.com/office/drawing/2014/main" id="{D9993FD5-6FF1-4509-ADFF-F5030C3E649A}"/>
               </a:ext>
             </a:extLst>
           </p:cNvPr>
@@ -12641,7 +12641,7 @@
           <p:cNvPr id="33" name="">
             <a:extLst xmlns:a="http://schemas.openxmlformats.org/drawingml/2006/main">
               <a:ext uri="{FF2B5EF4-FFF2-40B4-BE49-F238E27FC236}">
-                <a16:creationId xmlns:a16="http://schemas.microsoft.com/office/drawing/2014/main" id="{3A7CA327-ACE5-409E-8560-CC761649D723}"/>
+                <a16:creationId xmlns:a16="http://schemas.microsoft.com/office/drawing/2014/main" id="{8ECFD914-2F30-409B-972D-3FD277978675}"/>
               </a:ext>
             </a:extLst>
           </p:cNvPr>
@@ -12681,9 +12681,9 @@
                 <a:solidFill>
                   <a:srgbClr val="5B6472"/>
                 </a:solidFill>
-                <a:latin typeface="Microsoft YaHei"/>
-                <a:ea typeface="Microsoft YaHei"/>
-                <a:cs typeface="Microsoft YaHei"/>
+                <a:latin typeface="Aptos"/>
+                <a:ea typeface="Aptos"/>
+                <a:cs typeface="Aptos"/>
               </a:defRPr>
             </a:pPr>
             <a:r>
@@ -12691,9 +12691,9 @@
                 <a:solidFill>
                   <a:srgbClr val="5B6472"/>
                 </a:solidFill>
-                <a:latin typeface="Microsoft YaHei"/>
-                <a:ea typeface="Microsoft YaHei"/>
-                <a:cs typeface="Microsoft YaHei"/>
+                <a:latin typeface="Aptos"/>
+                <a:ea typeface="Aptos"/>
+                <a:cs typeface="Aptos"/>
               </a:rPr>
               <a:t>B x L_eff</a:t>
             </a:r>
@@ -12705,7 +12705,7 @@
           <p:cNvPr id="34" name="">
             <a:extLst xmlns:a="http://schemas.openxmlformats.org/drawingml/2006/main">
               <a:ext uri="{FF2B5EF4-FFF2-40B4-BE49-F238E27FC236}">
-                <a16:creationId xmlns:a16="http://schemas.microsoft.com/office/drawing/2014/main" id="{239F9DAA-2FAD-4940-A223-CD128E14C05C}"/>
+                <a16:creationId xmlns:a16="http://schemas.microsoft.com/office/drawing/2014/main" id="{6275E163-0FB5-44C5-B4AA-2A590D048B56}"/>
               </a:ext>
             </a:extLst>
           </p:cNvPr>
@@ -12738,7 +12738,7 @@
           <p:cNvPr id="35" name="">
             <a:extLst xmlns:a="http://schemas.openxmlformats.org/drawingml/2006/main">
               <a:ext uri="{FF2B5EF4-FFF2-40B4-BE49-F238E27FC236}">
-                <a16:creationId xmlns:a16="http://schemas.microsoft.com/office/drawing/2014/main" id="{14877AEB-C574-4A1F-A2A4-CA75032AE90F}"/>
+                <a16:creationId xmlns:a16="http://schemas.microsoft.com/office/drawing/2014/main" id="{98A811F1-88BA-4889-97B8-97C78694B926}"/>
               </a:ext>
             </a:extLst>
           </p:cNvPr>
@@ -12778,9 +12778,9 @@
                 <a:solidFill>
                   <a:srgbClr val="5B6472"/>
                 </a:solidFill>
-                <a:latin typeface="Microsoft YaHei"/>
-                <a:ea typeface="Microsoft YaHei"/>
-                <a:cs typeface="Microsoft YaHei"/>
+                <a:latin typeface="Aptos"/>
+                <a:ea typeface="Aptos"/>
+                <a:cs typeface="Aptos"/>
               </a:defRPr>
             </a:pPr>
             <a:r>
@@ -12788,11 +12788,11 @@
                 <a:solidFill>
                   <a:srgbClr val="5B6472"/>
                 </a:solidFill>
-                <a:latin typeface="Microsoft YaHei"/>
-                <a:ea typeface="Microsoft YaHei"/>
-                <a:cs typeface="Microsoft YaHei"/>
-              </a:rPr>
-              <a:t>相对 delay slope</a:t>
+                <a:latin typeface="Aptos"/>
+                <a:ea typeface="Aptos"/>
+                <a:cs typeface="Aptos"/>
+              </a:rPr>
+              <a:t>Relative delay slope</a:t>
             </a:r>
           </a:p>
         </p:txBody>
@@ -12802,7 +12802,7 @@
           <p:cNvPr id="36" name="">
             <a:extLst xmlns:a="http://schemas.openxmlformats.org/drawingml/2006/main">
               <a:ext uri="{FF2B5EF4-FFF2-40B4-BE49-F238E27FC236}">
-                <a16:creationId xmlns:a16="http://schemas.microsoft.com/office/drawing/2014/main" id="{E12BE13E-13A9-4830-B603-3234991EE1AE}"/>
+                <a16:creationId xmlns:a16="http://schemas.microsoft.com/office/drawing/2014/main" id="{6045462B-24A5-45B3-961F-6E03583DECF5}"/>
               </a:ext>
             </a:extLst>
           </p:cNvPr>
@@ -12835,7 +12835,7 @@
           <p:cNvPr id="37" name="">
             <a:extLst xmlns:a="http://schemas.openxmlformats.org/drawingml/2006/main">
               <a:ext uri="{FF2B5EF4-FFF2-40B4-BE49-F238E27FC236}">
-                <a16:creationId xmlns:a16="http://schemas.microsoft.com/office/drawing/2014/main" id="{7FB32F82-01C7-4959-8A08-772BEC691234}"/>
+                <a16:creationId xmlns:a16="http://schemas.microsoft.com/office/drawing/2014/main" id="{4E9DB47A-A47E-4B98-9E17-7584F37D1B77}"/>
               </a:ext>
             </a:extLst>
           </p:cNvPr>
@@ -12899,7 +12899,7 @@
           <p:cNvPr id="38" name="">
             <a:extLst xmlns:a="http://schemas.openxmlformats.org/drawingml/2006/main">
               <a:ext uri="{FF2B5EF4-FFF2-40B4-BE49-F238E27FC236}">
-                <a16:creationId xmlns:a16="http://schemas.microsoft.com/office/drawing/2014/main" id="{614C58A7-EA73-45C0-8B34-231CBA70379F}"/>
+                <a16:creationId xmlns:a16="http://schemas.microsoft.com/office/drawing/2014/main" id="{9BC4702E-273E-4BAA-BFB2-ECAE52811B34}"/>
               </a:ext>
             </a:extLst>
           </p:cNvPr>
@@ -12932,7 +12932,7 @@
           <p:cNvPr id="39" name="">
             <a:extLst xmlns:a="http://schemas.openxmlformats.org/drawingml/2006/main">
               <a:ext uri="{FF2B5EF4-FFF2-40B4-BE49-F238E27FC236}">
-                <a16:creationId xmlns:a16="http://schemas.microsoft.com/office/drawing/2014/main" id="{CC57AD2D-FE53-40EE-84F5-AA59BDFEFDED}"/>
+                <a16:creationId xmlns:a16="http://schemas.microsoft.com/office/drawing/2014/main" id="{CAF1376F-1869-4201-8F9F-AD246E606DAE}"/>
               </a:ext>
             </a:extLst>
           </p:cNvPr>
@@ -12972,9 +12972,9 @@
                 <a:solidFill>
                   <a:srgbClr val="5B6472"/>
                 </a:solidFill>
-                <a:latin typeface="Microsoft YaHei"/>
-                <a:ea typeface="Microsoft YaHei"/>
-                <a:cs typeface="Microsoft YaHei"/>
+                <a:latin typeface="Aptos"/>
+                <a:ea typeface="Aptos"/>
+                <a:cs typeface="Aptos"/>
               </a:defRPr>
             </a:pPr>
             <a:r>
@@ -12982,9 +12982,9 @@
                 <a:solidFill>
                   <a:srgbClr val="5B6472"/>
                 </a:solidFill>
-                <a:latin typeface="Microsoft YaHei"/>
-                <a:ea typeface="Microsoft YaHei"/>
-                <a:cs typeface="Microsoft YaHei"/>
+                <a:latin typeface="Aptos"/>
+                <a:ea typeface="Aptos"/>
+                <a:cs typeface="Aptos"/>
               </a:rPr>
               <a:t>B x L_eff</a:t>
             </a:r>
@@ -12996,7 +12996,7 @@
           <p:cNvPr id="40" name="">
             <a:extLst xmlns:a="http://schemas.openxmlformats.org/drawingml/2006/main">
               <a:ext uri="{FF2B5EF4-FFF2-40B4-BE49-F238E27FC236}">
-                <a16:creationId xmlns:a16="http://schemas.microsoft.com/office/drawing/2014/main" id="{DCE83F58-D7C7-4939-B118-EC3693E023F2}"/>
+                <a16:creationId xmlns:a16="http://schemas.microsoft.com/office/drawing/2014/main" id="{DAC48E1D-2CD5-4806-A7AA-610FAB957E1D}"/>
               </a:ext>
             </a:extLst>
           </p:cNvPr>
@@ -13029,7 +13029,7 @@
           <p:cNvPr id="41" name="">
             <a:extLst xmlns:a="http://schemas.openxmlformats.org/drawingml/2006/main">
               <a:ext uri="{FF2B5EF4-FFF2-40B4-BE49-F238E27FC236}">
-                <a16:creationId xmlns:a16="http://schemas.microsoft.com/office/drawing/2014/main" id="{D5CA5AD8-A879-474B-8D16-250F8353603B}"/>
+                <a16:creationId xmlns:a16="http://schemas.microsoft.com/office/drawing/2014/main" id="{4FAAF6A5-BC51-4950-8EDF-C9476754232E}"/>
               </a:ext>
             </a:extLst>
           </p:cNvPr>
@@ -13069,9 +13069,9 @@
                 <a:solidFill>
                   <a:srgbClr val="5B6472"/>
                 </a:solidFill>
-                <a:latin typeface="Microsoft YaHei"/>
-                <a:ea typeface="Microsoft YaHei"/>
-                <a:cs typeface="Microsoft YaHei"/>
+                <a:latin typeface="Aptos"/>
+                <a:ea typeface="Aptos"/>
+                <a:cs typeface="Aptos"/>
               </a:defRPr>
             </a:pPr>
             <a:r>
@@ -13079,11 +13079,11 @@
                 <a:solidFill>
                   <a:srgbClr val="5B6472"/>
                 </a:solidFill>
-                <a:latin typeface="Microsoft YaHei"/>
-                <a:ea typeface="Microsoft YaHei"/>
-                <a:cs typeface="Microsoft YaHei"/>
-              </a:rPr>
-              <a:t>相对 Doppler slope</a:t>
+                <a:latin typeface="Aptos"/>
+                <a:ea typeface="Aptos"/>
+                <a:cs typeface="Aptos"/>
+              </a:rPr>
+              <a:t>Relative Doppler slope</a:t>
             </a:r>
           </a:p>
         </p:txBody>
@@ -13093,7 +13093,7 @@
           <p:cNvPr id="42" name="">
             <a:extLst xmlns:a="http://schemas.openxmlformats.org/drawingml/2006/main">
               <a:ext uri="{FF2B5EF4-FFF2-40B4-BE49-F238E27FC236}">
-                <a16:creationId xmlns:a16="http://schemas.microsoft.com/office/drawing/2014/main" id="{4D4C5D78-DDE1-4C71-BD12-7416468F12C1}"/>
+                <a16:creationId xmlns:a16="http://schemas.microsoft.com/office/drawing/2014/main" id="{A2DC25B2-A105-44E7-B469-B901122F787B}"/>
               </a:ext>
             </a:extLst>
           </p:cNvPr>
@@ -13126,7 +13126,7 @@
           <p:cNvPr id="43" name="">
             <a:extLst xmlns:a="http://schemas.openxmlformats.org/drawingml/2006/main">
               <a:ext uri="{FF2B5EF4-FFF2-40B4-BE49-F238E27FC236}">
-                <a16:creationId xmlns:a16="http://schemas.microsoft.com/office/drawing/2014/main" id="{F431C832-E323-4A98-93C1-16B999E17A14}"/>
+                <a16:creationId xmlns:a16="http://schemas.microsoft.com/office/drawing/2014/main" id="{B1912D56-1F46-4744-A859-6CEBB94C8B6D}"/>
               </a:ext>
             </a:extLst>
           </p:cNvPr>
@@ -13190,7 +13190,7 @@
           <p:cNvPr id="44" name="">
             <a:extLst xmlns:a="http://schemas.openxmlformats.org/drawingml/2006/main">
               <a:ext uri="{FF2B5EF4-FFF2-40B4-BE49-F238E27FC236}">
-                <a16:creationId xmlns:a16="http://schemas.microsoft.com/office/drawing/2014/main" id="{FBA92F1B-3C9D-44DF-B659-DF004BDA1AA4}"/>
+                <a16:creationId xmlns:a16="http://schemas.microsoft.com/office/drawing/2014/main" id="{7DC4B6AD-11A6-42E9-ACAF-4982033B5A49}"/>
               </a:ext>
             </a:extLst>
           </p:cNvPr>
@@ -13223,7 +13223,7 @@
           <p:cNvPr id="45" name="">
             <a:extLst xmlns:a="http://schemas.openxmlformats.org/drawingml/2006/main">
               <a:ext uri="{FF2B5EF4-FFF2-40B4-BE49-F238E27FC236}">
-                <a16:creationId xmlns:a16="http://schemas.microsoft.com/office/drawing/2014/main" id="{8C199E09-1BC3-4027-BACA-D43B7A98E50E}"/>
+                <a16:creationId xmlns:a16="http://schemas.microsoft.com/office/drawing/2014/main" id="{455BE1A1-9CE0-42C9-B45C-9912737F3E51}"/>
               </a:ext>
             </a:extLst>
           </p:cNvPr>
@@ -13263,9 +13263,9 @@
                 <a:solidFill>
                   <a:srgbClr val="5B6472"/>
                 </a:solidFill>
-                <a:latin typeface="Microsoft YaHei"/>
-                <a:ea typeface="Microsoft YaHei"/>
-                <a:cs typeface="Microsoft YaHei"/>
+                <a:latin typeface="Aptos"/>
+                <a:ea typeface="Aptos"/>
+                <a:cs typeface="Aptos"/>
               </a:defRPr>
             </a:pPr>
             <a:r>
@@ -13273,9 +13273,9 @@
                 <a:solidFill>
                   <a:srgbClr val="5B6472"/>
                 </a:solidFill>
-                <a:latin typeface="Microsoft YaHei"/>
-                <a:ea typeface="Microsoft YaHei"/>
-                <a:cs typeface="Microsoft YaHei"/>
+                <a:latin typeface="Aptos"/>
+                <a:ea typeface="Aptos"/>
+                <a:cs typeface="Aptos"/>
               </a:rPr>
               <a:t>B x L_eff</a:t>
             </a:r>
@@ -13287,7 +13287,7 @@
           <p:cNvPr id="46" name="">
             <a:extLst xmlns:a="http://schemas.openxmlformats.org/drawingml/2006/main">
               <a:ext uri="{FF2B5EF4-FFF2-40B4-BE49-F238E27FC236}">
-                <a16:creationId xmlns:a16="http://schemas.microsoft.com/office/drawing/2014/main" id="{ED75FD0C-BF73-4A02-90C6-44761785052F}"/>
+                <a16:creationId xmlns:a16="http://schemas.microsoft.com/office/drawing/2014/main" id="{A03F694E-56E1-4294-9CCD-30B0C82CB278}"/>
               </a:ext>
             </a:extLst>
           </p:cNvPr>
@@ -13320,7 +13320,7 @@
           <p:cNvPr id="47" name="">
             <a:extLst xmlns:a="http://schemas.openxmlformats.org/drawingml/2006/main">
               <a:ext uri="{FF2B5EF4-FFF2-40B4-BE49-F238E27FC236}">
-                <a16:creationId xmlns:a16="http://schemas.microsoft.com/office/drawing/2014/main" id="{57D35E43-8BD3-4D36-BCB0-5A444B3D5ED1}"/>
+                <a16:creationId xmlns:a16="http://schemas.microsoft.com/office/drawing/2014/main" id="{CE4FFD75-010E-4CD9-954C-BCB4B6F63D64}"/>
               </a:ext>
             </a:extLst>
           </p:cNvPr>
@@ -13360,9 +13360,9 @@
                 <a:solidFill>
                   <a:srgbClr val="5B6472"/>
                 </a:solidFill>
-                <a:latin typeface="Microsoft YaHei"/>
-                <a:ea typeface="Microsoft YaHei"/>
-                <a:cs typeface="Microsoft YaHei"/>
+                <a:latin typeface="Aptos"/>
+                <a:ea typeface="Aptos"/>
+                <a:cs typeface="Aptos"/>
               </a:defRPr>
             </a:pPr>
             <a:r>
@@ -13370,11 +13370,11 @@
                 <a:solidFill>
                   <a:srgbClr val="5B6472"/>
                 </a:solidFill>
-                <a:latin typeface="Microsoft YaHei"/>
-                <a:ea typeface="Microsoft YaHei"/>
-                <a:cs typeface="Microsoft YaHei"/>
-              </a:rPr>
-              <a:t>非负路径强度</a:t>
+                <a:latin typeface="Aptos"/>
+                <a:ea typeface="Aptos"/>
+                <a:cs typeface="Aptos"/>
+              </a:rPr>
+              <a:t>Non-negative path strength</a:t>
             </a:r>
           </a:p>
         </p:txBody>
@@ -13384,7 +13384,7 @@
           <p:cNvPr id="48" name="">
             <a:extLst xmlns:a="http://schemas.openxmlformats.org/drawingml/2006/main">
               <a:ext uri="{FF2B5EF4-FFF2-40B4-BE49-F238E27FC236}">
-                <a16:creationId xmlns:a16="http://schemas.microsoft.com/office/drawing/2014/main" id="{299E6FEE-0932-4877-95CA-359482E9F22E}"/>
+                <a16:creationId xmlns:a16="http://schemas.microsoft.com/office/drawing/2014/main" id="{F4D2127A-2E55-4394-9B13-44E09942920D}"/>
               </a:ext>
             </a:extLst>
           </p:cNvPr>
@@ -13417,7 +13417,7 @@
           <p:cNvPr id="49" name="">
             <a:extLst xmlns:a="http://schemas.openxmlformats.org/drawingml/2006/main">
               <a:ext uri="{FF2B5EF4-FFF2-40B4-BE49-F238E27FC236}">
-                <a16:creationId xmlns:a16="http://schemas.microsoft.com/office/drawing/2014/main" id="{0C1C7137-576C-4744-B8AD-2219AA67EF71}"/>
+                <a16:creationId xmlns:a16="http://schemas.microsoft.com/office/drawing/2014/main" id="{CCC2357E-9F16-48E8-A870-37EA3C95AFF1}"/>
               </a:ext>
             </a:extLst>
           </p:cNvPr>
@@ -13481,7 +13481,7 @@
           <p:cNvPr id="50" name="">
             <a:extLst xmlns:a="http://schemas.openxmlformats.org/drawingml/2006/main">
               <a:ext uri="{FF2B5EF4-FFF2-40B4-BE49-F238E27FC236}">
-                <a16:creationId xmlns:a16="http://schemas.microsoft.com/office/drawing/2014/main" id="{B6E73346-B45F-4FD6-957B-8C1B2B985A46}"/>
+                <a16:creationId xmlns:a16="http://schemas.microsoft.com/office/drawing/2014/main" id="{6056C551-F49B-444A-8EF3-5A2295864B62}"/>
               </a:ext>
             </a:extLst>
           </p:cNvPr>
@@ -13514,7 +13514,7 @@
           <p:cNvPr id="51" name="">
             <a:extLst xmlns:a="http://schemas.openxmlformats.org/drawingml/2006/main">
               <a:ext uri="{FF2B5EF4-FFF2-40B4-BE49-F238E27FC236}">
-                <a16:creationId xmlns:a16="http://schemas.microsoft.com/office/drawing/2014/main" id="{C4B6E976-E9BC-407F-B1C6-CB455A7236B2}"/>
+                <a16:creationId xmlns:a16="http://schemas.microsoft.com/office/drawing/2014/main" id="{90A83316-8861-4E78-9730-98E4669F057F}"/>
               </a:ext>
             </a:extLst>
           </p:cNvPr>
@@ -13554,9 +13554,9 @@
                 <a:solidFill>
                   <a:srgbClr val="5B6472"/>
                 </a:solidFill>
-                <a:latin typeface="Microsoft YaHei"/>
-                <a:ea typeface="Microsoft YaHei"/>
-                <a:cs typeface="Microsoft YaHei"/>
+                <a:latin typeface="Aptos"/>
+                <a:ea typeface="Aptos"/>
+                <a:cs typeface="Aptos"/>
               </a:defRPr>
             </a:pPr>
             <a:r>
@@ -13564,9 +13564,9 @@
                 <a:solidFill>
                   <a:srgbClr val="5B6472"/>
                 </a:solidFill>
-                <a:latin typeface="Microsoft YaHei"/>
-                <a:ea typeface="Microsoft YaHei"/>
-                <a:cs typeface="Microsoft YaHei"/>
+                <a:latin typeface="Aptos"/>
+                <a:ea typeface="Aptos"/>
+                <a:cs typeface="Aptos"/>
               </a:rPr>
               <a:t>B x L_eff</a:t>
             </a:r>
@@ -13578,7 +13578,7 @@
           <p:cNvPr id="52" name="">
             <a:extLst xmlns:a="http://schemas.openxmlformats.org/drawingml/2006/main">
               <a:ext uri="{FF2B5EF4-FFF2-40B4-BE49-F238E27FC236}">
-                <a16:creationId xmlns:a16="http://schemas.microsoft.com/office/drawing/2014/main" id="{84957D19-2291-46A4-9148-E503ECA6460D}"/>
+                <a16:creationId xmlns:a16="http://schemas.microsoft.com/office/drawing/2014/main" id="{6DFDECC5-D212-44DF-8E6D-C6A05A18CDAC}"/>
               </a:ext>
             </a:extLst>
           </p:cNvPr>
@@ -13611,7 +13611,7 @@
           <p:cNvPr id="53" name="">
             <a:extLst xmlns:a="http://schemas.openxmlformats.org/drawingml/2006/main">
               <a:ext uri="{FF2B5EF4-FFF2-40B4-BE49-F238E27FC236}">
-                <a16:creationId xmlns:a16="http://schemas.microsoft.com/office/drawing/2014/main" id="{A04B24BD-2FE1-4550-B065-A939167CEE67}"/>
+                <a16:creationId xmlns:a16="http://schemas.microsoft.com/office/drawing/2014/main" id="{919AE611-B9F1-4D01-B7A9-6F25705738CA}"/>
               </a:ext>
             </a:extLst>
           </p:cNvPr>
@@ -13651,9 +13651,9 @@
                 <a:solidFill>
                   <a:srgbClr val="5B6472"/>
                 </a:solidFill>
-                <a:latin typeface="Microsoft YaHei"/>
-                <a:ea typeface="Microsoft YaHei"/>
-                <a:cs typeface="Microsoft YaHei"/>
+                <a:latin typeface="Aptos"/>
+                <a:ea typeface="Aptos"/>
+                <a:cs typeface="Aptos"/>
               </a:defRPr>
             </a:pPr>
             <a:r>
@@ -13661,11 +13661,11 @@
                 <a:solidFill>
                   <a:srgbClr val="5B6472"/>
                 </a:solidFill>
-                <a:latin typeface="Microsoft YaHei"/>
-                <a:ea typeface="Microsoft YaHei"/>
-                <a:cs typeface="Microsoft YaHei"/>
-              </a:rPr>
-              <a:t>路径存在概率或全 1 legacy fallback</a:t>
+                <a:latin typeface="Aptos"/>
+                <a:ea typeface="Aptos"/>
+                <a:cs typeface="Aptos"/>
+              </a:rPr>
+              <a:t>Path existence probability or all-ones legacy fallback</a:t>
             </a:r>
           </a:p>
         </p:txBody>
@@ -13675,7 +13675,7 @@
           <p:cNvPr id="54" name="">
             <a:extLst xmlns:a="http://schemas.openxmlformats.org/drawingml/2006/main">
               <a:ext uri="{FF2B5EF4-FFF2-40B4-BE49-F238E27FC236}">
-                <a16:creationId xmlns:a16="http://schemas.microsoft.com/office/drawing/2014/main" id="{7B01F984-C783-4D10-B694-3FDA4FEB715F}"/>
+                <a16:creationId xmlns:a16="http://schemas.microsoft.com/office/drawing/2014/main" id="{9612DF4A-8F7D-4CB5-9DF7-AE9EA7386F51}"/>
               </a:ext>
             </a:extLst>
           </p:cNvPr>
@@ -13713,9 +13713,9 @@
                 <a:solidFill>
                   <a:srgbClr val="111827"/>
                 </a:solidFill>
-                <a:latin typeface="Microsoft YaHei"/>
-                <a:ea typeface="Microsoft YaHei"/>
-                <a:cs typeface="Microsoft YaHei"/>
+                <a:latin typeface="Aptos"/>
+                <a:ea typeface="Aptos"/>
+                <a:cs typeface="Aptos"/>
               </a:defRPr>
             </a:pPr>
             <a:r>
@@ -13723,9 +13723,9 @@
                 <a:solidFill>
                   <a:srgbClr val="111827"/>
                 </a:solidFill>
-                <a:latin typeface="Microsoft YaHei"/>
-                <a:ea typeface="Microsoft YaHei"/>
-                <a:cs typeface="Microsoft YaHei"/>
+                <a:latin typeface="Aptos"/>
+                <a:ea typeface="Aptos"/>
+                <a:cs typeface="Aptos"/>
               </a:rPr>
               <a:t>recoveryMode</a:t>
             </a:r>
@@ -13736,9 +13736,9 @@
                 <a:solidFill>
                   <a:srgbClr val="111827"/>
                 </a:solidFill>
-                <a:latin typeface="Microsoft YaHei"/>
-                <a:ea typeface="Microsoft YaHei"/>
-                <a:cs typeface="Microsoft YaHei"/>
+                <a:latin typeface="Aptos"/>
+                <a:ea typeface="Aptos"/>
+                <a:cs typeface="Aptos"/>
               </a:defRPr>
             </a:pPr>
             <a:r>
@@ -13746,9 +13746,9 @@
                 <a:solidFill>
                   <a:srgbClr val="111827"/>
                 </a:solidFill>
-                <a:latin typeface="Microsoft YaHei"/>
-                <a:ea typeface="Microsoft YaHei"/>
-                <a:cs typeface="Microsoft YaHei"/>
+                <a:latin typeface="Aptos"/>
+                <a:ea typeface="Aptos"/>
+                <a:cs typeface="Aptos"/>
               </a:rPr>
               <a:t>'ls_from_packed_theta'</a:t>
             </a:r>
@@ -13760,7 +13760,7 @@
           <p:cNvPr id="55" name="">
             <a:extLst xmlns:a="http://schemas.openxmlformats.org/drawingml/2006/main">
               <a:ext uri="{FF2B5EF4-FFF2-40B4-BE49-F238E27FC236}">
-                <a16:creationId xmlns:a16="http://schemas.microsoft.com/office/drawing/2014/main" id="{0563C26F-8B8F-431F-A3D6-DEDB2BC187AF}"/>
+                <a16:creationId xmlns:a16="http://schemas.microsoft.com/office/drawing/2014/main" id="{7108989C-79FD-478A-A1CF-49255726FAD7}"/>
               </a:ext>
             </a:extLst>
           </p:cNvPr>
@@ -13798,9 +13798,9 @@
                 <a:solidFill>
                   <a:srgbClr val="111827"/>
                 </a:solidFill>
-                <a:latin typeface="Microsoft YaHei"/>
-                <a:ea typeface="Microsoft YaHei"/>
-                <a:cs typeface="Microsoft YaHei"/>
+                <a:latin typeface="Aptos"/>
+                <a:ea typeface="Aptos"/>
+                <a:cs typeface="Aptos"/>
               </a:defRPr>
             </a:pPr>
             <a:r>
@@ -13808,9 +13808,9 @@
                 <a:solidFill>
                   <a:srgbClr val="111827"/>
                 </a:solidFill>
-                <a:latin typeface="Microsoft YaHei"/>
-                <a:ea typeface="Microsoft YaHei"/>
-                <a:cs typeface="Microsoft YaHei"/>
+                <a:latin typeface="Aptos"/>
+                <a:ea typeface="Aptos"/>
+                <a:cs typeface="Aptos"/>
               </a:rPr>
               <a:t>No G_hat branch</a:t>
             </a:r>
@@ -13821,9 +13821,9 @@
                 <a:solidFill>
                   <a:srgbClr val="111827"/>
                 </a:solidFill>
-                <a:latin typeface="Microsoft YaHei"/>
-                <a:ea typeface="Microsoft YaHei"/>
-                <a:cs typeface="Microsoft YaHei"/>
+                <a:latin typeface="Aptos"/>
+                <a:ea typeface="Aptos"/>
+                <a:cs typeface="Aptos"/>
               </a:defRPr>
             </a:pPr>
             <a:r>
@@ -13831,9 +13831,9 @@
                 <a:solidFill>
                   <a:srgbClr val="111827"/>
                 </a:solidFill>
-                <a:latin typeface="Microsoft YaHei"/>
-                <a:ea typeface="Microsoft YaHei"/>
-                <a:cs typeface="Microsoft YaHei"/>
+                <a:latin typeface="Aptos"/>
+                <a:ea typeface="Aptos"/>
+                <a:cs typeface="Aptos"/>
               </a:rPr>
               <a:t>encoder estimates physical theta only</a:t>
             </a:r>
@@ -13845,7 +13845,7 @@
           <p:cNvPr id="56" name="">
             <a:extLst xmlns:a="http://schemas.openxmlformats.org/drawingml/2006/main">
               <a:ext uri="{FF2B5EF4-FFF2-40B4-BE49-F238E27FC236}">
-                <a16:creationId xmlns:a16="http://schemas.microsoft.com/office/drawing/2014/main" id="{2D8F2CEA-3287-4F7F-8C9F-EBA4CAE08315}"/>
+                <a16:creationId xmlns:a16="http://schemas.microsoft.com/office/drawing/2014/main" id="{1418E5E6-279E-4F0F-9D37-1B447F203F17}"/>
               </a:ext>
             </a:extLst>
           </p:cNvPr>
@@ -13883,9 +13883,9 @@
                 <a:solidFill>
                   <a:srgbClr val="111827"/>
                 </a:solidFill>
-                <a:latin typeface="Microsoft YaHei"/>
-                <a:ea typeface="Microsoft YaHei"/>
-                <a:cs typeface="Microsoft YaHei"/>
+                <a:latin typeface="Aptos"/>
+                <a:ea typeface="Aptos"/>
+                <a:cs typeface="Aptos"/>
               </a:defRPr>
             </a:pPr>
             <a:r>
@@ -13893,9 +13893,9 @@
                 <a:solidFill>
                   <a:srgbClr val="111827"/>
                 </a:solidFill>
-                <a:latin typeface="Microsoft YaHei"/>
-                <a:ea typeface="Microsoft YaHei"/>
-                <a:cs typeface="Microsoft YaHei"/>
+                <a:latin typeface="Aptos"/>
+                <a:ea typeface="Aptos"/>
+                <a:cs typeface="Aptos"/>
               </a:rPr>
               <a:t>LS recovery</a:t>
             </a:r>
@@ -13906,9 +13906,9 @@
                 <a:solidFill>
                   <a:srgbClr val="111827"/>
                 </a:solidFill>
-                <a:latin typeface="Microsoft YaHei"/>
-                <a:ea typeface="Microsoft YaHei"/>
-                <a:cs typeface="Microsoft YaHei"/>
+                <a:latin typeface="Aptos"/>
+                <a:ea typeface="Aptos"/>
+                <a:cs typeface="Aptos"/>
               </a:defRPr>
             </a:pPr>
             <a:r>
@@ -13916,9 +13916,9 @@
                 <a:solidFill>
                   <a:srgbClr val="111827"/>
                 </a:solidFill>
-                <a:latin typeface="Microsoft YaHei"/>
-                <a:ea typeface="Microsoft YaHei"/>
-                <a:cs typeface="Microsoft YaHei"/>
+                <a:latin typeface="Aptos"/>
+                <a:ea typeface="Aptos"/>
+                <a:cs typeface="Aptos"/>
               </a:rPr>
               <a:t>uses packed theta downstream</a:t>
             </a:r>
@@ -13930,7 +13930,7 @@
           <p:cNvPr id="57" name="">
             <a:extLst xmlns:a="http://schemas.openxmlformats.org/drawingml/2006/main">
               <a:ext uri="{FF2B5EF4-FFF2-40B4-BE49-F238E27FC236}">
-                <a16:creationId xmlns:a16="http://schemas.microsoft.com/office/drawing/2014/main" id="{BAAFB143-E1D4-4E5A-A88B-65CF3CC737AA}"/>
+                <a16:creationId xmlns:a16="http://schemas.microsoft.com/office/drawing/2014/main" id="{89BE0158-607F-491C-A185-ADCBC89D6349}"/>
               </a:ext>
             </a:extLst>
           </p:cNvPr>
@@ -13963,7 +13963,7 @@
           <p:cNvPr id="58" name="">
             <a:extLst xmlns:a="http://schemas.openxmlformats.org/drawingml/2006/main">
               <a:ext uri="{FF2B5EF4-FFF2-40B4-BE49-F238E27FC236}">
-                <a16:creationId xmlns:a16="http://schemas.microsoft.com/office/drawing/2014/main" id="{43BEEAD9-02BB-41C8-863C-0BD6D6312DFC}"/>
+                <a16:creationId xmlns:a16="http://schemas.microsoft.com/office/drawing/2014/main" id="{4952E358-FB8F-4665-8988-79351E244EE9}"/>
               </a:ext>
             </a:extLst>
           </p:cNvPr>
@@ -13996,7 +13996,7 @@
           <p:cNvPr id="59" name="">
             <a:extLst xmlns:a="http://schemas.openxmlformats.org/drawingml/2006/main">
               <a:ext uri="{FF2B5EF4-FFF2-40B4-BE49-F238E27FC236}">
-                <a16:creationId xmlns:a16="http://schemas.microsoft.com/office/drawing/2014/main" id="{95430586-5916-4113-807A-9733AD012DBA}"/>
+                <a16:creationId xmlns:a16="http://schemas.microsoft.com/office/drawing/2014/main" id="{21AB5B0D-0160-47E3-A8FE-BF979133B7DF}"/>
               </a:ext>
             </a:extLst>
           </p:cNvPr>
@@ -14029,7 +14029,7 @@
           <p:cNvPr id="60" name="">
             <a:extLst xmlns:a="http://schemas.openxmlformats.org/drawingml/2006/main">
               <a:ext uri="{FF2B5EF4-FFF2-40B4-BE49-F238E27FC236}">
-                <a16:creationId xmlns:a16="http://schemas.microsoft.com/office/drawing/2014/main" id="{DE894827-21EF-4AD2-BE45-5DE3F9DAE1B9}"/>
+                <a16:creationId xmlns:a16="http://schemas.microsoft.com/office/drawing/2014/main" id="{883C53CA-6249-4DA8-A160-6264E9312071}"/>
               </a:ext>
             </a:extLst>
           </p:cNvPr>
@@ -14069,9 +14069,9 @@
                 <a:solidFill>
                   <a:srgbClr val="5B6472"/>
                 </a:solidFill>
-                <a:latin typeface="Microsoft YaHei"/>
-                <a:ea typeface="Microsoft YaHei"/>
-                <a:cs typeface="Microsoft YaHei"/>
+                <a:latin typeface="Aptos"/>
+                <a:ea typeface="Aptos"/>
+                <a:cs typeface="Aptos"/>
               </a:defRPr>
             </a:pPr>
             <a:r>
@@ -14079,11 +14079,11 @@
                 <a:solidFill>
                   <a:srgbClr val="5B6472"/>
                 </a:solidFill>
-                <a:latin typeface="Microsoft YaHei"/>
-                <a:ea typeface="Microsoft YaHei"/>
-                <a:cs typeface="Microsoft YaHei"/>
-              </a:rPr>
-              <a:t>这页可作为代码讲解的收束：网络负责物理参数估计，恢复步骤交给 LS。</a:t>
+                <a:latin typeface="Aptos"/>
+                <a:ea typeface="Aptos"/>
+                <a:cs typeface="Aptos"/>
+              </a:rPr>
+              <a:t>Use this slide to close the code walkthrough: the network estimates physical parameters, while LS handles recovery.</a:t>
             </a:r>
           </a:p>
         </p:txBody>
@@ -14093,7 +14093,7 @@
           <p:cNvPr id="61" name="">
             <a:extLst xmlns:a="http://schemas.openxmlformats.org/drawingml/2006/main">
               <a:ext uri="{FF2B5EF4-FFF2-40B4-BE49-F238E27FC236}">
-                <a16:creationId xmlns:a16="http://schemas.microsoft.com/office/drawing/2014/main" id="{5F69AD8E-59A8-4070-AF8C-CD3CB6EF5775}"/>
+                <a16:creationId xmlns:a16="http://schemas.microsoft.com/office/drawing/2014/main" id="{9B07A505-E5B8-4D12-8A7E-5EFF03457C93}"/>
               </a:ext>
             </a:extLst>
           </p:cNvPr>
@@ -14126,7 +14126,7 @@
           <p:cNvPr id="62" name="">
             <a:extLst xmlns:a="http://schemas.openxmlformats.org/drawingml/2006/main">
               <a:ext uri="{FF2B5EF4-FFF2-40B4-BE49-F238E27FC236}">
-                <a16:creationId xmlns:a16="http://schemas.microsoft.com/office/drawing/2014/main" id="{92EB9894-04AC-4F2A-9DEA-A6B7A4536242}"/>
+                <a16:creationId xmlns:a16="http://schemas.microsoft.com/office/drawing/2014/main" id="{EA94B4E3-6D94-4721-A2D4-88E79D76AA48}"/>
               </a:ext>
             </a:extLst>
           </p:cNvPr>
@@ -14166,9 +14166,9 @@
                 <a:solidFill>
                   <a:srgbClr val="5B6472"/>
                 </a:solidFill>
-                <a:latin typeface="Microsoft YaHei"/>
-                <a:ea typeface="Microsoft YaHei"/>
-                <a:cs typeface="Microsoft YaHei"/>
+                <a:latin typeface="Aptos"/>
+                <a:ea typeface="Aptos"/>
+                <a:cs typeface="Aptos"/>
               </a:defRPr>
             </a:pPr>
             <a:r>
@@ -14176,11 +14176,11 @@
                 <a:solidFill>
                   <a:srgbClr val="5B6472"/>
                 </a:solidFill>
-                <a:latin typeface="Microsoft YaHei"/>
-                <a:ea typeface="Microsoft YaHei"/>
-                <a:cs typeface="Microsoft YaHei"/>
-              </a:rPr>
-              <a:t>重点强调 gauge-fixed theta 与 alpha/path_prob 是后续恢复的接口。</a:t>
+                <a:latin typeface="Aptos"/>
+                <a:ea typeface="Aptos"/>
+                <a:cs typeface="Aptos"/>
+              </a:rPr>
+              <a:t>The main downstream interface is gauge-fixed theta together with alpha and path_prob.</a:t>
             </a:r>
           </a:p>
         </p:txBody>
@@ -14188,7 +14188,7 @@
     </p:spTree>
     <p:extLst>
       <p:ext uri="{BB962C8B-B14F-4D97-AF65-F5344CB8AC3E}">
-        <p14:creationId xmlns:p14="http://schemas.microsoft.com/office/powerpoint/2010/main" val="1239722216"/>
+        <p14:creationId xmlns:p14="http://schemas.microsoft.com/office/powerpoint/2010/main" val="1867780115"/>
       </p:ext>
     </p:extLst>
   </p:cSld>
